--- a/Presentation_Projet_Groupe_A.pptx
+++ b/Presentation_Projet_Groupe_A.pptx
@@ -5,20 +5,21 @@
     <p:sldMasterId id="2147483648" r:id="rId1"/>
   </p:sldMasterIdLst>
   <p:notesMasterIdLst>
-    <p:notesMasterId r:id="rId13"/>
+    <p:notesMasterId r:id="rId14"/>
   </p:notesMasterIdLst>
   <p:sldIdLst>
     <p:sldId id="256" r:id="rId2"/>
     <p:sldId id="257" r:id="rId3"/>
     <p:sldId id="258" r:id="rId4"/>
     <p:sldId id="259" r:id="rId5"/>
-    <p:sldId id="260" r:id="rId6"/>
-    <p:sldId id="266" r:id="rId7"/>
-    <p:sldId id="261" r:id="rId8"/>
-    <p:sldId id="262" r:id="rId9"/>
-    <p:sldId id="263" r:id="rId10"/>
-    <p:sldId id="264" r:id="rId11"/>
-    <p:sldId id="265" r:id="rId12"/>
+    <p:sldId id="267" r:id="rId6"/>
+    <p:sldId id="260" r:id="rId7"/>
+    <p:sldId id="266" r:id="rId8"/>
+    <p:sldId id="261" r:id="rId9"/>
+    <p:sldId id="262" r:id="rId10"/>
+    <p:sldId id="263" r:id="rId11"/>
+    <p:sldId id="264" r:id="rId12"/>
+    <p:sldId id="265" r:id="rId13"/>
   </p:sldIdLst>
   <p:sldSz cx="12192000" cy="6858000"/>
   <p:notesSz cx="6858000" cy="12192000"/>
@@ -499,6 +500,90 @@
 </p:notes>
 </file>
 
+<file path=ppt/notesSlides/notesSlide12.xml><?xml version="1.0" encoding="utf-8"?>
+<p:notes xmlns:a="http://schemas.openxmlformats.org/drawingml/2006/main" xmlns:r="http://schemas.openxmlformats.org/officeDocument/2006/relationships" xmlns:p="http://schemas.openxmlformats.org/presentationml/2006/main">
+  <p:cSld>
+    <p:spTree>
+      <p:nvGrpSpPr>
+        <p:cNvPr id="1" name=""/>
+        <p:cNvGrpSpPr/>
+        <p:nvPr/>
+      </p:nvGrpSpPr>
+      <p:grpSpPr>
+        <a:xfrm>
+          <a:off x="0" y="0"/>
+          <a:ext cx="0" cy="0"/>
+          <a:chOff x="0" y="0"/>
+          <a:chExt cx="0" cy="0"/>
+        </a:xfrm>
+      </p:grpSpPr>
+      <p:sp>
+        <p:nvSpPr>
+          <p:cNvPr id="2" name="Slide Image Placeholder 1"/>
+          <p:cNvSpPr>
+            <a:spLocks noGrp="1" noRot="1" noChangeAspect="1"/>
+          </p:cNvSpPr>
+          <p:nvPr>
+            <p:ph type="sldImg"/>
+          </p:nvPr>
+        </p:nvSpPr>
+        <p:spPr/>
+      </p:sp>
+      <p:sp>
+        <p:nvSpPr>
+          <p:cNvPr id="3" name="Notes Placeholder 2"/>
+          <p:cNvSpPr>
+            <a:spLocks noGrp="1"/>
+          </p:cNvSpPr>
+          <p:nvPr>
+            <p:ph type="body" idx="1"/>
+          </p:nvPr>
+        </p:nvSpPr>
+        <p:spPr/>
+        <p:txBody>
+          <a:bodyPr/>
+          <a:lstStyle/>
+          <a:p>
+            <a:endParaRPr lang="en-US" dirty="0"/>
+          </a:p>
+        </p:txBody>
+      </p:sp>
+      <p:sp>
+        <p:nvSpPr>
+          <p:cNvPr id="4" name="Slide Number Placeholder 3"/>
+          <p:cNvSpPr>
+            <a:spLocks noGrp="1"/>
+          </p:cNvSpPr>
+          <p:nvPr>
+            <p:ph type="sldNum" sz="quarter" idx="10"/>
+          </p:nvPr>
+        </p:nvSpPr>
+        <p:spPr/>
+        <p:txBody>
+          <a:bodyPr/>
+          <a:lstStyle/>
+          <a:p>
+            <a:fld id="{F7021451-1387-4CA6-816F-3879F97B5CBC}" type="slidenum">
+              <a:rPr lang="en-US"/>
+              <a:t>12</a:t>
+            </a:fld>
+            <a:endParaRPr lang="en-US"/>
+          </a:p>
+        </p:txBody>
+      </p:sp>
+    </p:spTree>
+    <p:extLst>
+      <p:ext uri="{BB962C8B-B14F-4D97-AF65-F5344CB8AC3E}">
+        <p14:creationId xmlns:p14="http://schemas.microsoft.com/office/powerpoint/2010/main" val="1024086991"/>
+      </p:ext>
+    </p:extLst>
+  </p:cSld>
+  <p:clrMapOvr>
+    <a:masterClrMapping/>
+  </p:clrMapOvr>
+</p:notes>
+</file>
+
 <file path=ppt/notesSlides/notesSlide2.xml><?xml version="1.0" encoding="utf-8"?>
 <p:notes xmlns:a="http://schemas.openxmlformats.org/drawingml/2006/main" xmlns:r="http://schemas.openxmlformats.org/officeDocument/2006/relationships" xmlns:p="http://schemas.openxmlformats.org/presentationml/2006/main">
   <p:cSld>
@@ -756,6 +841,114 @@
   <p:cSld>
     <p:spTree>
       <p:nvGrpSpPr>
+        <p:cNvPr id="1" name="">
+          <a:extLst>
+            <a:ext uri="{FF2B5EF4-FFF2-40B4-BE49-F238E27FC236}">
+              <a16:creationId xmlns:a16="http://schemas.microsoft.com/office/drawing/2014/main" id="{F25F2A44-24B5-22EF-84EB-5574A92BFBCC}"/>
+            </a:ext>
+          </a:extLst>
+        </p:cNvPr>
+        <p:cNvGrpSpPr/>
+        <p:nvPr/>
+      </p:nvGrpSpPr>
+      <p:grpSpPr>
+        <a:xfrm>
+          <a:off x="0" y="0"/>
+          <a:ext cx="0" cy="0"/>
+          <a:chOff x="0" y="0"/>
+          <a:chExt cx="0" cy="0"/>
+        </a:xfrm>
+      </p:grpSpPr>
+      <p:sp>
+        <p:nvSpPr>
+          <p:cNvPr id="2" name="Slide Image Placeholder 1">
+            <a:extLst>
+              <a:ext uri="{FF2B5EF4-FFF2-40B4-BE49-F238E27FC236}">
+                <a16:creationId xmlns:a16="http://schemas.microsoft.com/office/drawing/2014/main" id="{F5BBF56E-3E8E-7A51-16D6-A37BA5ADEF5A}"/>
+              </a:ext>
+            </a:extLst>
+          </p:cNvPr>
+          <p:cNvSpPr>
+            <a:spLocks noGrp="1" noRot="1" noChangeAspect="1"/>
+          </p:cNvSpPr>
+          <p:nvPr>
+            <p:ph type="sldImg"/>
+          </p:nvPr>
+        </p:nvSpPr>
+        <p:spPr/>
+      </p:sp>
+      <p:sp>
+        <p:nvSpPr>
+          <p:cNvPr id="3" name="Notes Placeholder 2">
+            <a:extLst>
+              <a:ext uri="{FF2B5EF4-FFF2-40B4-BE49-F238E27FC236}">
+                <a16:creationId xmlns:a16="http://schemas.microsoft.com/office/drawing/2014/main" id="{E779A897-F1E2-78EE-C5BC-A2268F3E2E6D}"/>
+              </a:ext>
+            </a:extLst>
+          </p:cNvPr>
+          <p:cNvSpPr>
+            <a:spLocks noGrp="1"/>
+          </p:cNvSpPr>
+          <p:nvPr>
+            <p:ph type="body" idx="1"/>
+          </p:nvPr>
+        </p:nvSpPr>
+        <p:spPr/>
+        <p:txBody>
+          <a:bodyPr/>
+          <a:lstStyle/>
+          <a:p>
+            <a:endParaRPr lang="en-US" dirty="0"/>
+          </a:p>
+        </p:txBody>
+      </p:sp>
+      <p:sp>
+        <p:nvSpPr>
+          <p:cNvPr id="4" name="Slide Number Placeholder 3">
+            <a:extLst>
+              <a:ext uri="{FF2B5EF4-FFF2-40B4-BE49-F238E27FC236}">
+                <a16:creationId xmlns:a16="http://schemas.microsoft.com/office/drawing/2014/main" id="{6652B26F-09D4-65BC-4F5F-41B5F90112BA}"/>
+              </a:ext>
+            </a:extLst>
+          </p:cNvPr>
+          <p:cNvSpPr>
+            <a:spLocks noGrp="1"/>
+          </p:cNvSpPr>
+          <p:nvPr>
+            <p:ph type="sldNum" sz="quarter" idx="10"/>
+          </p:nvPr>
+        </p:nvSpPr>
+        <p:spPr/>
+        <p:txBody>
+          <a:bodyPr/>
+          <a:lstStyle/>
+          <a:p>
+            <a:fld id="{F7021451-1387-4CA6-816F-3879F97B5CBC}" type="slidenum">
+              <a:rPr lang="en-US"/>
+              <a:t>5</a:t>
+            </a:fld>
+            <a:endParaRPr lang="en-US"/>
+          </a:p>
+        </p:txBody>
+      </p:sp>
+    </p:spTree>
+    <p:extLst>
+      <p:ext uri="{BB962C8B-B14F-4D97-AF65-F5344CB8AC3E}">
+        <p14:creationId xmlns:p14="http://schemas.microsoft.com/office/powerpoint/2010/main" val="2358757571"/>
+      </p:ext>
+    </p:extLst>
+  </p:cSld>
+  <p:clrMapOvr>
+    <a:masterClrMapping/>
+  </p:clrMapOvr>
+</p:notes>
+</file>
+
+<file path=ppt/notesSlides/notesSlide6.xml><?xml version="1.0" encoding="utf-8"?>
+<p:notes xmlns:a="http://schemas.openxmlformats.org/drawingml/2006/main" xmlns:r="http://schemas.openxmlformats.org/officeDocument/2006/relationships" xmlns:p="http://schemas.openxmlformats.org/presentationml/2006/main">
+  <p:cSld>
+    <p:spTree>
+      <p:nvGrpSpPr>
         <p:cNvPr id="1" name=""/>
         <p:cNvGrpSpPr/>
         <p:nvPr/>
@@ -816,7 +1009,7 @@
           <a:p>
             <a:fld id="{F7021451-1387-4CA6-816F-3879F97B5CBC}" type="slidenum">
               <a:rPr lang="en-US"/>
-              <a:t>5</a:t>
+              <a:t>6</a:t>
             </a:fld>
             <a:endParaRPr lang="en-US"/>
           </a:p>
@@ -835,7 +1028,7 @@
 </p:notes>
 </file>
 
-<file path=ppt/notesSlides/notesSlide6.xml><?xml version="1.0" encoding="utf-8"?>
+<file path=ppt/notesSlides/notesSlide7.xml><?xml version="1.0" encoding="utf-8"?>
 <p:notes xmlns:a="http://schemas.openxmlformats.org/drawingml/2006/main" xmlns:r="http://schemas.openxmlformats.org/officeDocument/2006/relationships" xmlns:p="http://schemas.openxmlformats.org/presentationml/2006/main">
   <p:cSld>
     <p:spTree>
@@ -924,7 +1117,7 @@
           <a:p>
             <a:fld id="{F7021451-1387-4CA6-816F-3879F97B5CBC}" type="slidenum">
               <a:rPr lang="en-US"/>
-              <a:t>6</a:t>
+              <a:t>7</a:t>
             </a:fld>
             <a:endParaRPr lang="en-US"/>
           </a:p>
@@ -934,90 +1127,6 @@
     <p:extLst>
       <p:ext uri="{BB962C8B-B14F-4D97-AF65-F5344CB8AC3E}">
         <p14:creationId xmlns:p14="http://schemas.microsoft.com/office/powerpoint/2010/main" val="189333768"/>
-      </p:ext>
-    </p:extLst>
-  </p:cSld>
-  <p:clrMapOvr>
-    <a:masterClrMapping/>
-  </p:clrMapOvr>
-</p:notes>
-</file>
-
-<file path=ppt/notesSlides/notesSlide7.xml><?xml version="1.0" encoding="utf-8"?>
-<p:notes xmlns:a="http://schemas.openxmlformats.org/drawingml/2006/main" xmlns:r="http://schemas.openxmlformats.org/officeDocument/2006/relationships" xmlns:p="http://schemas.openxmlformats.org/presentationml/2006/main">
-  <p:cSld>
-    <p:spTree>
-      <p:nvGrpSpPr>
-        <p:cNvPr id="1" name=""/>
-        <p:cNvGrpSpPr/>
-        <p:nvPr/>
-      </p:nvGrpSpPr>
-      <p:grpSpPr>
-        <a:xfrm>
-          <a:off x="0" y="0"/>
-          <a:ext cx="0" cy="0"/>
-          <a:chOff x="0" y="0"/>
-          <a:chExt cx="0" cy="0"/>
-        </a:xfrm>
-      </p:grpSpPr>
-      <p:sp>
-        <p:nvSpPr>
-          <p:cNvPr id="2" name="Slide Image Placeholder 1"/>
-          <p:cNvSpPr>
-            <a:spLocks noGrp="1" noRot="1" noChangeAspect="1"/>
-          </p:cNvSpPr>
-          <p:nvPr>
-            <p:ph type="sldImg"/>
-          </p:nvPr>
-        </p:nvSpPr>
-        <p:spPr/>
-      </p:sp>
-      <p:sp>
-        <p:nvSpPr>
-          <p:cNvPr id="3" name="Notes Placeholder 2"/>
-          <p:cNvSpPr>
-            <a:spLocks noGrp="1"/>
-          </p:cNvSpPr>
-          <p:nvPr>
-            <p:ph type="body" idx="1"/>
-          </p:nvPr>
-        </p:nvSpPr>
-        <p:spPr/>
-        <p:txBody>
-          <a:bodyPr/>
-          <a:lstStyle/>
-          <a:p>
-            <a:endParaRPr lang="en-US" dirty="0"/>
-          </a:p>
-        </p:txBody>
-      </p:sp>
-      <p:sp>
-        <p:nvSpPr>
-          <p:cNvPr id="4" name="Slide Number Placeholder 3"/>
-          <p:cNvSpPr>
-            <a:spLocks noGrp="1"/>
-          </p:cNvSpPr>
-          <p:nvPr>
-            <p:ph type="sldNum" sz="quarter" idx="10"/>
-          </p:nvPr>
-        </p:nvSpPr>
-        <p:spPr/>
-        <p:txBody>
-          <a:bodyPr/>
-          <a:lstStyle/>
-          <a:p>
-            <a:fld id="{F7021451-1387-4CA6-816F-3879F97B5CBC}" type="slidenum">
-              <a:rPr lang="en-US"/>
-              <a:t>7</a:t>
-            </a:fld>
-            <a:endParaRPr lang="en-US"/>
-          </a:p>
-        </p:txBody>
-      </p:sp>
-    </p:spTree>
-    <p:extLst>
-      <p:ext uri="{BB962C8B-B14F-4D97-AF65-F5344CB8AC3E}">
-        <p14:creationId xmlns:p14="http://schemas.microsoft.com/office/powerpoint/2010/main" val="1024086991"/>
       </p:ext>
     </p:extLst>
   </p:cSld>
@@ -1557,7 +1666,7 @@
           <a:bodyPr/>
           <a:lstStyle/>
           <a:p>
-            <a:endParaRPr lang="fr-FR"/>
+            <a:endParaRPr lang="fr-FR" noProof="0" dirty="0"/>
           </a:p>
         </p:txBody>
       </p:sp>
@@ -1586,7 +1695,7 @@
           <a:bodyPr/>
           <a:lstStyle/>
           <a:p>
-            <a:endParaRPr lang="fr-FR"/>
+            <a:endParaRPr lang="fr-FR" noProof="0" dirty="0"/>
           </a:p>
         </p:txBody>
       </p:sp>
@@ -1615,7 +1724,7 @@
           <a:bodyPr/>
           <a:lstStyle/>
           <a:p>
-            <a:endParaRPr lang="fr-FR"/>
+            <a:endParaRPr lang="fr-FR" noProof="0" dirty="0"/>
           </a:p>
         </p:txBody>
       </p:sp>
@@ -1644,7 +1753,7 @@
           <a:bodyPr/>
           <a:lstStyle/>
           <a:p>
-            <a:endParaRPr lang="fr-FR"/>
+            <a:endParaRPr lang="fr-FR" noProof="0" dirty="0"/>
           </a:p>
         </p:txBody>
       </p:sp>
@@ -1673,7 +1782,7 @@
           <a:bodyPr/>
           <a:lstStyle/>
           <a:p>
-            <a:endParaRPr lang="fr-FR"/>
+            <a:endParaRPr lang="fr-FR" noProof="0" dirty="0"/>
           </a:p>
         </p:txBody>
       </p:sp>
@@ -1702,7 +1811,7 @@
           <a:bodyPr/>
           <a:lstStyle/>
           <a:p>
-            <a:endParaRPr lang="fr-FR"/>
+            <a:endParaRPr lang="fr-FR" noProof="0" dirty="0"/>
           </a:p>
         </p:txBody>
       </p:sp>
@@ -1729,7 +1838,7 @@
           <a:bodyPr/>
           <a:lstStyle/>
           <a:p>
-            <a:endParaRPr lang="fr-FR"/>
+            <a:endParaRPr lang="fr-FR" noProof="0" dirty="0"/>
           </a:p>
         </p:txBody>
       </p:sp>
@@ -1782,7 +1891,7 @@
               <a:buNone/>
             </a:pPr>
             <a:r>
-              <a:rPr lang="en-US" sz="2200" dirty="0">
+              <a:rPr lang="fr-FR" sz="2200" noProof="0" dirty="0">
                 <a:solidFill>
                   <a:srgbClr val="BBD8E5"/>
                 </a:solidFill>
@@ -1792,7 +1901,7 @@
               </a:rPr>
               <a:t>Présentation du projet</a:t>
             </a:r>
-            <a:endParaRPr lang="en-US" sz="2200" dirty="0"/>
+            <a:endParaRPr lang="fr-FR" sz="2200" noProof="0" dirty="0"/>
           </a:p>
         </p:txBody>
       </p:sp>
@@ -1821,7 +1930,7 @@
               <a:buNone/>
             </a:pPr>
             <a:r>
-              <a:rPr lang="en-US" sz="5400" b="1" kern="0" spc="200" dirty="0">
+              <a:rPr lang="fr-FR" sz="5400" b="1" kern="0" spc="200" noProof="0" dirty="0">
                 <a:solidFill>
                   <a:srgbClr val="FFFFFF"/>
                 </a:solidFill>
@@ -1831,7 +1940,7 @@
               </a:rPr>
               <a:t>GROUPE A</a:t>
             </a:r>
-            <a:endParaRPr lang="en-US" sz="5400" dirty="0"/>
+            <a:endParaRPr lang="fr-FR" sz="5400" noProof="0" dirty="0"/>
           </a:p>
         </p:txBody>
       </p:sp>
@@ -1860,7 +1969,7 @@
               <a:buNone/>
             </a:pPr>
             <a:r>
-              <a:rPr lang="en-US" sz="1600" dirty="0">
+              <a:rPr lang="fr-FR" sz="1600" noProof="0" dirty="0">
                 <a:solidFill>
                   <a:srgbClr val="9FB7C4"/>
                 </a:solidFill>
@@ -1870,7 +1979,7 @@
               </a:rPr>
               <a:t>Acquisition et analyse d'un signal à partir d'un fichier CSV</a:t>
             </a:r>
-            <a:endParaRPr lang="en-US" sz="1600" dirty="0"/>
+            <a:endParaRPr lang="fr-FR" sz="1600" noProof="0" dirty="0"/>
           </a:p>
         </p:txBody>
       </p:sp>
@@ -1900,7 +2009,7 @@
           <a:bodyPr/>
           <a:lstStyle/>
           <a:p>
-            <a:endParaRPr lang="fr-FR"/>
+            <a:endParaRPr lang="fr-FR" noProof="0" dirty="0"/>
           </a:p>
         </p:txBody>
       </p:sp>
@@ -1929,7 +2038,7 @@
               <a:buNone/>
             </a:pPr>
             <a:r>
-              <a:rPr lang="en-US" sz="1300" dirty="0">
+              <a:rPr lang="fr-FR" sz="1300" noProof="0" dirty="0">
                 <a:solidFill>
                   <a:srgbClr val="7E9CAB"/>
                 </a:solidFill>
@@ -1939,7 +2048,7 @@
               </a:rPr>
               <a:t>Projet de programmation — Master 2</a:t>
             </a:r>
-            <a:endParaRPr lang="en-US" sz="1300" dirty="0"/>
+            <a:endParaRPr lang="fr-FR" sz="1300" noProof="0" dirty="0"/>
           </a:p>
         </p:txBody>
       </p:sp>
@@ -1952,6 +2061,645 @@
 </file>
 
 <file path=ppt/slides/slide10.xml><?xml version="1.0" encoding="utf-8"?>
+<p:sld xmlns:a="http://schemas.openxmlformats.org/drawingml/2006/main" xmlns:r="http://schemas.openxmlformats.org/officeDocument/2006/relationships" xmlns:p="http://schemas.openxmlformats.org/presentationml/2006/main">
+  <p:cSld name="Slide 8">
+    <p:bg>
+      <p:bgPr>
+        <a:solidFill>
+          <a:srgbClr val="21295C"/>
+        </a:solidFill>
+        <a:effectLst/>
+      </p:bgPr>
+    </p:bg>
+    <p:spTree>
+      <p:nvGrpSpPr>
+        <p:cNvPr id="1" name=""/>
+        <p:cNvGrpSpPr/>
+        <p:nvPr/>
+      </p:nvGrpSpPr>
+      <p:grpSpPr>
+        <a:xfrm>
+          <a:off x="0" y="0"/>
+          <a:ext cx="0" cy="0"/>
+          <a:chOff x="0" y="0"/>
+          <a:chExt cx="0" cy="0"/>
+        </a:xfrm>
+      </p:grpSpPr>
+      <p:sp>
+        <p:nvSpPr>
+          <p:cNvPr id="2" name="Text 0"/>
+          <p:cNvSpPr/>
+          <p:nvPr/>
+        </p:nvSpPr>
+        <p:spPr>
+          <a:xfrm>
+            <a:off x="548640" y="411480"/>
+            <a:ext cx="11091672" cy="640080"/>
+          </a:xfrm>
+          <a:prstGeom prst="rect">
+            <a:avLst/>
+          </a:prstGeom>
+          <a:noFill/>
+          <a:ln/>
+        </p:spPr>
+        <p:txBody>
+          <a:bodyPr wrap="square" lIns="0" tIns="0" rIns="0" bIns="0" rtlCol="0" anchor="ctr"/>
+          <a:lstStyle/>
+          <a:p>
+            <a:pPr marL="0" indent="0">
+              <a:buNone/>
+            </a:pPr>
+            <a:r>
+              <a:rPr lang="fr-FR" sz="3000" b="1" noProof="0" dirty="0">
+                <a:solidFill>
+                  <a:srgbClr val="FFFFFF"/>
+                </a:solidFill>
+                <a:latin typeface="Cambria" pitchFamily="34" charset="0"/>
+                <a:ea typeface="Cambria" pitchFamily="34" charset="-122"/>
+                <a:cs typeface="Cambria" pitchFamily="34" charset="-120"/>
+              </a:rPr>
+              <a:t>Difficultés rencontrées</a:t>
+            </a:r>
+            <a:endParaRPr lang="fr-FR" sz="3000" noProof="0" dirty="0"/>
+          </a:p>
+        </p:txBody>
+      </p:sp>
+      <p:sp>
+        <p:nvSpPr>
+          <p:cNvPr id="3" name="Text 1"/>
+          <p:cNvSpPr/>
+          <p:nvPr/>
+        </p:nvSpPr>
+        <p:spPr>
+          <a:xfrm>
+            <a:off x="548640" y="987552"/>
+            <a:ext cx="11091672" cy="365760"/>
+          </a:xfrm>
+          <a:prstGeom prst="rect">
+            <a:avLst/>
+          </a:prstGeom>
+          <a:noFill/>
+          <a:ln/>
+        </p:spPr>
+        <p:txBody>
+          <a:bodyPr wrap="square" lIns="0" tIns="0" rIns="0" bIns="0" rtlCol="0" anchor="ctr"/>
+          <a:lstStyle/>
+          <a:p>
+            <a:pPr marL="0" indent="0">
+              <a:buNone/>
+            </a:pPr>
+            <a:r>
+              <a:rPr lang="fr-FR" sz="1400" i="1" noProof="0" dirty="0">
+                <a:solidFill>
+                  <a:srgbClr val="9FB7C4"/>
+                </a:solidFill>
+                <a:latin typeface="Calibri" pitchFamily="34" charset="0"/>
+                <a:ea typeface="Calibri" pitchFamily="34" charset="-122"/>
+                <a:cs typeface="Calibri" pitchFamily="34" charset="-120"/>
+              </a:rPr>
+              <a:t>Des obstacles progressivement résolus par les tests et le travail collaboratif</a:t>
+            </a:r>
+            <a:endParaRPr lang="fr-FR" sz="1400" noProof="0" dirty="0"/>
+          </a:p>
+        </p:txBody>
+      </p:sp>
+      <p:sp>
+        <p:nvSpPr>
+          <p:cNvPr id="4" name="Shape 2"/>
+          <p:cNvSpPr/>
+          <p:nvPr/>
+        </p:nvSpPr>
+        <p:spPr>
+          <a:xfrm>
+            <a:off x="1097280" y="1874520"/>
+            <a:ext cx="502920" cy="502920"/>
+          </a:xfrm>
+          <a:prstGeom prst="ellipse">
+            <a:avLst/>
+          </a:prstGeom>
+          <a:solidFill>
+            <a:srgbClr val="1C7293"/>
+          </a:solidFill>
+          <a:ln/>
+        </p:spPr>
+        <p:txBody>
+          <a:bodyPr/>
+          <a:lstStyle/>
+          <a:p>
+            <a:endParaRPr lang="fr-FR" noProof="0" dirty="0"/>
+          </a:p>
+        </p:txBody>
+      </p:sp>
+      <p:pic>
+        <p:nvPicPr>
+          <p:cNvPr id="5" name="Image 0" descr="/home/claude/groupA_pptx/icon_warning.png"/>
+          <p:cNvPicPr>
+            <a:picLocks noChangeAspect="1"/>
+          </p:cNvPicPr>
+          <p:nvPr/>
+        </p:nvPicPr>
+        <p:blipFill>
+          <a:blip r:embed="rId3"/>
+          <a:stretch>
+            <a:fillRect/>
+          </a:stretch>
+        </p:blipFill>
+        <p:spPr>
+          <a:xfrm>
+            <a:off x="1210437" y="1987677"/>
+            <a:ext cx="276606" cy="276606"/>
+          </a:xfrm>
+          <a:prstGeom prst="rect">
+            <a:avLst/>
+          </a:prstGeom>
+        </p:spPr>
+      </p:pic>
+      <p:sp>
+        <p:nvSpPr>
+          <p:cNvPr id="6" name="Text 3"/>
+          <p:cNvSpPr/>
+          <p:nvPr/>
+        </p:nvSpPr>
+        <p:spPr>
+          <a:xfrm>
+            <a:off x="1828800" y="1828800"/>
+            <a:ext cx="8686800" cy="594360"/>
+          </a:xfrm>
+          <a:prstGeom prst="rect">
+            <a:avLst/>
+          </a:prstGeom>
+          <a:noFill/>
+          <a:ln/>
+        </p:spPr>
+        <p:txBody>
+          <a:bodyPr wrap="square" lIns="0" tIns="0" rIns="0" bIns="0" rtlCol="0" anchor="ctr"/>
+          <a:lstStyle/>
+          <a:p>
+            <a:pPr marL="0" indent="0">
+              <a:buNone/>
+            </a:pPr>
+            <a:r>
+              <a:rPr lang="fr-FR" sz="1500" noProof="0" dirty="0">
+                <a:solidFill>
+                  <a:srgbClr val="FFFFFF"/>
+                </a:solidFill>
+                <a:latin typeface="Calibri" pitchFamily="34" charset="0"/>
+                <a:ea typeface="Calibri" pitchFamily="34" charset="-122"/>
+                <a:cs typeface="Calibri" pitchFamily="34" charset="-120"/>
+              </a:rPr>
+              <a:t>Prise en main de PyQt5</a:t>
+            </a:r>
+            <a:endParaRPr lang="fr-FR" sz="1500" noProof="0" dirty="0"/>
+          </a:p>
+        </p:txBody>
+      </p:sp>
+      <p:sp>
+        <p:nvSpPr>
+          <p:cNvPr id="7" name="Shape 4"/>
+          <p:cNvSpPr/>
+          <p:nvPr/>
+        </p:nvSpPr>
+        <p:spPr>
+          <a:xfrm>
+            <a:off x="1097280" y="2770632"/>
+            <a:ext cx="502920" cy="502920"/>
+          </a:xfrm>
+          <a:prstGeom prst="ellipse">
+            <a:avLst/>
+          </a:prstGeom>
+          <a:solidFill>
+            <a:srgbClr val="1C7293"/>
+          </a:solidFill>
+          <a:ln/>
+        </p:spPr>
+        <p:txBody>
+          <a:bodyPr/>
+          <a:lstStyle/>
+          <a:p>
+            <a:endParaRPr lang="fr-FR" noProof="0" dirty="0"/>
+          </a:p>
+        </p:txBody>
+      </p:sp>
+      <p:pic>
+        <p:nvPicPr>
+          <p:cNvPr id="8" name="Image 1" descr="/home/claude/groupA_pptx/icon_warning.png"/>
+          <p:cNvPicPr>
+            <a:picLocks noChangeAspect="1"/>
+          </p:cNvPicPr>
+          <p:nvPr/>
+        </p:nvPicPr>
+        <p:blipFill>
+          <a:blip r:embed="rId3"/>
+          <a:stretch>
+            <a:fillRect/>
+          </a:stretch>
+        </p:blipFill>
+        <p:spPr>
+          <a:xfrm>
+            <a:off x="1210437" y="2883789"/>
+            <a:ext cx="276606" cy="276606"/>
+          </a:xfrm>
+          <a:prstGeom prst="rect">
+            <a:avLst/>
+          </a:prstGeom>
+        </p:spPr>
+      </p:pic>
+      <p:sp>
+        <p:nvSpPr>
+          <p:cNvPr id="9" name="Text 5"/>
+          <p:cNvSpPr/>
+          <p:nvPr/>
+        </p:nvSpPr>
+        <p:spPr>
+          <a:xfrm>
+            <a:off x="1828800" y="2724912"/>
+            <a:ext cx="8686800" cy="594360"/>
+          </a:xfrm>
+          <a:prstGeom prst="rect">
+            <a:avLst/>
+          </a:prstGeom>
+          <a:noFill/>
+          <a:ln/>
+        </p:spPr>
+        <p:txBody>
+          <a:bodyPr wrap="square" lIns="0" tIns="0" rIns="0" bIns="0" rtlCol="0" anchor="ctr"/>
+          <a:lstStyle/>
+          <a:p>
+            <a:pPr marL="0" indent="0">
+              <a:buNone/>
+            </a:pPr>
+            <a:r>
+              <a:rPr lang="fr-FR" sz="1500" noProof="0" dirty="0">
+                <a:solidFill>
+                  <a:srgbClr val="FFFFFF"/>
+                </a:solidFill>
+                <a:latin typeface="Calibri" pitchFamily="34" charset="0"/>
+                <a:ea typeface="Calibri" pitchFamily="34" charset="-122"/>
+                <a:cs typeface="Calibri" pitchFamily="34" charset="-120"/>
+              </a:rPr>
+              <a:t>Gestion des événements graphiques</a:t>
+            </a:r>
+            <a:endParaRPr lang="fr-FR" sz="1500" noProof="0" dirty="0"/>
+          </a:p>
+        </p:txBody>
+      </p:sp>
+      <p:sp>
+        <p:nvSpPr>
+          <p:cNvPr id="10" name="Shape 6"/>
+          <p:cNvSpPr/>
+          <p:nvPr/>
+        </p:nvSpPr>
+        <p:spPr>
+          <a:xfrm>
+            <a:off x="1097280" y="3666744"/>
+            <a:ext cx="502920" cy="502920"/>
+          </a:xfrm>
+          <a:prstGeom prst="ellipse">
+            <a:avLst/>
+          </a:prstGeom>
+          <a:solidFill>
+            <a:srgbClr val="1C7293"/>
+          </a:solidFill>
+          <a:ln/>
+        </p:spPr>
+        <p:txBody>
+          <a:bodyPr/>
+          <a:lstStyle/>
+          <a:p>
+            <a:endParaRPr lang="fr-FR" noProof="0" dirty="0"/>
+          </a:p>
+        </p:txBody>
+      </p:sp>
+      <p:pic>
+        <p:nvPicPr>
+          <p:cNvPr id="11" name="Image 2" descr="/home/claude/groupA_pptx/icon_warning.png"/>
+          <p:cNvPicPr>
+            <a:picLocks noChangeAspect="1"/>
+          </p:cNvPicPr>
+          <p:nvPr/>
+        </p:nvPicPr>
+        <p:blipFill>
+          <a:blip r:embed="rId3"/>
+          <a:stretch>
+            <a:fillRect/>
+          </a:stretch>
+        </p:blipFill>
+        <p:spPr>
+          <a:xfrm>
+            <a:off x="1210437" y="3779901"/>
+            <a:ext cx="276606" cy="276606"/>
+          </a:xfrm>
+          <a:prstGeom prst="rect">
+            <a:avLst/>
+          </a:prstGeom>
+        </p:spPr>
+      </p:pic>
+      <p:sp>
+        <p:nvSpPr>
+          <p:cNvPr id="12" name="Text 7"/>
+          <p:cNvSpPr/>
+          <p:nvPr/>
+        </p:nvSpPr>
+        <p:spPr>
+          <a:xfrm>
+            <a:off x="1828800" y="3621024"/>
+            <a:ext cx="8686800" cy="594360"/>
+          </a:xfrm>
+          <a:prstGeom prst="rect">
+            <a:avLst/>
+          </a:prstGeom>
+          <a:noFill/>
+          <a:ln/>
+        </p:spPr>
+        <p:txBody>
+          <a:bodyPr wrap="square" lIns="0" tIns="0" rIns="0" bIns="0" rtlCol="0" anchor="ctr"/>
+          <a:lstStyle/>
+          <a:p>
+            <a:pPr marL="0" indent="0">
+              <a:buNone/>
+            </a:pPr>
+            <a:r>
+              <a:rPr lang="fr-FR" sz="1500" noProof="0" dirty="0">
+                <a:solidFill>
+                  <a:srgbClr val="FFFFFF"/>
+                </a:solidFill>
+                <a:latin typeface="Calibri" pitchFamily="34" charset="0"/>
+                <a:ea typeface="Calibri" pitchFamily="34" charset="-122"/>
+                <a:cs typeface="Calibri" pitchFamily="34" charset="-120"/>
+              </a:rPr>
+              <a:t>Lecture sécurisée des fichiers CSV</a:t>
+            </a:r>
+            <a:endParaRPr lang="fr-FR" sz="1500" noProof="0" dirty="0"/>
+          </a:p>
+        </p:txBody>
+      </p:sp>
+      <p:sp>
+        <p:nvSpPr>
+          <p:cNvPr id="13" name="Shape 8"/>
+          <p:cNvSpPr/>
+          <p:nvPr/>
+        </p:nvSpPr>
+        <p:spPr>
+          <a:xfrm>
+            <a:off x="1097280" y="4562856"/>
+            <a:ext cx="502920" cy="502920"/>
+          </a:xfrm>
+          <a:prstGeom prst="ellipse">
+            <a:avLst/>
+          </a:prstGeom>
+          <a:solidFill>
+            <a:srgbClr val="1C7293"/>
+          </a:solidFill>
+          <a:ln/>
+        </p:spPr>
+        <p:txBody>
+          <a:bodyPr/>
+          <a:lstStyle/>
+          <a:p>
+            <a:endParaRPr lang="fr-FR" noProof="0" dirty="0"/>
+          </a:p>
+        </p:txBody>
+      </p:sp>
+      <p:pic>
+        <p:nvPicPr>
+          <p:cNvPr id="14" name="Image 3" descr="/home/claude/groupA_pptx/icon_warning.png"/>
+          <p:cNvPicPr>
+            <a:picLocks noChangeAspect="1"/>
+          </p:cNvPicPr>
+          <p:nvPr/>
+        </p:nvPicPr>
+        <p:blipFill>
+          <a:blip r:embed="rId3"/>
+          <a:stretch>
+            <a:fillRect/>
+          </a:stretch>
+        </p:blipFill>
+        <p:spPr>
+          <a:xfrm>
+            <a:off x="1210437" y="4676013"/>
+            <a:ext cx="276606" cy="276606"/>
+          </a:xfrm>
+          <a:prstGeom prst="rect">
+            <a:avLst/>
+          </a:prstGeom>
+        </p:spPr>
+      </p:pic>
+      <p:sp>
+        <p:nvSpPr>
+          <p:cNvPr id="15" name="Text 9"/>
+          <p:cNvSpPr/>
+          <p:nvPr/>
+        </p:nvSpPr>
+        <p:spPr>
+          <a:xfrm>
+            <a:off x="1828800" y="4517136"/>
+            <a:ext cx="8686800" cy="594360"/>
+          </a:xfrm>
+          <a:prstGeom prst="rect">
+            <a:avLst/>
+          </a:prstGeom>
+          <a:noFill/>
+          <a:ln/>
+        </p:spPr>
+        <p:txBody>
+          <a:bodyPr wrap="square" lIns="0" tIns="0" rIns="0" bIns="0" rtlCol="0" anchor="ctr"/>
+          <a:lstStyle/>
+          <a:p>
+            <a:pPr marL="0" indent="0">
+              <a:buNone/>
+            </a:pPr>
+            <a:r>
+              <a:rPr lang="fr-FR" sz="1500" noProof="0" dirty="0">
+                <a:solidFill>
+                  <a:srgbClr val="FFFFFF"/>
+                </a:solidFill>
+                <a:latin typeface="Calibri" pitchFamily="34" charset="0"/>
+                <a:ea typeface="Calibri" pitchFamily="34" charset="-122"/>
+                <a:cs typeface="Calibri" pitchFamily="34" charset="-120"/>
+              </a:rPr>
+              <a:t>Respect des normes PEP8</a:t>
+            </a:r>
+            <a:endParaRPr lang="fr-FR" sz="1500" noProof="0" dirty="0"/>
+          </a:p>
+        </p:txBody>
+      </p:sp>
+      <p:sp>
+        <p:nvSpPr>
+          <p:cNvPr id="16" name="Shape 10"/>
+          <p:cNvSpPr/>
+          <p:nvPr/>
+        </p:nvSpPr>
+        <p:spPr>
+          <a:xfrm>
+            <a:off x="1097280" y="5458968"/>
+            <a:ext cx="502920" cy="502920"/>
+          </a:xfrm>
+          <a:prstGeom prst="ellipse">
+            <a:avLst/>
+          </a:prstGeom>
+          <a:solidFill>
+            <a:srgbClr val="1C7293"/>
+          </a:solidFill>
+          <a:ln/>
+        </p:spPr>
+        <p:txBody>
+          <a:bodyPr/>
+          <a:lstStyle/>
+          <a:p>
+            <a:endParaRPr lang="fr-FR" noProof="0" dirty="0"/>
+          </a:p>
+        </p:txBody>
+      </p:sp>
+      <p:pic>
+        <p:nvPicPr>
+          <p:cNvPr id="17" name="Image 4" descr="/home/claude/groupA_pptx/icon_warning.png"/>
+          <p:cNvPicPr>
+            <a:picLocks noChangeAspect="1"/>
+          </p:cNvPicPr>
+          <p:nvPr/>
+        </p:nvPicPr>
+        <p:blipFill>
+          <a:blip r:embed="rId3"/>
+          <a:stretch>
+            <a:fillRect/>
+          </a:stretch>
+        </p:blipFill>
+        <p:spPr>
+          <a:xfrm>
+            <a:off x="1210437" y="5572125"/>
+            <a:ext cx="276606" cy="276606"/>
+          </a:xfrm>
+          <a:prstGeom prst="rect">
+            <a:avLst/>
+          </a:prstGeom>
+        </p:spPr>
+      </p:pic>
+      <p:sp>
+        <p:nvSpPr>
+          <p:cNvPr id="18" name="Text 11"/>
+          <p:cNvSpPr/>
+          <p:nvPr/>
+        </p:nvSpPr>
+        <p:spPr>
+          <a:xfrm>
+            <a:off x="1828800" y="5413248"/>
+            <a:ext cx="8686800" cy="594360"/>
+          </a:xfrm>
+          <a:prstGeom prst="rect">
+            <a:avLst/>
+          </a:prstGeom>
+          <a:noFill/>
+          <a:ln/>
+        </p:spPr>
+        <p:txBody>
+          <a:bodyPr wrap="square" lIns="0" tIns="0" rIns="0" bIns="0" rtlCol="0" anchor="ctr"/>
+          <a:lstStyle/>
+          <a:p>
+            <a:pPr marL="0" indent="0">
+              <a:buNone/>
+            </a:pPr>
+            <a:r>
+              <a:rPr lang="fr-FR" sz="1500" noProof="0" dirty="0">
+                <a:solidFill>
+                  <a:srgbClr val="FFFFFF"/>
+                </a:solidFill>
+                <a:latin typeface="Calibri" pitchFamily="34" charset="0"/>
+                <a:ea typeface="Calibri" pitchFamily="34" charset="-122"/>
+                <a:cs typeface="Calibri" pitchFamily="34" charset="-120"/>
+              </a:rPr>
+              <a:t>Intégration des parties développées par chaque membre</a:t>
+            </a:r>
+            <a:endParaRPr lang="fr-FR" sz="1500" noProof="0" dirty="0"/>
+          </a:p>
+        </p:txBody>
+      </p:sp>
+      <p:sp>
+        <p:nvSpPr>
+          <p:cNvPr id="19" name="Text 12"/>
+          <p:cNvSpPr/>
+          <p:nvPr/>
+        </p:nvSpPr>
+        <p:spPr>
+          <a:xfrm>
+            <a:off x="457200" y="6473952"/>
+            <a:ext cx="6400800" cy="274320"/>
+          </a:xfrm>
+          <a:prstGeom prst="rect">
+            <a:avLst/>
+          </a:prstGeom>
+          <a:noFill/>
+          <a:ln/>
+        </p:spPr>
+        <p:txBody>
+          <a:bodyPr wrap="square" lIns="0" tIns="0" rIns="0" bIns="0" rtlCol="0" anchor="ctr"/>
+          <a:lstStyle/>
+          <a:p>
+            <a:pPr marL="0" indent="0" algn="l">
+              <a:buNone/>
+            </a:pPr>
+            <a:r>
+              <a:rPr lang="fr-FR" sz="900" noProof="0" dirty="0">
+                <a:solidFill>
+                  <a:srgbClr val="9FB7C4"/>
+                </a:solidFill>
+                <a:latin typeface="Calibri" pitchFamily="34" charset="0"/>
+                <a:ea typeface="Calibri" pitchFamily="34" charset="-122"/>
+                <a:cs typeface="Calibri" pitchFamily="34" charset="-120"/>
+              </a:rPr>
+              <a:t>Groupe A — Acquisition et analyse de signal</a:t>
+            </a:r>
+            <a:endParaRPr lang="fr-FR" sz="900" noProof="0" dirty="0"/>
+          </a:p>
+        </p:txBody>
+      </p:sp>
+      <p:sp>
+        <p:nvSpPr>
+          <p:cNvPr id="20" name="Text 13"/>
+          <p:cNvSpPr/>
+          <p:nvPr/>
+        </p:nvSpPr>
+        <p:spPr>
+          <a:xfrm>
+            <a:off x="11274552" y="6473952"/>
+            <a:ext cx="457200" cy="274320"/>
+          </a:xfrm>
+          <a:prstGeom prst="rect">
+            <a:avLst/>
+          </a:prstGeom>
+          <a:noFill/>
+          <a:ln/>
+        </p:spPr>
+        <p:txBody>
+          <a:bodyPr wrap="square" lIns="0" tIns="0" rIns="0" bIns="0" rtlCol="0" anchor="ctr"/>
+          <a:lstStyle/>
+          <a:p>
+            <a:pPr marL="0" indent="0" algn="r">
+              <a:buNone/>
+            </a:pPr>
+            <a:r>
+              <a:rPr lang="fr-FR" sz="900" noProof="0" dirty="0">
+                <a:solidFill>
+                  <a:srgbClr val="9FB7C4"/>
+                </a:solidFill>
+                <a:latin typeface="Calibri" pitchFamily="34" charset="0"/>
+                <a:ea typeface="Calibri" pitchFamily="34" charset="-122"/>
+                <a:cs typeface="Calibri" pitchFamily="34" charset="-120"/>
+              </a:rPr>
+              <a:t>8</a:t>
+            </a:r>
+            <a:endParaRPr lang="fr-FR" sz="900" noProof="0" dirty="0"/>
+          </a:p>
+        </p:txBody>
+      </p:sp>
+    </p:spTree>
+  </p:cSld>
+  <p:clrMapOvr>
+    <a:masterClrMapping/>
+  </p:clrMapOvr>
+</p:sld>
+</file>
+
+<file path=ppt/slides/slide11.xml><?xml version="1.0" encoding="utf-8"?>
 <p:sld xmlns:a="http://schemas.openxmlformats.org/drawingml/2006/main" xmlns:r="http://schemas.openxmlformats.org/officeDocument/2006/relationships" xmlns:p="http://schemas.openxmlformats.org/presentationml/2006/main">
   <p:cSld name="Slide 9">
     <p:bg>
@@ -2001,7 +2749,7 @@
               <a:buNone/>
             </a:pPr>
             <a:r>
-              <a:rPr lang="en-US" sz="3000" b="1" dirty="0">
+              <a:rPr lang="fr-FR" sz="3000" b="1" noProof="0" dirty="0">
                 <a:solidFill>
                   <a:srgbClr val="21295C"/>
                 </a:solidFill>
@@ -2011,7 +2759,7 @@
               </a:rPr>
               <a:t>Format du fichier de sortie</a:t>
             </a:r>
-            <a:endParaRPr lang="en-US" sz="3000" dirty="0"/>
+            <a:endParaRPr lang="fr-FR" sz="3000" noProof="0" dirty="0"/>
           </a:p>
         </p:txBody>
       </p:sp>
@@ -2040,7 +2788,7 @@
               <a:buNone/>
             </a:pPr>
             <a:r>
-              <a:rPr lang="en-US" sz="1400" i="1" dirty="0">
+              <a:rPr lang="fr-FR" sz="1400" i="1" noProof="0" dirty="0">
                 <a:solidFill>
                   <a:srgbClr val="1C7293"/>
                 </a:solidFill>
@@ -2050,7 +2798,7 @@
               </a:rPr>
               <a:t>Le format CSV : simple, compatible, lisible</a:t>
             </a:r>
-            <a:endParaRPr lang="en-US" sz="1400" dirty="0"/>
+            <a:endParaRPr lang="fr-FR" sz="1400" noProof="0" dirty="0"/>
           </a:p>
         </p:txBody>
       </p:sp>
@@ -2079,7 +2827,7 @@
           <a:bodyPr/>
           <a:lstStyle/>
           <a:p>
-            <a:endParaRPr lang="fr-FR"/>
+            <a:endParaRPr lang="fr-FR" noProof="0" dirty="0"/>
           </a:p>
         </p:txBody>
       </p:sp>
@@ -2106,7 +2854,7 @@
           <a:bodyPr/>
           <a:lstStyle/>
           <a:p>
-            <a:endParaRPr lang="fr-FR"/>
+            <a:endParaRPr lang="fr-FR" noProof="0" dirty="0"/>
           </a:p>
         </p:txBody>
       </p:sp>
@@ -2159,7 +2907,7 @@
               <a:buNone/>
             </a:pPr>
             <a:r>
-              <a:rPr lang="en-US" sz="1700" b="1" dirty="0">
+              <a:rPr lang="fr-FR" sz="1700" b="1" noProof="0" dirty="0">
                 <a:solidFill>
                   <a:srgbClr val="21295C"/>
                 </a:solidFill>
@@ -2169,7 +2917,7 @@
               </a:rPr>
               <a:t>Avantages du CSV</a:t>
             </a:r>
-            <a:endParaRPr lang="en-US" sz="1700" dirty="0"/>
+            <a:endParaRPr lang="fr-FR" sz="1700" noProof="0" dirty="0"/>
           </a:p>
         </p:txBody>
       </p:sp>
@@ -2205,7 +2953,7 @@
               <a:buChar char="•"/>
             </a:pPr>
             <a:r>
-              <a:rPr lang="en-US" sz="1450" dirty="0">
+              <a:rPr lang="fr-FR" sz="1450" noProof="0" dirty="0">
                 <a:solidFill>
                   <a:srgbClr val="1B2A33"/>
                 </a:solidFill>
@@ -2215,7 +2963,7 @@
               </a:rPr>
               <a:t>Simplicité</a:t>
             </a:r>
-            <a:endParaRPr lang="en-US" sz="1450" dirty="0"/>
+            <a:endParaRPr lang="fr-FR" sz="1450" noProof="0" dirty="0"/>
           </a:p>
           <a:p>
             <a:pPr marL="342900" indent="-342900">
@@ -2229,7 +2977,7 @@
               <a:buChar char="•"/>
             </a:pPr>
             <a:r>
-              <a:rPr lang="en-US" sz="1450" dirty="0">
+              <a:rPr lang="fr-FR" sz="1450" noProof="0" dirty="0">
                 <a:solidFill>
                   <a:srgbClr val="1B2A33"/>
                 </a:solidFill>
@@ -2239,7 +2987,7 @@
               </a:rPr>
               <a:t>Compatibilité</a:t>
             </a:r>
-            <a:endParaRPr lang="en-US" sz="1450" dirty="0"/>
+            <a:endParaRPr lang="fr-FR" sz="1450" noProof="0" dirty="0"/>
           </a:p>
           <a:p>
             <a:pPr marL="342900" indent="-342900">
@@ -2250,7 +2998,7 @@
               <a:buChar char="•"/>
             </a:pPr>
             <a:r>
-              <a:rPr lang="en-US" sz="1450" dirty="0">
+              <a:rPr lang="fr-FR" sz="1450" noProof="0" dirty="0">
                 <a:solidFill>
                   <a:srgbClr val="1B2A33"/>
                 </a:solidFill>
@@ -2260,7 +3008,7 @@
               </a:rPr>
               <a:t>Facilité de lecture par les autres groupes</a:t>
             </a:r>
-            <a:endParaRPr lang="en-US" sz="1450" dirty="0"/>
+            <a:endParaRPr lang="fr-FR" sz="1450" noProof="0" dirty="0"/>
           </a:p>
         </p:txBody>
       </p:sp>
@@ -2292,7 +3040,7 @@
               <a:buNone/>
             </a:pPr>
             <a:r>
-              <a:rPr lang="en-US" sz="1250" i="1" dirty="0">
+              <a:rPr lang="fr-FR" sz="1250" i="1" noProof="0" dirty="0">
                 <a:solidFill>
                   <a:srgbClr val="1C7293"/>
                 </a:solidFill>
@@ -2302,7 +3050,7 @@
               </a:rPr>
               <a:t>La première ligne du fichier correspond à l'en-tête des colonnes.</a:t>
             </a:r>
-            <a:endParaRPr lang="en-US" sz="1250" dirty="0"/>
+            <a:endParaRPr lang="fr-FR" sz="1250" noProof="0" dirty="0"/>
           </a:p>
         </p:txBody>
       </p:sp>
@@ -2338,7 +3086,7 @@
           <a:bodyPr/>
           <a:lstStyle/>
           <a:p>
-            <a:endParaRPr lang="fr-FR"/>
+            <a:endParaRPr lang="fr-FR" noProof="0" dirty="0"/>
           </a:p>
         </p:txBody>
       </p:sp>
@@ -2367,7 +3115,7 @@
               <a:buNone/>
             </a:pPr>
             <a:r>
-              <a:rPr lang="en-US" sz="1550" b="1" dirty="0">
+              <a:rPr lang="fr-FR" sz="1550" b="1" noProof="0" dirty="0">
                 <a:solidFill>
                   <a:srgbClr val="FFFFFF"/>
                 </a:solidFill>
@@ -2377,7 +3125,7 @@
               </a:rPr>
               <a:t>Informations enregistrées</a:t>
             </a:r>
-            <a:endParaRPr lang="en-US" sz="1550" dirty="0"/>
+            <a:endParaRPr lang="fr-FR" sz="1550" noProof="0" dirty="0"/>
           </a:p>
         </p:txBody>
       </p:sp>
@@ -2404,7 +3152,7 @@
           <a:bodyPr/>
           <a:lstStyle/>
           <a:p>
-            <a:endParaRPr lang="fr-FR"/>
+            <a:endParaRPr lang="fr-FR" noProof="0" dirty="0"/>
           </a:p>
         </p:txBody>
       </p:sp>
@@ -2433,7 +3181,7 @@
               <a:buNone/>
             </a:pPr>
             <a:r>
-              <a:rPr lang="en-US" sz="1300" dirty="0">
+              <a:rPr lang="fr-FR" sz="1300" noProof="0" dirty="0">
                 <a:solidFill>
                   <a:srgbClr val="FFFFFF"/>
                 </a:solidFill>
@@ -2443,7 +3191,7 @@
               </a:rPr>
               <a:t>Type</a:t>
             </a:r>
-            <a:endParaRPr lang="en-US" sz="1300" dirty="0"/>
+            <a:endParaRPr lang="fr-FR" sz="1300" noProof="0" dirty="0"/>
           </a:p>
         </p:txBody>
       </p:sp>
@@ -2470,7 +3218,7 @@
           <a:bodyPr/>
           <a:lstStyle/>
           <a:p>
-            <a:endParaRPr lang="fr-FR"/>
+            <a:endParaRPr lang="fr-FR" noProof="0" dirty="0"/>
           </a:p>
         </p:txBody>
       </p:sp>
@@ -2499,7 +3247,7 @@
               <a:buNone/>
             </a:pPr>
             <a:r>
-              <a:rPr lang="en-US" sz="1300" dirty="0">
+              <a:rPr lang="fr-FR" sz="1300" noProof="0" dirty="0">
                 <a:solidFill>
                   <a:srgbClr val="FFFFFF"/>
                 </a:solidFill>
@@ -2509,7 +3257,7 @@
               </a:rPr>
               <a:t>Source</a:t>
             </a:r>
-            <a:endParaRPr lang="en-US" sz="1300" dirty="0"/>
+            <a:endParaRPr lang="fr-FR" sz="1300" noProof="0" dirty="0"/>
           </a:p>
         </p:txBody>
       </p:sp>
@@ -2536,7 +3284,7 @@
           <a:bodyPr/>
           <a:lstStyle/>
           <a:p>
-            <a:endParaRPr lang="fr-FR"/>
+            <a:endParaRPr lang="fr-FR" noProof="0" dirty="0"/>
           </a:p>
         </p:txBody>
       </p:sp>
@@ -2565,7 +3313,7 @@
               <a:buNone/>
             </a:pPr>
             <a:r>
-              <a:rPr lang="en-US" sz="1300" dirty="0">
+              <a:rPr lang="fr-FR" sz="1300" noProof="0" dirty="0">
                 <a:solidFill>
                   <a:srgbClr val="FFFFFF"/>
                 </a:solidFill>
@@ -2573,9 +3321,31 @@
                 <a:ea typeface="Calibri" pitchFamily="34" charset="-122"/>
                 <a:cs typeface="Calibri" pitchFamily="34" charset="-120"/>
               </a:rPr>
-              <a:t>Taux d'éch.</a:t>
-            </a:r>
-            <a:endParaRPr lang="en-US" sz="1300" dirty="0"/>
+              <a:t>Taux d'</a:t>
+            </a:r>
+            <a:r>
+              <a:rPr lang="fr-FR" sz="1300" noProof="0" dirty="0" err="1">
+                <a:solidFill>
+                  <a:srgbClr val="FFFFFF"/>
+                </a:solidFill>
+                <a:latin typeface="Calibri" pitchFamily="34" charset="0"/>
+                <a:ea typeface="Calibri" pitchFamily="34" charset="-122"/>
+                <a:cs typeface="Calibri" pitchFamily="34" charset="-120"/>
+              </a:rPr>
+              <a:t>éch</a:t>
+            </a:r>
+            <a:r>
+              <a:rPr lang="fr-FR" sz="1300" noProof="0" dirty="0">
+                <a:solidFill>
+                  <a:srgbClr val="FFFFFF"/>
+                </a:solidFill>
+                <a:latin typeface="Calibri" pitchFamily="34" charset="0"/>
+                <a:ea typeface="Calibri" pitchFamily="34" charset="-122"/>
+                <a:cs typeface="Calibri" pitchFamily="34" charset="-120"/>
+              </a:rPr>
+              <a:t>.</a:t>
+            </a:r>
+            <a:endParaRPr lang="fr-FR" sz="1300" noProof="0" dirty="0"/>
           </a:p>
         </p:txBody>
       </p:sp>
@@ -2602,7 +3372,7 @@
           <a:bodyPr/>
           <a:lstStyle/>
           <a:p>
-            <a:endParaRPr lang="fr-FR"/>
+            <a:endParaRPr lang="fr-FR" noProof="0" dirty="0"/>
           </a:p>
         </p:txBody>
       </p:sp>
@@ -2631,7 +3401,7 @@
               <a:buNone/>
             </a:pPr>
             <a:r>
-              <a:rPr lang="en-US" sz="1300" dirty="0">
+              <a:rPr lang="fr-FR" sz="1300" noProof="0" dirty="0">
                 <a:solidFill>
                   <a:srgbClr val="FFFFFF"/>
                 </a:solidFill>
@@ -2641,7 +3411,7 @@
               </a:rPr>
               <a:t>Durée</a:t>
             </a:r>
-            <a:endParaRPr lang="en-US" sz="1300" dirty="0"/>
+            <a:endParaRPr lang="fr-FR" sz="1300" noProof="0" dirty="0"/>
           </a:p>
         </p:txBody>
       </p:sp>
@@ -2668,7 +3438,7 @@
           <a:bodyPr/>
           <a:lstStyle/>
           <a:p>
-            <a:endParaRPr lang="fr-FR"/>
+            <a:endParaRPr lang="fr-FR" noProof="0" dirty="0"/>
           </a:p>
         </p:txBody>
       </p:sp>
@@ -2697,7 +3467,7 @@
               <a:buNone/>
             </a:pPr>
             <a:r>
-              <a:rPr lang="en-US" sz="1300" dirty="0">
+              <a:rPr lang="fr-FR" sz="1300" noProof="0" dirty="0">
                 <a:solidFill>
                   <a:srgbClr val="FFFFFF"/>
                 </a:solidFill>
@@ -2707,7 +3477,7 @@
               </a:rPr>
               <a:t>Nb échant.</a:t>
             </a:r>
-            <a:endParaRPr lang="en-US" sz="1300" dirty="0"/>
+            <a:endParaRPr lang="fr-FR" sz="1300" noProof="0" dirty="0"/>
           </a:p>
         </p:txBody>
       </p:sp>
@@ -2734,7 +3504,7 @@
           <a:bodyPr/>
           <a:lstStyle/>
           <a:p>
-            <a:endParaRPr lang="fr-FR"/>
+            <a:endParaRPr lang="fr-FR" noProof="0" dirty="0"/>
           </a:p>
         </p:txBody>
       </p:sp>
@@ -2763,7 +3533,7 @@
               <a:buNone/>
             </a:pPr>
             <a:r>
-              <a:rPr lang="en-US" sz="1300" dirty="0">
+              <a:rPr lang="fr-FR" sz="1300" noProof="0" dirty="0">
                 <a:solidFill>
                   <a:srgbClr val="FFFFFF"/>
                 </a:solidFill>
@@ -2773,7 +3543,7 @@
               </a:rPr>
               <a:t>Horodatage</a:t>
             </a:r>
-            <a:endParaRPr lang="en-US" sz="1300" dirty="0"/>
+            <a:endParaRPr lang="fr-FR" sz="1300" noProof="0" dirty="0"/>
           </a:p>
         </p:txBody>
       </p:sp>
@@ -2802,7 +3572,7 @@
               <a:buNone/>
             </a:pPr>
             <a:r>
-              <a:rPr lang="en-US" sz="900" dirty="0">
+              <a:rPr lang="fr-FR" sz="900" noProof="0" dirty="0">
                 <a:solidFill>
                   <a:srgbClr val="5E7A88"/>
                 </a:solidFill>
@@ -2812,7 +3582,7 @@
               </a:rPr>
               <a:t>Groupe A — Acquisition et analyse de signal</a:t>
             </a:r>
-            <a:endParaRPr lang="en-US" sz="900" dirty="0"/>
+            <a:endParaRPr lang="fr-FR" sz="900" noProof="0" dirty="0"/>
           </a:p>
         </p:txBody>
       </p:sp>
@@ -2841,7 +3611,7 @@
               <a:buNone/>
             </a:pPr>
             <a:r>
-              <a:rPr lang="en-US" sz="900" dirty="0">
+              <a:rPr lang="fr-FR" sz="900" noProof="0" dirty="0">
                 <a:solidFill>
                   <a:srgbClr val="5E7A88"/>
                 </a:solidFill>
@@ -2851,7 +3621,7 @@
               </a:rPr>
               <a:t>9</a:t>
             </a:r>
-            <a:endParaRPr lang="en-US" sz="900" dirty="0"/>
+            <a:endParaRPr lang="fr-FR" sz="900" noProof="0" dirty="0"/>
           </a:p>
         </p:txBody>
       </p:sp>
@@ -2863,7 +3633,7 @@
 </p:sld>
 </file>
 
-<file path=ppt/slides/slide11.xml><?xml version="1.0" encoding="utf-8"?>
+<file path=ppt/slides/slide12.xml><?xml version="1.0" encoding="utf-8"?>
 <p:sld xmlns:a="http://schemas.openxmlformats.org/drawingml/2006/main" xmlns:r="http://schemas.openxmlformats.org/officeDocument/2006/relationships" xmlns:p="http://schemas.openxmlformats.org/presentationml/2006/main">
   <p:cSld name="Slide 10">
     <p:bg>
@@ -2911,7 +3681,7 @@
           <a:bodyPr/>
           <a:lstStyle/>
           <a:p>
-            <a:endParaRPr lang="fr-FR"/>
+            <a:endParaRPr lang="fr-FR" noProof="0" dirty="0"/>
           </a:p>
         </p:txBody>
       </p:sp>
@@ -2964,7 +3734,7 @@
               <a:buNone/>
             </a:pPr>
             <a:r>
-              <a:rPr lang="en-US" sz="3600" b="1" dirty="0">
+              <a:rPr lang="fr-FR" sz="3600" b="1" noProof="0" dirty="0">
                 <a:solidFill>
                   <a:srgbClr val="FFFFFF"/>
                 </a:solidFill>
@@ -2974,7 +3744,7 @@
               </a:rPr>
               <a:t>Conclusion</a:t>
             </a:r>
-            <a:endParaRPr lang="en-US" sz="3600" dirty="0"/>
+            <a:endParaRPr lang="fr-FR" sz="3600" noProof="0" dirty="0"/>
           </a:p>
         </p:txBody>
       </p:sp>
@@ -3003,7 +3773,7 @@
               <a:buNone/>
             </a:pPr>
             <a:r>
-              <a:rPr lang="en-US" sz="1500" i="1" dirty="0">
+              <a:rPr lang="fr-FR" sz="1500" i="1" noProof="0" dirty="0">
                 <a:solidFill>
                   <a:srgbClr val="9FB7C4"/>
                 </a:solidFill>
@@ -3013,7 +3783,7 @@
               </a:rPr>
               <a:t>Ce projet nous a permis de mettre en pratique :</a:t>
             </a:r>
-            <a:endParaRPr lang="en-US" sz="1500" dirty="0"/>
+            <a:endParaRPr lang="fr-FR" sz="1500" noProof="0" dirty="0"/>
           </a:p>
         </p:txBody>
       </p:sp>
@@ -3042,7 +3812,7 @@
           <a:bodyPr/>
           <a:lstStyle/>
           <a:p>
-            <a:endParaRPr lang="fr-FR"/>
+            <a:endParaRPr lang="fr-FR" noProof="0" dirty="0"/>
           </a:p>
         </p:txBody>
       </p:sp>
@@ -3069,7 +3839,7 @@
           <a:bodyPr/>
           <a:lstStyle/>
           <a:p>
-            <a:endParaRPr lang="fr-FR"/>
+            <a:endParaRPr lang="fr-FR" noProof="0" dirty="0"/>
           </a:p>
         </p:txBody>
       </p:sp>
@@ -3125,7 +3895,7 @@
               <a:buNone/>
             </a:pPr>
             <a:r>
-              <a:rPr lang="en-US" sz="1200" dirty="0">
+              <a:rPr lang="fr-FR" sz="1200" noProof="0" dirty="0">
                 <a:solidFill>
                   <a:srgbClr val="D7E9F0"/>
                 </a:solidFill>
@@ -3135,7 +3905,7 @@
               </a:rPr>
               <a:t>La programmation orientée objet</a:t>
             </a:r>
-            <a:endParaRPr lang="en-US" sz="1200" dirty="0"/>
+            <a:endParaRPr lang="fr-FR" sz="1200" noProof="0" dirty="0"/>
           </a:p>
         </p:txBody>
       </p:sp>
@@ -3164,7 +3934,7 @@
           <a:bodyPr/>
           <a:lstStyle/>
           <a:p>
-            <a:endParaRPr lang="fr-FR"/>
+            <a:endParaRPr lang="fr-FR" noProof="0" dirty="0"/>
           </a:p>
         </p:txBody>
       </p:sp>
@@ -3191,7 +3961,7 @@
           <a:bodyPr/>
           <a:lstStyle/>
           <a:p>
-            <a:endParaRPr lang="fr-FR"/>
+            <a:endParaRPr lang="fr-FR" noProof="0" dirty="0"/>
           </a:p>
         </p:txBody>
       </p:sp>
@@ -3247,7 +4017,7 @@
               <a:buNone/>
             </a:pPr>
             <a:r>
-              <a:rPr lang="en-US" sz="1200" dirty="0">
+              <a:rPr lang="fr-FR" sz="1200" noProof="0" dirty="0">
                 <a:solidFill>
                   <a:srgbClr val="D7E9F0"/>
                 </a:solidFill>
@@ -3257,7 +4027,7 @@
               </a:rPr>
               <a:t>Le développement d'interfaces graphiques</a:t>
             </a:r>
-            <a:endParaRPr lang="en-US" sz="1200" dirty="0"/>
+            <a:endParaRPr lang="fr-FR" sz="1200" noProof="0" dirty="0"/>
           </a:p>
         </p:txBody>
       </p:sp>
@@ -3286,7 +4056,7 @@
           <a:bodyPr/>
           <a:lstStyle/>
           <a:p>
-            <a:endParaRPr lang="fr-FR"/>
+            <a:endParaRPr lang="fr-FR" noProof="0" dirty="0"/>
           </a:p>
         </p:txBody>
       </p:sp>
@@ -3313,7 +4083,7 @@
           <a:bodyPr/>
           <a:lstStyle/>
           <a:p>
-            <a:endParaRPr lang="fr-FR"/>
+            <a:endParaRPr lang="fr-FR" noProof="0" dirty="0"/>
           </a:p>
         </p:txBody>
       </p:sp>
@@ -3369,7 +4139,7 @@
               <a:buNone/>
             </a:pPr>
             <a:r>
-              <a:rPr lang="en-US" sz="1200" dirty="0">
+              <a:rPr lang="fr-FR" sz="1200" noProof="0" dirty="0">
                 <a:solidFill>
                   <a:srgbClr val="D7E9F0"/>
                 </a:solidFill>
@@ -3379,7 +4149,7 @@
               </a:rPr>
               <a:t>La manipulation de données scientifiques</a:t>
             </a:r>
-            <a:endParaRPr lang="en-US" sz="1200" dirty="0"/>
+            <a:endParaRPr lang="fr-FR" sz="1200" noProof="0" dirty="0"/>
           </a:p>
         </p:txBody>
       </p:sp>
@@ -3408,7 +4178,7 @@
           <a:bodyPr/>
           <a:lstStyle/>
           <a:p>
-            <a:endParaRPr lang="fr-FR"/>
+            <a:endParaRPr lang="fr-FR" noProof="0" dirty="0"/>
           </a:p>
         </p:txBody>
       </p:sp>
@@ -3435,7 +4205,7 @@
           <a:bodyPr/>
           <a:lstStyle/>
           <a:p>
-            <a:endParaRPr lang="fr-FR"/>
+            <a:endParaRPr lang="fr-FR" noProof="0" dirty="0"/>
           </a:p>
         </p:txBody>
       </p:sp>
@@ -3491,7 +4261,7 @@
               <a:buNone/>
             </a:pPr>
             <a:r>
-              <a:rPr lang="en-US" sz="1200" dirty="0">
+              <a:rPr lang="fr-FR" sz="1200" noProof="0" dirty="0">
                 <a:solidFill>
                   <a:srgbClr val="D7E9F0"/>
                 </a:solidFill>
@@ -3501,7 +4271,7 @@
               </a:rPr>
               <a:t>Le travail collaboratif avec Git</a:t>
             </a:r>
-            <a:endParaRPr lang="en-US" sz="1200" dirty="0"/>
+            <a:endParaRPr lang="fr-FR" sz="1200" noProof="0" dirty="0"/>
           </a:p>
         </p:txBody>
       </p:sp>
@@ -3533,7 +4303,7 @@
               <a:buNone/>
             </a:pPr>
             <a:r>
-              <a:rPr lang="en-US" sz="1350" i="1" dirty="0">
+              <a:rPr lang="fr-FR" sz="1350" i="1" noProof="0" dirty="0">
                 <a:solidFill>
                   <a:srgbClr val="BBD8E5"/>
                 </a:solidFill>
@@ -3543,7 +4313,7 @@
               </a:rPr>
               <a:t>Une première étape vers une chaîne de traitement complète, exploitable par les autres modules du projet global.</a:t>
             </a:r>
-            <a:endParaRPr lang="en-US" sz="1350" dirty="0"/>
+            <a:endParaRPr lang="fr-FR" sz="1350" noProof="0" dirty="0"/>
           </a:p>
         </p:txBody>
       </p:sp>
@@ -3572,7 +4342,7 @@
               <a:buNone/>
             </a:pPr>
             <a:r>
-              <a:rPr lang="en-US" sz="1300" dirty="0">
+              <a:rPr lang="fr-FR" sz="1300" noProof="0" dirty="0">
                 <a:solidFill>
                   <a:srgbClr val="1C7293"/>
                 </a:solidFill>
@@ -3582,7 +4352,7 @@
               </a:rPr>
               <a:t>Merci de votre attention</a:t>
             </a:r>
-            <a:endParaRPr lang="en-US" sz="1300" dirty="0"/>
+            <a:endParaRPr lang="fr-FR" sz="1300" noProof="0" dirty="0"/>
           </a:p>
         </p:txBody>
       </p:sp>
@@ -3644,7 +4414,7 @@
               <a:buNone/>
             </a:pPr>
             <a:r>
-              <a:rPr lang="en-US" sz="3000" b="1" dirty="0">
+              <a:rPr lang="fr-FR" sz="3000" b="1" noProof="0" dirty="0">
                 <a:solidFill>
                   <a:srgbClr val="21295C"/>
                 </a:solidFill>
@@ -3654,7 +4424,7 @@
               </a:rPr>
               <a:t>Présentation générale</a:t>
             </a:r>
-            <a:endParaRPr lang="en-US" sz="3000" dirty="0"/>
+            <a:endParaRPr lang="fr-FR" sz="3000" noProof="0" dirty="0"/>
           </a:p>
         </p:txBody>
       </p:sp>
@@ -3683,7 +4453,7 @@
               <a:buNone/>
             </a:pPr>
             <a:r>
-              <a:rPr lang="en-US" sz="1400" i="1" dirty="0">
+              <a:rPr lang="fr-FR" sz="1400" i="1" noProof="0" dirty="0">
                 <a:solidFill>
                   <a:srgbClr val="1C7293"/>
                 </a:solidFill>
@@ -3693,7 +4463,7 @@
               </a:rPr>
               <a:t>Le module et son rôle dans le projet global</a:t>
             </a:r>
-            <a:endParaRPr lang="en-US" sz="1400" dirty="0"/>
+            <a:endParaRPr lang="fr-FR" sz="1400" noProof="0" dirty="0"/>
           </a:p>
         </p:txBody>
       </p:sp>
@@ -3722,7 +4492,7 @@
           <a:bodyPr/>
           <a:lstStyle/>
           <a:p>
-            <a:endParaRPr lang="fr-FR"/>
+            <a:endParaRPr lang="fr-FR" noProof="0" dirty="0"/>
           </a:p>
         </p:txBody>
       </p:sp>
@@ -3757,7 +4527,7 @@
               <a:buNone/>
             </a:pPr>
             <a:r>
-              <a:rPr lang="en-US" sz="1500" dirty="0">
+              <a:rPr lang="fr-FR" sz="1500" noProof="0" dirty="0">
                 <a:solidFill>
                   <a:srgbClr val="1B2A33"/>
                 </a:solidFill>
@@ -3767,7 +4537,7 @@
               </a:rPr>
               <a:t>Notre module réalise l'acquisition et l'analyse d'un signal à partir d'un fichier CSV.</a:t>
             </a:r>
-            <a:endParaRPr lang="en-US" sz="1500" dirty="0"/>
+            <a:endParaRPr lang="fr-FR" sz="1500" noProof="0" dirty="0"/>
           </a:p>
           <a:p>
             <a:pPr marL="0" indent="0">
@@ -3780,7 +4550,7 @@
               <a:buNone/>
             </a:pPr>
             <a:r>
-              <a:rPr lang="en-US" sz="1500" b="1" dirty="0">
+              <a:rPr lang="fr-FR" sz="1500" b="1" noProof="0" dirty="0">
                 <a:solidFill>
                   <a:srgbClr val="1B2A33"/>
                 </a:solidFill>
@@ -3790,7 +4560,7 @@
               </a:rPr>
               <a:t>L'utilisateur peut :</a:t>
             </a:r>
-            <a:endParaRPr lang="en-US" sz="1500" dirty="0"/>
+            <a:endParaRPr lang="fr-FR" sz="1500" noProof="0" dirty="0"/>
           </a:p>
           <a:p>
             <a:pPr marL="342900" indent="-342900">
@@ -3804,7 +4574,7 @@
               <a:buChar char="•"/>
             </a:pPr>
             <a:r>
-              <a:rPr lang="en-US" sz="1500" dirty="0">
+              <a:rPr lang="fr-FR" sz="1500" noProof="0" dirty="0">
                 <a:solidFill>
                   <a:srgbClr val="1B2A33"/>
                 </a:solidFill>
@@ -3812,9 +4582,9 @@
                 <a:ea typeface="Calibri" pitchFamily="34" charset="-122"/>
                 <a:cs typeface="Calibri" pitchFamily="34" charset="-120"/>
               </a:rPr>
-              <a:t>Charger un signal</a:t>
-            </a:r>
-            <a:endParaRPr lang="en-US" sz="1500" dirty="0"/>
+              <a:t>Charger un signal CSV Uniquement</a:t>
+            </a:r>
+            <a:endParaRPr lang="fr-FR" sz="1500" noProof="0" dirty="0"/>
           </a:p>
           <a:p>
             <a:pPr marL="342900" indent="-342900">
@@ -3828,7 +4598,7 @@
               <a:buChar char="•"/>
             </a:pPr>
             <a:r>
-              <a:rPr lang="en-US" sz="1500" dirty="0">
+              <a:rPr lang="fr-FR" sz="1500" noProof="0" dirty="0">
                 <a:solidFill>
                   <a:srgbClr val="1B2A33"/>
                 </a:solidFill>
@@ -3838,7 +4608,7 @@
               </a:rPr>
               <a:t>Renseigner des informations complémentaires</a:t>
             </a:r>
-            <a:endParaRPr lang="en-US" sz="1500" dirty="0"/>
+            <a:endParaRPr lang="fr-FR" sz="1500" noProof="0" dirty="0"/>
           </a:p>
           <a:p>
             <a:pPr marL="342900" indent="-342900">
@@ -3849,7 +4619,7 @@
               <a:buChar char="•"/>
             </a:pPr>
             <a:r>
-              <a:rPr lang="en-US" sz="1500" dirty="0">
+              <a:rPr lang="fr-FR" sz="1500" noProof="0" dirty="0">
                 <a:solidFill>
                   <a:srgbClr val="1B2A33"/>
                 </a:solidFill>
@@ -3859,7 +4629,27 @@
               </a:rPr>
               <a:t>Lancer le traitement pour obtenir automatiquement les caractéristiques du signal</a:t>
             </a:r>
-            <a:endParaRPr lang="en-US" sz="1500" dirty="0"/>
+          </a:p>
+          <a:p>
+            <a:pPr marL="342900" indent="-342900">
+              <a:lnSpc>
+                <a:spcPct val="115000"/>
+              </a:lnSpc>
+              <a:buSzPct val="100000"/>
+              <a:buChar char="•"/>
+            </a:pPr>
+            <a:r>
+              <a:rPr lang="fr-FR" sz="1500" dirty="0">
+                <a:solidFill>
+                  <a:srgbClr val="1B2A33"/>
+                </a:solidFill>
+                <a:latin typeface="Calibri" pitchFamily="34" charset="0"/>
+                <a:ea typeface="Calibri" pitchFamily="34" charset="-122"/>
+                <a:cs typeface="Calibri" pitchFamily="34" charset="-120"/>
+              </a:rPr>
+              <a:t>Générer un signale de sortie qui sera transmis au groupe B</a:t>
+            </a:r>
+            <a:endParaRPr lang="fr-FR" sz="1500" noProof="0" dirty="0"/>
           </a:p>
         </p:txBody>
       </p:sp>
@@ -3895,7 +4685,7 @@
           <a:bodyPr/>
           <a:lstStyle/>
           <a:p>
-            <a:endParaRPr lang="fr-FR"/>
+            <a:endParaRPr lang="fr-FR" noProof="0" dirty="0"/>
           </a:p>
         </p:txBody>
       </p:sp>
@@ -3922,7 +4712,7 @@
           <a:bodyPr/>
           <a:lstStyle/>
           <a:p>
-            <a:endParaRPr lang="fr-FR"/>
+            <a:endParaRPr lang="fr-FR" noProof="0" dirty="0"/>
           </a:p>
         </p:txBody>
       </p:sp>
@@ -3975,7 +4765,7 @@
               <a:buNone/>
             </a:pPr>
             <a:r>
-              <a:rPr lang="en-US" sz="1700" b="1" dirty="0">
+              <a:rPr lang="fr-FR" sz="1700" b="1" noProof="0" dirty="0">
                 <a:solidFill>
                   <a:srgbClr val="FFFFFF"/>
                 </a:solidFill>
@@ -3985,7 +4775,7 @@
               </a:rPr>
               <a:t>Architecture globale</a:t>
             </a:r>
-            <a:endParaRPr lang="en-US" sz="1700" dirty="0"/>
+            <a:endParaRPr lang="fr-FR" sz="1700" noProof="0" dirty="0"/>
           </a:p>
         </p:txBody>
       </p:sp>
@@ -4017,7 +4807,7 @@
               <a:buNone/>
             </a:pPr>
             <a:r>
-              <a:rPr lang="en-US" sz="1350" dirty="0">
+              <a:rPr lang="fr-FR" sz="1350" noProof="0" dirty="0">
                 <a:solidFill>
                   <a:srgbClr val="D7E9F0"/>
                 </a:solidFill>
@@ -4027,7 +4817,7 @@
               </a:rPr>
               <a:t>Ce module s'intègre dans une architecture composée de plusieurs groupes.</a:t>
             </a:r>
-            <a:endParaRPr lang="en-US" sz="1350" dirty="0"/>
+            <a:endParaRPr lang="fr-FR" sz="1350" noProof="0" dirty="0"/>
           </a:p>
           <a:p>
             <a:pPr marL="0" indent="0" algn="ctr">
@@ -4036,7 +4826,7 @@
               </a:lnSpc>
               <a:buNone/>
             </a:pPr>
-            <a:endParaRPr lang="en-US" sz="1350" dirty="0"/>
+            <a:endParaRPr lang="fr-FR" sz="1350" noProof="0" dirty="0"/>
           </a:p>
           <a:p>
             <a:pPr marL="0" indent="0" algn="ctr">
@@ -4046,7 +4836,7 @@
               <a:buNone/>
             </a:pPr>
             <a:r>
-              <a:rPr lang="en-US" sz="1350" dirty="0">
+              <a:rPr lang="fr-FR" sz="1350" noProof="0" dirty="0">
                 <a:solidFill>
                   <a:srgbClr val="D7E9F0"/>
                 </a:solidFill>
@@ -4056,7 +4846,7 @@
               </a:rPr>
               <a:t>Les données produites doivent être exploitables par les autres parties du projet.</a:t>
             </a:r>
-            <a:endParaRPr lang="en-US" sz="1350" dirty="0"/>
+            <a:endParaRPr lang="fr-FR" sz="1350" noProof="0" dirty="0"/>
           </a:p>
         </p:txBody>
       </p:sp>
@@ -4085,7 +4875,7 @@
               <a:buNone/>
             </a:pPr>
             <a:r>
-              <a:rPr lang="en-US" sz="900" dirty="0">
+              <a:rPr lang="fr-FR" sz="900" noProof="0" dirty="0">
                 <a:solidFill>
                   <a:srgbClr val="5E7A88"/>
                 </a:solidFill>
@@ -4095,7 +4885,7 @@
               </a:rPr>
               <a:t>Groupe A — Acquisition et analyse de signal</a:t>
             </a:r>
-            <a:endParaRPr lang="en-US" sz="900" dirty="0"/>
+            <a:endParaRPr lang="fr-FR" sz="900" noProof="0" dirty="0"/>
           </a:p>
         </p:txBody>
       </p:sp>
@@ -4124,7 +4914,7 @@
               <a:buNone/>
             </a:pPr>
             <a:r>
-              <a:rPr lang="en-US" sz="900" dirty="0">
+              <a:rPr lang="fr-FR" sz="900" noProof="0" dirty="0">
                 <a:solidFill>
                   <a:srgbClr val="5E7A88"/>
                 </a:solidFill>
@@ -4134,7 +4924,7 @@
               </a:rPr>
               <a:t>2</a:t>
             </a:r>
-            <a:endParaRPr lang="en-US" sz="900" dirty="0"/>
+            <a:endParaRPr lang="fr-FR" sz="900" noProof="0" dirty="0"/>
           </a:p>
         </p:txBody>
       </p:sp>
@@ -4196,7 +4986,7 @@
               <a:buNone/>
             </a:pPr>
             <a:r>
-              <a:rPr lang="en-US" sz="3000" b="1" dirty="0">
+              <a:rPr lang="fr-FR" sz="3000" b="1" noProof="0" dirty="0">
                 <a:solidFill>
                   <a:srgbClr val="21295C"/>
                 </a:solidFill>
@@ -4206,7 +4996,7 @@
               </a:rPr>
               <a:t>Cahier des charges</a:t>
             </a:r>
-            <a:endParaRPr lang="en-US" sz="3000" dirty="0"/>
+            <a:endParaRPr lang="fr-FR" sz="3000" noProof="0" dirty="0"/>
           </a:p>
         </p:txBody>
       </p:sp>
@@ -4235,7 +5025,7 @@
               <a:buNone/>
             </a:pPr>
             <a:r>
-              <a:rPr lang="en-US" sz="1400" i="1" dirty="0">
+              <a:rPr lang="fr-FR" sz="1400" i="1" noProof="0" dirty="0">
                 <a:solidFill>
                   <a:srgbClr val="1C7293"/>
                 </a:solidFill>
@@ -4245,7 +5035,7 @@
               </a:rPr>
               <a:t>Les contraintes imposées au projet</a:t>
             </a:r>
-            <a:endParaRPr lang="en-US" sz="1400" dirty="0"/>
+            <a:endParaRPr lang="fr-FR" sz="1400" noProof="0" dirty="0"/>
           </a:p>
         </p:txBody>
       </p:sp>
@@ -4281,7 +5071,7 @@
           <a:bodyPr/>
           <a:lstStyle/>
           <a:p>
-            <a:endParaRPr lang="fr-FR"/>
+            <a:endParaRPr lang="fr-FR" noProof="0" dirty="0"/>
           </a:p>
         </p:txBody>
       </p:sp>
@@ -4308,7 +5098,7 @@
           <a:bodyPr/>
           <a:lstStyle/>
           <a:p>
-            <a:endParaRPr lang="fr-FR"/>
+            <a:endParaRPr lang="fr-FR" noProof="0" dirty="0"/>
           </a:p>
         </p:txBody>
       </p:sp>
@@ -4361,7 +5151,7 @@
               <a:buNone/>
             </a:pPr>
             <a:r>
-              <a:rPr lang="en-US" sz="1450" b="1" dirty="0">
+              <a:rPr lang="fr-FR" sz="1450" b="1" noProof="0" dirty="0">
                 <a:solidFill>
                   <a:srgbClr val="21295C"/>
                 </a:solidFill>
@@ -4371,7 +5161,7 @@
               </a:rPr>
               <a:t>Python 3</a:t>
             </a:r>
-            <a:endParaRPr lang="en-US" sz="1450" dirty="0"/>
+            <a:endParaRPr lang="fr-FR" sz="1450" noProof="0" dirty="0"/>
           </a:p>
         </p:txBody>
       </p:sp>
@@ -4403,7 +5193,7 @@
               <a:buNone/>
             </a:pPr>
             <a:r>
-              <a:rPr lang="en-US" sz="1150" dirty="0">
+              <a:rPr lang="fr-FR" sz="1150" noProof="0" dirty="0">
                 <a:solidFill>
                   <a:srgbClr val="1B2A33"/>
                 </a:solidFill>
@@ -4413,7 +5203,7 @@
               </a:rPr>
               <a:t>Développement en Python 3</a:t>
             </a:r>
-            <a:endParaRPr lang="en-US" sz="1150" dirty="0"/>
+            <a:endParaRPr lang="fr-FR" sz="1150" noProof="0" dirty="0"/>
           </a:p>
         </p:txBody>
       </p:sp>
@@ -4449,7 +5239,7 @@
           <a:bodyPr/>
           <a:lstStyle/>
           <a:p>
-            <a:endParaRPr lang="fr-FR"/>
+            <a:endParaRPr lang="fr-FR" noProof="0" dirty="0"/>
           </a:p>
         </p:txBody>
       </p:sp>
@@ -4476,7 +5266,7 @@
           <a:bodyPr/>
           <a:lstStyle/>
           <a:p>
-            <a:endParaRPr lang="fr-FR"/>
+            <a:endParaRPr lang="fr-FR" noProof="0" dirty="0"/>
           </a:p>
         </p:txBody>
       </p:sp>
@@ -4529,7 +5319,7 @@
               <a:buNone/>
             </a:pPr>
             <a:r>
-              <a:rPr lang="en-US" sz="1450" b="1" dirty="0">
+              <a:rPr lang="fr-FR" sz="1450" b="1" noProof="0" dirty="0">
                 <a:solidFill>
                   <a:srgbClr val="21295C"/>
                 </a:solidFill>
@@ -4539,7 +5329,7 @@
               </a:rPr>
               <a:t>PyQt5</a:t>
             </a:r>
-            <a:endParaRPr lang="en-US" sz="1450" dirty="0"/>
+            <a:endParaRPr lang="fr-FR" sz="1450" noProof="0" dirty="0"/>
           </a:p>
         </p:txBody>
       </p:sp>
@@ -4571,7 +5361,7 @@
               <a:buNone/>
             </a:pPr>
             <a:r>
-              <a:rPr lang="en-US" sz="1150" dirty="0">
+              <a:rPr lang="fr-FR" sz="1150" noProof="0" dirty="0">
                 <a:solidFill>
                   <a:srgbClr val="1B2A33"/>
                 </a:solidFill>
@@ -4581,7 +5371,7 @@
               </a:rPr>
               <a:t>Interface graphique avec PyQt5</a:t>
             </a:r>
-            <a:endParaRPr lang="en-US" sz="1150" dirty="0"/>
+            <a:endParaRPr lang="fr-FR" sz="1150" noProof="0" dirty="0"/>
           </a:p>
         </p:txBody>
       </p:sp>
@@ -4617,7 +5407,7 @@
           <a:bodyPr/>
           <a:lstStyle/>
           <a:p>
-            <a:endParaRPr lang="fr-FR"/>
+            <a:endParaRPr lang="fr-FR" noProof="0" dirty="0"/>
           </a:p>
         </p:txBody>
       </p:sp>
@@ -4644,7 +5434,7 @@
           <a:bodyPr/>
           <a:lstStyle/>
           <a:p>
-            <a:endParaRPr lang="fr-FR"/>
+            <a:endParaRPr lang="fr-FR" noProof="0" dirty="0"/>
           </a:p>
         </p:txBody>
       </p:sp>
@@ -4697,7 +5487,7 @@
               <a:buNone/>
             </a:pPr>
             <a:r>
-              <a:rPr lang="en-US" sz="1450" b="1" dirty="0">
+              <a:rPr lang="fr-FR" sz="1450" b="1" noProof="0" dirty="0">
                 <a:solidFill>
                   <a:srgbClr val="21295C"/>
                 </a:solidFill>
@@ -4705,9 +5495,20 @@
                 <a:ea typeface="Calibri" pitchFamily="34" charset="-122"/>
                 <a:cs typeface="Calibri" pitchFamily="34" charset="-120"/>
               </a:rPr>
-              <a:t>Pandas &amp; SciPy</a:t>
-            </a:r>
-            <a:endParaRPr lang="en-US" sz="1450" dirty="0"/>
+              <a:t>Pandas &amp; </a:t>
+            </a:r>
+            <a:r>
+              <a:rPr lang="fr-FR" sz="1450" b="1" noProof="0" dirty="0" err="1">
+                <a:solidFill>
+                  <a:srgbClr val="21295C"/>
+                </a:solidFill>
+                <a:latin typeface="Calibri" pitchFamily="34" charset="0"/>
+                <a:ea typeface="Calibri" pitchFamily="34" charset="-122"/>
+                <a:cs typeface="Calibri" pitchFamily="34" charset="-120"/>
+              </a:rPr>
+              <a:t>SciPy</a:t>
+            </a:r>
+            <a:endParaRPr lang="fr-FR" sz="1450" noProof="0" dirty="0"/>
           </a:p>
         </p:txBody>
       </p:sp>
@@ -4739,7 +5540,7 @@
               <a:buNone/>
             </a:pPr>
             <a:r>
-              <a:rPr lang="en-US" sz="1150" dirty="0">
+              <a:rPr lang="fr-FR" sz="1150" noProof="0" dirty="0">
                 <a:solidFill>
                   <a:srgbClr val="1B2A33"/>
                 </a:solidFill>
@@ -4749,7 +5550,7 @@
               </a:rPr>
               <a:t>Manipulation et traitement scientifique des données</a:t>
             </a:r>
-            <a:endParaRPr lang="en-US" sz="1150" dirty="0"/>
+            <a:endParaRPr lang="fr-FR" sz="1150" noProof="0" dirty="0"/>
           </a:p>
         </p:txBody>
       </p:sp>
@@ -4785,7 +5586,7 @@
           <a:bodyPr/>
           <a:lstStyle/>
           <a:p>
-            <a:endParaRPr lang="fr-FR"/>
+            <a:endParaRPr lang="fr-FR" noProof="0" dirty="0"/>
           </a:p>
         </p:txBody>
       </p:sp>
@@ -4812,7 +5613,7 @@
           <a:bodyPr/>
           <a:lstStyle/>
           <a:p>
-            <a:endParaRPr lang="fr-FR"/>
+            <a:endParaRPr lang="fr-FR" noProof="0" dirty="0"/>
           </a:p>
         </p:txBody>
       </p:sp>
@@ -4865,7 +5666,7 @@
               <a:buNone/>
             </a:pPr>
             <a:r>
-              <a:rPr lang="en-US" sz="1450" b="1" dirty="0">
+              <a:rPr lang="fr-FR" sz="1450" b="1" noProof="0" dirty="0">
                 <a:solidFill>
                   <a:srgbClr val="21295C"/>
                 </a:solidFill>
@@ -4875,7 +5676,7 @@
               </a:rPr>
               <a:t>Architecture POO</a:t>
             </a:r>
-            <a:endParaRPr lang="en-US" sz="1450" dirty="0"/>
+            <a:endParaRPr lang="fr-FR" sz="1450" noProof="0" dirty="0"/>
           </a:p>
         </p:txBody>
       </p:sp>
@@ -4907,7 +5708,7 @@
               <a:buNone/>
             </a:pPr>
             <a:r>
-              <a:rPr lang="en-US" sz="1150" dirty="0">
+              <a:rPr lang="fr-FR" sz="1150" noProof="0" dirty="0">
                 <a:solidFill>
                   <a:srgbClr val="1B2A33"/>
                 </a:solidFill>
@@ -4917,7 +5718,7 @@
               </a:rPr>
               <a:t>Code orienté objet, modulaire et documenté</a:t>
             </a:r>
-            <a:endParaRPr lang="en-US" sz="1150" dirty="0"/>
+            <a:endParaRPr lang="fr-FR" sz="1150" noProof="0" dirty="0"/>
           </a:p>
         </p:txBody>
       </p:sp>
@@ -4953,7 +5754,7 @@
           <a:bodyPr/>
           <a:lstStyle/>
           <a:p>
-            <a:endParaRPr lang="fr-FR"/>
+            <a:endParaRPr lang="fr-FR" noProof="0" dirty="0"/>
           </a:p>
         </p:txBody>
       </p:sp>
@@ -4980,7 +5781,7 @@
           <a:bodyPr/>
           <a:lstStyle/>
           <a:p>
-            <a:endParaRPr lang="fr-FR"/>
+            <a:endParaRPr lang="fr-FR" noProof="0" dirty="0"/>
           </a:p>
         </p:txBody>
       </p:sp>
@@ -5033,7 +5834,7 @@
               <a:buNone/>
             </a:pPr>
             <a:r>
-              <a:rPr lang="en-US" sz="1450" b="1" dirty="0">
+              <a:rPr lang="fr-FR" sz="1450" b="1" noProof="0" dirty="0">
                 <a:solidFill>
                   <a:srgbClr val="21295C"/>
                 </a:solidFill>
@@ -5043,7 +5844,7 @@
               </a:rPr>
               <a:t>PEP8 / PEP257</a:t>
             </a:r>
-            <a:endParaRPr lang="en-US" sz="1450" dirty="0"/>
+            <a:endParaRPr lang="fr-FR" sz="1450" noProof="0" dirty="0"/>
           </a:p>
         </p:txBody>
       </p:sp>
@@ -5075,7 +5876,7 @@
               <a:buNone/>
             </a:pPr>
             <a:r>
-              <a:rPr lang="en-US" sz="1150" dirty="0">
+              <a:rPr lang="fr-FR" sz="1150" noProof="0" dirty="0">
                 <a:solidFill>
                   <a:srgbClr val="1B2A33"/>
                 </a:solidFill>
@@ -5085,7 +5886,7 @@
               </a:rPr>
               <a:t>Respect des conventions de codage Python</a:t>
             </a:r>
-            <a:endParaRPr lang="en-US" sz="1150" dirty="0"/>
+            <a:endParaRPr lang="fr-FR" sz="1150" noProof="0" dirty="0"/>
           </a:p>
         </p:txBody>
       </p:sp>
@@ -5121,7 +5922,7 @@
           <a:bodyPr/>
           <a:lstStyle/>
           <a:p>
-            <a:endParaRPr lang="fr-FR"/>
+            <a:endParaRPr lang="fr-FR" noProof="0" dirty="0"/>
           </a:p>
         </p:txBody>
       </p:sp>
@@ -5148,7 +5949,7 @@
           <a:bodyPr/>
           <a:lstStyle/>
           <a:p>
-            <a:endParaRPr lang="fr-FR"/>
+            <a:endParaRPr lang="fr-FR" noProof="0" dirty="0"/>
           </a:p>
         </p:txBody>
       </p:sp>
@@ -5201,7 +6002,7 @@
               <a:buNone/>
             </a:pPr>
             <a:r>
-              <a:rPr lang="en-US" sz="1450" b="1" dirty="0">
+              <a:rPr lang="fr-FR" sz="1450" b="1" noProof="0" dirty="0">
                 <a:solidFill>
                   <a:srgbClr val="21295C"/>
                 </a:solidFill>
@@ -5211,7 +6012,7 @@
               </a:rPr>
               <a:t>Git</a:t>
             </a:r>
-            <a:endParaRPr lang="en-US" sz="1450" dirty="0"/>
+            <a:endParaRPr lang="fr-FR" sz="1450" noProof="0" dirty="0"/>
           </a:p>
         </p:txBody>
       </p:sp>
@@ -5243,7 +6044,7 @@
               <a:buNone/>
             </a:pPr>
             <a:r>
-              <a:rPr lang="en-US" sz="1150" dirty="0">
+              <a:rPr lang="fr-FR" sz="1150" noProof="0" dirty="0">
                 <a:solidFill>
                   <a:srgbClr val="1B2A33"/>
                 </a:solidFill>
@@ -5253,7 +6054,7 @@
               </a:rPr>
               <a:t>Travail collaboratif et gestion de versions</a:t>
             </a:r>
-            <a:endParaRPr lang="en-US" sz="1150" dirty="0"/>
+            <a:endParaRPr lang="fr-FR" sz="1150" noProof="0" dirty="0"/>
           </a:p>
         </p:txBody>
       </p:sp>
@@ -5282,7 +6083,7 @@
               <a:buNone/>
             </a:pPr>
             <a:r>
-              <a:rPr lang="en-US" sz="900" dirty="0">
+              <a:rPr lang="fr-FR" sz="900" noProof="0" dirty="0">
                 <a:solidFill>
                   <a:srgbClr val="5E7A88"/>
                 </a:solidFill>
@@ -5292,7 +6093,7 @@
               </a:rPr>
               <a:t>Groupe A — Acquisition et analyse de signal</a:t>
             </a:r>
-            <a:endParaRPr lang="en-US" sz="900" dirty="0"/>
+            <a:endParaRPr lang="fr-FR" sz="900" noProof="0" dirty="0"/>
           </a:p>
         </p:txBody>
       </p:sp>
@@ -5321,7 +6122,7 @@
               <a:buNone/>
             </a:pPr>
             <a:r>
-              <a:rPr lang="en-US" sz="900" dirty="0">
+              <a:rPr lang="fr-FR" sz="900" noProof="0" dirty="0">
                 <a:solidFill>
                   <a:srgbClr val="5E7A88"/>
                 </a:solidFill>
@@ -5331,7 +6132,7 @@
               </a:rPr>
               <a:t>3</a:t>
             </a:r>
-            <a:endParaRPr lang="en-US" sz="900" dirty="0"/>
+            <a:endParaRPr lang="fr-FR" sz="900" noProof="0" dirty="0"/>
           </a:p>
         </p:txBody>
       </p:sp>
@@ -5393,7 +6194,7 @@
               <a:buNone/>
             </a:pPr>
             <a:r>
-              <a:rPr lang="en-US" sz="3000" b="1" dirty="0">
+              <a:rPr lang="fr-FR" sz="3000" b="1" noProof="0" dirty="0">
                 <a:solidFill>
                   <a:srgbClr val="FFFFFF"/>
                 </a:solidFill>
@@ -5403,7 +6204,7 @@
               </a:rPr>
               <a:t>Technologies utilisées</a:t>
             </a:r>
-            <a:endParaRPr lang="en-US" sz="3000" dirty="0"/>
+            <a:endParaRPr lang="fr-FR" sz="3000" noProof="0" dirty="0"/>
           </a:p>
         </p:txBody>
       </p:sp>
@@ -5432,7 +6233,7 @@
               <a:buNone/>
             </a:pPr>
             <a:r>
-              <a:rPr lang="en-US" sz="1400" i="1" dirty="0">
+              <a:rPr lang="fr-FR" sz="1400" i="1" noProof="0" dirty="0">
                 <a:solidFill>
                   <a:srgbClr val="9FB7C4"/>
                 </a:solidFill>
@@ -5442,7 +6243,7 @@
               </a:rPr>
               <a:t>La stack technique du module</a:t>
             </a:r>
-            <a:endParaRPr lang="en-US" sz="1400" dirty="0"/>
+            <a:endParaRPr lang="fr-FR" sz="1400" noProof="0" dirty="0"/>
           </a:p>
         </p:txBody>
       </p:sp>
@@ -5471,7 +6272,7 @@
           <a:bodyPr/>
           <a:lstStyle/>
           <a:p>
-            <a:endParaRPr lang="fr-FR"/>
+            <a:endParaRPr lang="fr-FR" noProof="0" dirty="0"/>
           </a:p>
         </p:txBody>
       </p:sp>
@@ -5498,7 +6299,7 @@
           <a:bodyPr/>
           <a:lstStyle/>
           <a:p>
-            <a:endParaRPr lang="fr-FR"/>
+            <a:endParaRPr lang="fr-FR" noProof="0" dirty="0"/>
           </a:p>
         </p:txBody>
       </p:sp>
@@ -5551,7 +6352,7 @@
               <a:buNone/>
             </a:pPr>
             <a:r>
-              <a:rPr lang="en-US" sz="1500" b="1" dirty="0">
+              <a:rPr lang="fr-FR" sz="1500" b="1" noProof="0" dirty="0">
                 <a:solidFill>
                   <a:srgbClr val="FFFFFF"/>
                 </a:solidFill>
@@ -5561,7 +6362,7 @@
               </a:rPr>
               <a:t>Python</a:t>
             </a:r>
-            <a:endParaRPr lang="en-US" sz="1500" dirty="0"/>
+            <a:endParaRPr lang="fr-FR" sz="1500" noProof="0" dirty="0"/>
           </a:p>
         </p:txBody>
       </p:sp>
@@ -5593,7 +6394,7 @@
               <a:buNone/>
             </a:pPr>
             <a:r>
-              <a:rPr lang="en-US" sz="1100" dirty="0">
+              <a:rPr lang="fr-FR" sz="1100" noProof="0" dirty="0">
                 <a:solidFill>
                   <a:srgbClr val="CFE3EC"/>
                 </a:solidFill>
@@ -5603,7 +6404,7 @@
               </a:rPr>
               <a:t>Langage principal, simple, lisible, vaste écosystème scientifique.</a:t>
             </a:r>
-            <a:endParaRPr lang="en-US" sz="1100" dirty="0"/>
+            <a:endParaRPr lang="fr-FR" sz="1100" noProof="0" dirty="0"/>
           </a:p>
         </p:txBody>
       </p:sp>
@@ -5632,7 +6433,7 @@
           <a:bodyPr/>
           <a:lstStyle/>
           <a:p>
-            <a:endParaRPr lang="fr-FR"/>
+            <a:endParaRPr lang="fr-FR" noProof="0" dirty="0"/>
           </a:p>
         </p:txBody>
       </p:sp>
@@ -5659,7 +6460,7 @@
           <a:bodyPr/>
           <a:lstStyle/>
           <a:p>
-            <a:endParaRPr lang="fr-FR"/>
+            <a:endParaRPr lang="fr-FR" noProof="0" dirty="0"/>
           </a:p>
         </p:txBody>
       </p:sp>
@@ -5712,7 +6513,7 @@
               <a:buNone/>
             </a:pPr>
             <a:r>
-              <a:rPr lang="en-US" sz="1500" b="1" dirty="0">
+              <a:rPr lang="fr-FR" sz="1500" b="1" noProof="0" dirty="0">
                 <a:solidFill>
                   <a:srgbClr val="FFFFFF"/>
                 </a:solidFill>
@@ -5722,7 +6523,7 @@
               </a:rPr>
               <a:t>PyQt5</a:t>
             </a:r>
-            <a:endParaRPr lang="en-US" sz="1500" dirty="0"/>
+            <a:endParaRPr lang="fr-FR" sz="1500" noProof="0" dirty="0"/>
           </a:p>
         </p:txBody>
       </p:sp>
@@ -5754,7 +6555,7 @@
               <a:buNone/>
             </a:pPr>
             <a:r>
-              <a:rPr lang="en-US" sz="1100" dirty="0">
+              <a:rPr lang="fr-FR" sz="1100" noProof="0" dirty="0">
                 <a:solidFill>
                   <a:srgbClr val="CFE3EC"/>
                 </a:solidFill>
@@ -5762,9 +6563,53 @@
                 <a:ea typeface="Calibri" pitchFamily="34" charset="-122"/>
                 <a:cs typeface="Calibri" pitchFamily="34" charset="-120"/>
               </a:rPr>
-              <a:t>Interface graphique. Qt Designer sépare la partie graphique (.ui) de la logique (.py).</a:t>
-            </a:r>
-            <a:endParaRPr lang="en-US" sz="1100" dirty="0"/>
+              <a:t>Interface graphique. Qt Designer sépare la partie graphique (.</a:t>
+            </a:r>
+            <a:r>
+              <a:rPr lang="fr-FR" sz="1100" noProof="0" dirty="0" err="1">
+                <a:solidFill>
+                  <a:srgbClr val="CFE3EC"/>
+                </a:solidFill>
+                <a:latin typeface="Calibri" pitchFamily="34" charset="0"/>
+                <a:ea typeface="Calibri" pitchFamily="34" charset="-122"/>
+                <a:cs typeface="Calibri" pitchFamily="34" charset="-120"/>
+              </a:rPr>
+              <a:t>ui</a:t>
+            </a:r>
+            <a:r>
+              <a:rPr lang="fr-FR" sz="1100" noProof="0" dirty="0">
+                <a:solidFill>
+                  <a:srgbClr val="CFE3EC"/>
+                </a:solidFill>
+                <a:latin typeface="Calibri" pitchFamily="34" charset="0"/>
+                <a:ea typeface="Calibri" pitchFamily="34" charset="-122"/>
+                <a:cs typeface="Calibri" pitchFamily="34" charset="-120"/>
+              </a:rPr>
+              <a:t>) de la logique (.</a:t>
+            </a:r>
+            <a:r>
+              <a:rPr lang="fr-FR" sz="1100" noProof="0" dirty="0" err="1">
+                <a:solidFill>
+                  <a:srgbClr val="CFE3EC"/>
+                </a:solidFill>
+                <a:latin typeface="Calibri" pitchFamily="34" charset="0"/>
+                <a:ea typeface="Calibri" pitchFamily="34" charset="-122"/>
+                <a:cs typeface="Calibri" pitchFamily="34" charset="-120"/>
+              </a:rPr>
+              <a:t>py</a:t>
+            </a:r>
+            <a:r>
+              <a:rPr lang="fr-FR" sz="1100" noProof="0" dirty="0">
+                <a:solidFill>
+                  <a:srgbClr val="CFE3EC"/>
+                </a:solidFill>
+                <a:latin typeface="Calibri" pitchFamily="34" charset="0"/>
+                <a:ea typeface="Calibri" pitchFamily="34" charset="-122"/>
+                <a:cs typeface="Calibri" pitchFamily="34" charset="-120"/>
+              </a:rPr>
+              <a:t>).</a:t>
+            </a:r>
+            <a:endParaRPr lang="fr-FR" sz="1100" noProof="0" dirty="0"/>
           </a:p>
         </p:txBody>
       </p:sp>
@@ -5793,7 +6638,7 @@
           <a:bodyPr/>
           <a:lstStyle/>
           <a:p>
-            <a:endParaRPr lang="fr-FR"/>
+            <a:endParaRPr lang="fr-FR" noProof="0" dirty="0"/>
           </a:p>
         </p:txBody>
       </p:sp>
@@ -5820,7 +6665,7 @@
           <a:bodyPr/>
           <a:lstStyle/>
           <a:p>
-            <a:endParaRPr lang="fr-FR"/>
+            <a:endParaRPr lang="fr-FR" noProof="0" dirty="0"/>
           </a:p>
         </p:txBody>
       </p:sp>
@@ -5873,7 +6718,7 @@
               <a:buNone/>
             </a:pPr>
             <a:r>
-              <a:rPr lang="en-US" sz="1500" b="1" dirty="0">
+              <a:rPr lang="fr-FR" sz="1500" b="1" noProof="0" dirty="0">
                 <a:solidFill>
                   <a:srgbClr val="FFFFFF"/>
                 </a:solidFill>
@@ -5883,7 +6728,7 @@
               </a:rPr>
               <a:t>Pandas</a:t>
             </a:r>
-            <a:endParaRPr lang="en-US" sz="1500" dirty="0"/>
+            <a:endParaRPr lang="fr-FR" sz="1500" noProof="0" dirty="0"/>
           </a:p>
         </p:txBody>
       </p:sp>
@@ -5915,7 +6760,7 @@
               <a:buNone/>
             </a:pPr>
             <a:r>
-              <a:rPr lang="en-US" sz="1100" dirty="0">
+              <a:rPr lang="fr-FR" sz="1100" noProof="0" dirty="0">
                 <a:solidFill>
                   <a:srgbClr val="CFE3EC"/>
                 </a:solidFill>
@@ -5923,9 +6768,31 @@
                 <a:ea typeface="Calibri" pitchFamily="34" charset="-122"/>
                 <a:cs typeface="Calibri" pitchFamily="34" charset="-120"/>
               </a:rPr>
-              <a:t>Manipulation et exploitation des fichiers CSV.</a:t>
-            </a:r>
-            <a:endParaRPr lang="en-US" sz="1100" dirty="0"/>
+              <a:t>Manipulation et exploitation des fichiers </a:t>
+            </a:r>
+            <a:r>
+              <a:rPr lang="fr-FR" b="1" noProof="0" dirty="0">
+                <a:solidFill>
+                  <a:srgbClr val="CFE3EC"/>
+                </a:solidFill>
+                <a:latin typeface="Calibri" pitchFamily="34" charset="0"/>
+                <a:ea typeface="Calibri" pitchFamily="34" charset="-122"/>
+                <a:cs typeface="Calibri" pitchFamily="34" charset="-120"/>
+              </a:rPr>
+              <a:t>CSV</a:t>
+            </a:r>
+            <a:r>
+              <a:rPr lang="fr-FR" sz="1100" noProof="0" dirty="0">
+                <a:solidFill>
+                  <a:srgbClr val="CFE3EC"/>
+                </a:solidFill>
+                <a:latin typeface="Calibri" pitchFamily="34" charset="0"/>
+                <a:ea typeface="Calibri" pitchFamily="34" charset="-122"/>
+                <a:cs typeface="Calibri" pitchFamily="34" charset="-120"/>
+              </a:rPr>
+              <a:t>.</a:t>
+            </a:r>
+            <a:endParaRPr lang="fr-FR" sz="1100" noProof="0" dirty="0"/>
           </a:p>
         </p:txBody>
       </p:sp>
@@ -5954,7 +6821,7 @@
           <a:bodyPr/>
           <a:lstStyle/>
           <a:p>
-            <a:endParaRPr lang="fr-FR"/>
+            <a:endParaRPr lang="fr-FR" noProof="0" dirty="0"/>
           </a:p>
         </p:txBody>
       </p:sp>
@@ -5981,7 +6848,7 @@
           <a:bodyPr/>
           <a:lstStyle/>
           <a:p>
-            <a:endParaRPr lang="fr-FR"/>
+            <a:endParaRPr lang="fr-FR" noProof="0" dirty="0"/>
           </a:p>
         </p:txBody>
       </p:sp>
@@ -6034,7 +6901,7 @@
               <a:buNone/>
             </a:pPr>
             <a:r>
-              <a:rPr lang="en-US" sz="1500" b="1" dirty="0">
+              <a:rPr lang="fr-FR" sz="1500" b="1" noProof="0" dirty="0" err="1">
                 <a:solidFill>
                   <a:srgbClr val="FFFFFF"/>
                 </a:solidFill>
@@ -6044,7 +6911,7 @@
               </a:rPr>
               <a:t>SciPy</a:t>
             </a:r>
-            <a:endParaRPr lang="en-US" sz="1500" dirty="0"/>
+            <a:endParaRPr lang="fr-FR" sz="1500" noProof="0" dirty="0"/>
           </a:p>
         </p:txBody>
       </p:sp>
@@ -6076,7 +6943,7 @@
               <a:buNone/>
             </a:pPr>
             <a:r>
-              <a:rPr lang="en-US" sz="1100" dirty="0">
+              <a:rPr lang="fr-FR" sz="1100" noProof="0" dirty="0">
                 <a:solidFill>
                   <a:srgbClr val="CFE3EC"/>
                 </a:solidFill>
@@ -6086,7 +6953,7 @@
               </a:rPr>
               <a:t>Traitements scientifiques et analyse avancée des signaux.</a:t>
             </a:r>
-            <a:endParaRPr lang="en-US" sz="1100" dirty="0"/>
+            <a:endParaRPr lang="fr-FR" sz="1100" noProof="0" dirty="0"/>
           </a:p>
         </p:txBody>
       </p:sp>
@@ -6115,7 +6982,7 @@
           <a:bodyPr/>
           <a:lstStyle/>
           <a:p>
-            <a:endParaRPr lang="fr-FR"/>
+            <a:endParaRPr lang="fr-FR" noProof="0" dirty="0"/>
           </a:p>
         </p:txBody>
       </p:sp>
@@ -6142,7 +7009,7 @@
           <a:bodyPr/>
           <a:lstStyle/>
           <a:p>
-            <a:endParaRPr lang="fr-FR"/>
+            <a:endParaRPr lang="fr-FR" noProof="0" dirty="0"/>
           </a:p>
         </p:txBody>
       </p:sp>
@@ -6195,7 +7062,7 @@
               <a:buNone/>
             </a:pPr>
             <a:r>
-              <a:rPr lang="en-US" sz="1500" b="1" dirty="0">
+              <a:rPr lang="fr-FR" sz="1500" b="1" noProof="0" dirty="0">
                 <a:solidFill>
                   <a:srgbClr val="FFFFFF"/>
                 </a:solidFill>
@@ -6205,7 +7072,7 @@
               </a:rPr>
               <a:t>Git</a:t>
             </a:r>
-            <a:endParaRPr lang="en-US" sz="1500" dirty="0"/>
+            <a:endParaRPr lang="fr-FR" sz="1500" noProof="0" dirty="0"/>
           </a:p>
         </p:txBody>
       </p:sp>
@@ -6237,7 +7104,7 @@
               <a:buNone/>
             </a:pPr>
             <a:r>
-              <a:rPr lang="en-US" sz="1100" dirty="0">
+              <a:rPr lang="fr-FR" sz="1100" noProof="0" dirty="0">
                 <a:solidFill>
                   <a:srgbClr val="CFE3EC"/>
                 </a:solidFill>
@@ -6247,7 +7114,7 @@
               </a:rPr>
               <a:t>Travail simultané, historique du projet, gestion des versions.</a:t>
             </a:r>
-            <a:endParaRPr lang="en-US" sz="1100" dirty="0"/>
+            <a:endParaRPr lang="fr-FR" sz="1100" noProof="0" dirty="0"/>
           </a:p>
         </p:txBody>
       </p:sp>
@@ -6276,7 +7143,7 @@
               <a:buNone/>
             </a:pPr>
             <a:r>
-              <a:rPr lang="en-US" sz="900" dirty="0">
+              <a:rPr lang="fr-FR" sz="900" noProof="0" dirty="0">
                 <a:solidFill>
                   <a:srgbClr val="9FB7C4"/>
                 </a:solidFill>
@@ -6286,7 +7153,7 @@
               </a:rPr>
               <a:t>Groupe A — Acquisition et analyse de signal</a:t>
             </a:r>
-            <a:endParaRPr lang="en-US" sz="900" dirty="0"/>
+            <a:endParaRPr lang="fr-FR" sz="900" noProof="0" dirty="0"/>
           </a:p>
         </p:txBody>
       </p:sp>
@@ -6315,7 +7182,7 @@
               <a:buNone/>
             </a:pPr>
             <a:r>
-              <a:rPr lang="en-US" sz="900" dirty="0">
+              <a:rPr lang="fr-FR" sz="900" noProof="0" dirty="0">
                 <a:solidFill>
                   <a:srgbClr val="9FB7C4"/>
                 </a:solidFill>
@@ -6325,7 +7192,7 @@
               </a:rPr>
               <a:t>4</a:t>
             </a:r>
-            <a:endParaRPr lang="en-US" sz="900" dirty="0"/>
+            <a:endParaRPr lang="fr-FR" sz="900" noProof="0" dirty="0"/>
           </a:p>
         </p:txBody>
       </p:sp>
@@ -6338,6 +7205,779 @@
 </file>
 
 <file path=ppt/slides/slide5.xml><?xml version="1.0" encoding="utf-8"?>
+<p:sld xmlns:a="http://schemas.openxmlformats.org/drawingml/2006/main" xmlns:r="http://schemas.openxmlformats.org/officeDocument/2006/relationships" xmlns:p="http://schemas.openxmlformats.org/presentationml/2006/main">
+  <p:cSld>
+    <p:bg>
+      <p:bgPr>
+        <a:solidFill>
+          <a:srgbClr val="FFFFFF"/>
+        </a:solidFill>
+        <a:effectLst/>
+      </p:bgPr>
+    </p:bg>
+    <p:spTree>
+      <p:nvGrpSpPr>
+        <p:cNvPr id="1" name="">
+          <a:extLst>
+            <a:ext uri="{FF2B5EF4-FFF2-40B4-BE49-F238E27FC236}">
+              <a16:creationId xmlns:a16="http://schemas.microsoft.com/office/drawing/2014/main" id="{F291F775-778A-6810-15BA-9F12655B27E9}"/>
+            </a:ext>
+          </a:extLst>
+        </p:cNvPr>
+        <p:cNvGrpSpPr/>
+        <p:nvPr/>
+      </p:nvGrpSpPr>
+      <p:grpSpPr>
+        <a:xfrm>
+          <a:off x="0" y="0"/>
+          <a:ext cx="0" cy="0"/>
+          <a:chOff x="0" y="0"/>
+          <a:chExt cx="0" cy="0"/>
+        </a:xfrm>
+      </p:grpSpPr>
+      <p:sp>
+        <p:nvSpPr>
+          <p:cNvPr id="2" name="Text 0">
+            <a:extLst>
+              <a:ext uri="{FF2B5EF4-FFF2-40B4-BE49-F238E27FC236}">
+                <a16:creationId xmlns:a16="http://schemas.microsoft.com/office/drawing/2014/main" id="{111B2E01-9D1A-CE3F-B526-A9A2D7EA1F77}"/>
+              </a:ext>
+            </a:extLst>
+          </p:cNvPr>
+          <p:cNvSpPr/>
+          <p:nvPr/>
+        </p:nvSpPr>
+        <p:spPr>
+          <a:xfrm>
+            <a:off x="548640" y="411480"/>
+            <a:ext cx="11091672" cy="640080"/>
+          </a:xfrm>
+          <a:prstGeom prst="rect">
+            <a:avLst/>
+          </a:prstGeom>
+          <a:noFill/>
+          <a:ln/>
+        </p:spPr>
+        <p:txBody>
+          <a:bodyPr wrap="square" lIns="0" tIns="0" rIns="0" bIns="0" rtlCol="0" anchor="ctr"/>
+          <a:lstStyle/>
+          <a:p>
+            <a:pPr marL="0" indent="0">
+              <a:buNone/>
+            </a:pPr>
+            <a:r>
+              <a:rPr lang="fr-FR" sz="3000" b="1" noProof="0" dirty="0">
+                <a:solidFill>
+                  <a:srgbClr val="21295C"/>
+                </a:solidFill>
+                <a:latin typeface="Cambria" pitchFamily="34" charset="0"/>
+                <a:ea typeface="Cambria" pitchFamily="34" charset="-122"/>
+                <a:cs typeface="Cambria" pitchFamily="34" charset="-120"/>
+              </a:rPr>
+              <a:t>Répartition des Tâches</a:t>
+            </a:r>
+            <a:endParaRPr lang="fr-FR" sz="3000" noProof="0" dirty="0"/>
+          </a:p>
+        </p:txBody>
+      </p:sp>
+      <p:sp>
+        <p:nvSpPr>
+          <p:cNvPr id="4" name="Shape 2">
+            <a:extLst>
+              <a:ext uri="{FF2B5EF4-FFF2-40B4-BE49-F238E27FC236}">
+                <a16:creationId xmlns:a16="http://schemas.microsoft.com/office/drawing/2014/main" id="{E1AA386D-00D3-5FE0-5359-48B59DD19CEC}"/>
+              </a:ext>
+            </a:extLst>
+          </p:cNvPr>
+          <p:cNvSpPr/>
+          <p:nvPr/>
+        </p:nvSpPr>
+        <p:spPr>
+          <a:xfrm>
+            <a:off x="1268198" y="2400774"/>
+            <a:ext cx="3611880" cy="1965960"/>
+          </a:xfrm>
+          <a:prstGeom prst="roundRect">
+            <a:avLst>
+              <a:gd name="adj" fmla="val 3256"/>
+            </a:avLst>
+          </a:prstGeom>
+          <a:solidFill>
+            <a:srgbClr val="EAF4F8"/>
+          </a:solidFill>
+          <a:ln/>
+          <a:effectLst>
+            <a:outerShdw blurRad="101600" dist="38100" dir="2700000" algn="bl" rotWithShape="0">
+              <a:srgbClr val="000000">
+                <a:alpha val="18000"/>
+              </a:srgbClr>
+            </a:outerShdw>
+          </a:effectLst>
+        </p:spPr>
+        <p:txBody>
+          <a:bodyPr/>
+          <a:lstStyle/>
+          <a:p>
+            <a:endParaRPr lang="fr-FR" noProof="0" dirty="0"/>
+          </a:p>
+        </p:txBody>
+      </p:sp>
+      <p:sp>
+        <p:nvSpPr>
+          <p:cNvPr id="7" name="Text 4">
+            <a:extLst>
+              <a:ext uri="{FF2B5EF4-FFF2-40B4-BE49-F238E27FC236}">
+                <a16:creationId xmlns:a16="http://schemas.microsoft.com/office/drawing/2014/main" id="{D0EBDBCF-B213-6EF3-7B6F-76E4E59F5C25}"/>
+              </a:ext>
+            </a:extLst>
+          </p:cNvPr>
+          <p:cNvSpPr/>
+          <p:nvPr/>
+        </p:nvSpPr>
+        <p:spPr>
+          <a:xfrm>
+            <a:off x="1793978" y="2746176"/>
+            <a:ext cx="2468880" cy="365760"/>
+          </a:xfrm>
+          <a:prstGeom prst="rect">
+            <a:avLst/>
+          </a:prstGeom>
+          <a:noFill/>
+          <a:ln/>
+        </p:spPr>
+        <p:txBody>
+          <a:bodyPr wrap="square" lIns="0" tIns="0" rIns="0" bIns="0" rtlCol="0" anchor="ctr"/>
+          <a:lstStyle/>
+          <a:p>
+            <a:r>
+              <a:rPr lang="fr-FR" sz="1600" dirty="0">
+                <a:latin typeface="Calibri" pitchFamily="34" charset="0"/>
+                <a:ea typeface="Calibri" pitchFamily="34" charset="-122"/>
+                <a:cs typeface="Calibri" pitchFamily="34" charset="-120"/>
+              </a:rPr>
+              <a:t>Développement de l’interface</a:t>
+            </a:r>
+            <a:endParaRPr lang="fr-FR" sz="1600" dirty="0"/>
+          </a:p>
+          <a:p>
+            <a:pPr marL="0" indent="0">
+              <a:buNone/>
+            </a:pPr>
+            <a:endParaRPr lang="fr-FR" sz="1450" noProof="0" dirty="0"/>
+          </a:p>
+        </p:txBody>
+      </p:sp>
+      <p:sp>
+        <p:nvSpPr>
+          <p:cNvPr id="8" name="Text 5">
+            <a:extLst>
+              <a:ext uri="{FF2B5EF4-FFF2-40B4-BE49-F238E27FC236}">
+                <a16:creationId xmlns:a16="http://schemas.microsoft.com/office/drawing/2014/main" id="{227A0346-5AF6-2098-96CC-8D6A99617990}"/>
+              </a:ext>
+            </a:extLst>
+          </p:cNvPr>
+          <p:cNvSpPr/>
+          <p:nvPr/>
+        </p:nvSpPr>
+        <p:spPr>
+          <a:xfrm>
+            <a:off x="1496798" y="3315174"/>
+            <a:ext cx="3154680" cy="960120"/>
+          </a:xfrm>
+          <a:prstGeom prst="rect">
+            <a:avLst/>
+          </a:prstGeom>
+          <a:noFill/>
+          <a:ln/>
+        </p:spPr>
+        <p:txBody>
+          <a:bodyPr wrap="square" lIns="0" tIns="0" rIns="0" bIns="0" rtlCol="0" anchor="t"/>
+          <a:lstStyle/>
+          <a:p>
+            <a:pPr>
+              <a:lnSpc>
+                <a:spcPct val="110000"/>
+              </a:lnSpc>
+            </a:pPr>
+            <a:r>
+              <a:rPr lang="fr-FR" sz="1200" b="1" dirty="0">
+                <a:solidFill>
+                  <a:srgbClr val="002060"/>
+                </a:solidFill>
+                <a:latin typeface="Calibri" pitchFamily="34" charset="0"/>
+                <a:ea typeface="Calibri" pitchFamily="34" charset="-122"/>
+                <a:cs typeface="Calibri" pitchFamily="34" charset="-120"/>
+              </a:rPr>
+              <a:t>Manal</a:t>
+            </a:r>
+            <a:endParaRPr lang="fr-FR" sz="1150" noProof="0" dirty="0">
+              <a:solidFill>
+                <a:srgbClr val="002060"/>
+              </a:solidFill>
+            </a:endParaRPr>
+          </a:p>
+        </p:txBody>
+      </p:sp>
+      <p:sp>
+        <p:nvSpPr>
+          <p:cNvPr id="24" name="Shape 18">
+            <a:extLst>
+              <a:ext uri="{FF2B5EF4-FFF2-40B4-BE49-F238E27FC236}">
+                <a16:creationId xmlns:a16="http://schemas.microsoft.com/office/drawing/2014/main" id="{A551B991-3AE6-F311-09C5-C61BFC3A5390}"/>
+              </a:ext>
+            </a:extLst>
+          </p:cNvPr>
+          <p:cNvSpPr/>
+          <p:nvPr/>
+        </p:nvSpPr>
+        <p:spPr>
+          <a:xfrm>
+            <a:off x="6858000" y="1012568"/>
+            <a:ext cx="3611880" cy="5552133"/>
+          </a:xfrm>
+          <a:prstGeom prst="roundRect">
+            <a:avLst>
+              <a:gd name="adj" fmla="val 3256"/>
+            </a:avLst>
+          </a:prstGeom>
+          <a:solidFill>
+            <a:srgbClr val="EAF4F8"/>
+          </a:solidFill>
+          <a:ln/>
+          <a:effectLst>
+            <a:outerShdw blurRad="101600" dist="38100" dir="2700000" algn="bl" rotWithShape="0">
+              <a:srgbClr val="000000">
+                <a:alpha val="18000"/>
+              </a:srgbClr>
+            </a:outerShdw>
+          </a:effectLst>
+        </p:spPr>
+        <p:txBody>
+          <a:bodyPr/>
+          <a:lstStyle/>
+          <a:p>
+            <a:endParaRPr lang="fr-FR" noProof="0" dirty="0"/>
+          </a:p>
+        </p:txBody>
+      </p:sp>
+      <p:sp>
+        <p:nvSpPr>
+          <p:cNvPr id="27" name="Text 20">
+            <a:extLst>
+              <a:ext uri="{FF2B5EF4-FFF2-40B4-BE49-F238E27FC236}">
+                <a16:creationId xmlns:a16="http://schemas.microsoft.com/office/drawing/2014/main" id="{201466E2-3008-E3A5-686B-7D53D6B6A662}"/>
+              </a:ext>
+            </a:extLst>
+          </p:cNvPr>
+          <p:cNvSpPr/>
+          <p:nvPr/>
+        </p:nvSpPr>
+        <p:spPr>
+          <a:xfrm>
+            <a:off x="7431024" y="1222881"/>
+            <a:ext cx="2468880" cy="365760"/>
+          </a:xfrm>
+          <a:prstGeom prst="rect">
+            <a:avLst/>
+          </a:prstGeom>
+          <a:noFill/>
+          <a:ln/>
+        </p:spPr>
+        <p:txBody>
+          <a:bodyPr wrap="square" lIns="0" tIns="0" rIns="0" bIns="0" rtlCol="0" anchor="ctr"/>
+          <a:lstStyle/>
+          <a:p>
+            <a:pPr>
+              <a:lnSpc>
+                <a:spcPct val="110000"/>
+              </a:lnSpc>
+            </a:pPr>
+            <a:r>
+              <a:rPr lang="fr-FR" sz="1600" dirty="0">
+                <a:latin typeface="Calibri" pitchFamily="34" charset="0"/>
+                <a:ea typeface="Calibri" pitchFamily="34" charset="-122"/>
+                <a:cs typeface="Calibri" pitchFamily="34" charset="-120"/>
+              </a:rPr>
+              <a:t>Programmation du main</a:t>
+            </a:r>
+            <a:endParaRPr lang="fr-FR" sz="1600" dirty="0"/>
+          </a:p>
+        </p:txBody>
+      </p:sp>
+      <p:sp>
+        <p:nvSpPr>
+          <p:cNvPr id="28" name="Text 21">
+            <a:extLst>
+              <a:ext uri="{FF2B5EF4-FFF2-40B4-BE49-F238E27FC236}">
+                <a16:creationId xmlns:a16="http://schemas.microsoft.com/office/drawing/2014/main" id="{8F3DE3D8-995F-C943-A46F-E641F75135EB}"/>
+              </a:ext>
+            </a:extLst>
+          </p:cNvPr>
+          <p:cNvSpPr/>
+          <p:nvPr/>
+        </p:nvSpPr>
+        <p:spPr>
+          <a:xfrm>
+            <a:off x="7086600" y="1926969"/>
+            <a:ext cx="3154680" cy="960120"/>
+          </a:xfrm>
+          <a:prstGeom prst="rect">
+            <a:avLst/>
+          </a:prstGeom>
+          <a:noFill/>
+          <a:ln/>
+        </p:spPr>
+        <p:txBody>
+          <a:bodyPr wrap="square" lIns="0" tIns="0" rIns="0" bIns="0" rtlCol="0" anchor="t"/>
+          <a:lstStyle/>
+          <a:p>
+            <a:pPr>
+              <a:lnSpc>
+                <a:spcPct val="110000"/>
+              </a:lnSpc>
+            </a:pPr>
+            <a:r>
+              <a:rPr lang="fr-FR" sz="1200" b="1" dirty="0">
+                <a:solidFill>
+                  <a:srgbClr val="002060"/>
+                </a:solidFill>
+                <a:latin typeface="Calibri" pitchFamily="34" charset="0"/>
+                <a:ea typeface="Calibri" pitchFamily="34" charset="-122"/>
+                <a:cs typeface="Calibri" pitchFamily="34" charset="-120"/>
+              </a:rPr>
+              <a:t>Tom</a:t>
+            </a:r>
+            <a:endParaRPr lang="fr-FR" sz="1150" noProof="0" dirty="0">
+              <a:solidFill>
+                <a:srgbClr val="002060"/>
+              </a:solidFill>
+            </a:endParaRPr>
+          </a:p>
+        </p:txBody>
+      </p:sp>
+      <p:sp>
+        <p:nvSpPr>
+          <p:cNvPr id="34" name="Text 26">
+            <a:extLst>
+              <a:ext uri="{FF2B5EF4-FFF2-40B4-BE49-F238E27FC236}">
+                <a16:creationId xmlns:a16="http://schemas.microsoft.com/office/drawing/2014/main" id="{31C60D3D-B131-09BA-1033-1D43A7CC742F}"/>
+              </a:ext>
+            </a:extLst>
+          </p:cNvPr>
+          <p:cNvSpPr/>
+          <p:nvPr/>
+        </p:nvSpPr>
+        <p:spPr>
+          <a:xfrm>
+            <a:off x="457200" y="6473952"/>
+            <a:ext cx="6400800" cy="274320"/>
+          </a:xfrm>
+          <a:prstGeom prst="rect">
+            <a:avLst/>
+          </a:prstGeom>
+          <a:noFill/>
+          <a:ln/>
+        </p:spPr>
+        <p:txBody>
+          <a:bodyPr wrap="square" lIns="0" tIns="0" rIns="0" bIns="0" rtlCol="0" anchor="ctr"/>
+          <a:lstStyle/>
+          <a:p>
+            <a:pPr marL="0" indent="0" algn="l">
+              <a:buNone/>
+            </a:pPr>
+            <a:r>
+              <a:rPr lang="fr-FR" sz="900" noProof="0" dirty="0">
+                <a:solidFill>
+                  <a:srgbClr val="5E7A88"/>
+                </a:solidFill>
+                <a:latin typeface="Calibri" pitchFamily="34" charset="0"/>
+                <a:ea typeface="Calibri" pitchFamily="34" charset="-122"/>
+                <a:cs typeface="Calibri" pitchFamily="34" charset="-120"/>
+              </a:rPr>
+              <a:t>Groupe A — Acquisition et analyse de signal</a:t>
+            </a:r>
+            <a:endParaRPr lang="fr-FR" sz="900" noProof="0" dirty="0"/>
+          </a:p>
+        </p:txBody>
+      </p:sp>
+      <p:sp>
+        <p:nvSpPr>
+          <p:cNvPr id="35" name="Text 27">
+            <a:extLst>
+              <a:ext uri="{FF2B5EF4-FFF2-40B4-BE49-F238E27FC236}">
+                <a16:creationId xmlns:a16="http://schemas.microsoft.com/office/drawing/2014/main" id="{66F64C85-4557-8CE6-F169-E794F4720B3D}"/>
+              </a:ext>
+            </a:extLst>
+          </p:cNvPr>
+          <p:cNvSpPr/>
+          <p:nvPr/>
+        </p:nvSpPr>
+        <p:spPr>
+          <a:xfrm>
+            <a:off x="11274552" y="6473952"/>
+            <a:ext cx="457200" cy="274320"/>
+          </a:xfrm>
+          <a:prstGeom prst="rect">
+            <a:avLst/>
+          </a:prstGeom>
+          <a:noFill/>
+          <a:ln/>
+        </p:spPr>
+        <p:txBody>
+          <a:bodyPr wrap="square" lIns="0" tIns="0" rIns="0" bIns="0" rtlCol="0" anchor="ctr"/>
+          <a:lstStyle/>
+          <a:p>
+            <a:pPr marL="0" indent="0" algn="r">
+              <a:buNone/>
+            </a:pPr>
+            <a:r>
+              <a:rPr lang="fr-FR" sz="900" noProof="0" dirty="0">
+                <a:solidFill>
+                  <a:srgbClr val="5E7A88"/>
+                </a:solidFill>
+                <a:latin typeface="Calibri" pitchFamily="34" charset="0"/>
+                <a:ea typeface="Calibri" pitchFamily="34" charset="-122"/>
+                <a:cs typeface="Calibri" pitchFamily="34" charset="-120"/>
+              </a:rPr>
+              <a:t>3</a:t>
+            </a:r>
+            <a:endParaRPr lang="fr-FR" sz="900" noProof="0" dirty="0"/>
+          </a:p>
+        </p:txBody>
+      </p:sp>
+      <p:sp>
+        <p:nvSpPr>
+          <p:cNvPr id="55" name="Shape 10">
+            <a:extLst>
+              <a:ext uri="{FF2B5EF4-FFF2-40B4-BE49-F238E27FC236}">
+                <a16:creationId xmlns:a16="http://schemas.microsoft.com/office/drawing/2014/main" id="{F1D3AF25-37E1-6A7F-7BF0-7FB25F7758C0}"/>
+              </a:ext>
+            </a:extLst>
+          </p:cNvPr>
+          <p:cNvSpPr/>
+          <p:nvPr/>
+        </p:nvSpPr>
+        <p:spPr>
+          <a:xfrm>
+            <a:off x="6859524" y="2304028"/>
+            <a:ext cx="3611880" cy="3837979"/>
+          </a:xfrm>
+          <a:prstGeom prst="roundRect">
+            <a:avLst>
+              <a:gd name="adj" fmla="val 3256"/>
+            </a:avLst>
+          </a:prstGeom>
+          <a:solidFill>
+            <a:schemeClr val="accent4">
+              <a:lumMod val="20000"/>
+              <a:lumOff val="80000"/>
+            </a:schemeClr>
+          </a:solidFill>
+          <a:ln/>
+          <a:effectLst>
+            <a:outerShdw blurRad="101600" dist="38100" dir="2700000" algn="bl" rotWithShape="0">
+              <a:srgbClr val="000000">
+                <a:alpha val="18000"/>
+              </a:srgbClr>
+            </a:outerShdw>
+          </a:effectLst>
+        </p:spPr>
+        <p:txBody>
+          <a:bodyPr/>
+          <a:lstStyle/>
+          <a:p>
+            <a:endParaRPr lang="fr-FR" noProof="0" dirty="0"/>
+          </a:p>
+        </p:txBody>
+      </p:sp>
+      <p:sp>
+        <p:nvSpPr>
+          <p:cNvPr id="57" name="Text 12">
+            <a:extLst>
+              <a:ext uri="{FF2B5EF4-FFF2-40B4-BE49-F238E27FC236}">
+                <a16:creationId xmlns:a16="http://schemas.microsoft.com/office/drawing/2014/main" id="{B73C504F-3F8F-9F14-381E-1BE8BFB99894}"/>
+              </a:ext>
+            </a:extLst>
+          </p:cNvPr>
+          <p:cNvSpPr/>
+          <p:nvPr/>
+        </p:nvSpPr>
+        <p:spPr>
+          <a:xfrm>
+            <a:off x="7660688" y="2547510"/>
+            <a:ext cx="2468880" cy="365760"/>
+          </a:xfrm>
+          <a:prstGeom prst="rect">
+            <a:avLst/>
+          </a:prstGeom>
+          <a:noFill/>
+          <a:ln/>
+        </p:spPr>
+        <p:txBody>
+          <a:bodyPr wrap="square" lIns="0" tIns="0" rIns="0" bIns="0" rtlCol="0" anchor="ctr"/>
+          <a:lstStyle/>
+          <a:p>
+            <a:pPr marL="0" indent="0">
+              <a:buNone/>
+            </a:pPr>
+            <a:r>
+              <a:rPr lang="fr-FR" sz="1450" b="1" dirty="0">
+                <a:latin typeface="Calibri" pitchFamily="34" charset="0"/>
+                <a:ea typeface="Calibri" pitchFamily="34" charset="-122"/>
+                <a:cs typeface="Calibri" pitchFamily="34" charset="-120"/>
+              </a:rPr>
+              <a:t>Création de la classe Signal</a:t>
+            </a:r>
+            <a:endParaRPr lang="fr-FR" sz="1450" noProof="0" dirty="0"/>
+          </a:p>
+        </p:txBody>
+      </p:sp>
+      <p:sp>
+        <p:nvSpPr>
+          <p:cNvPr id="59" name="Text 13">
+            <a:extLst>
+              <a:ext uri="{FF2B5EF4-FFF2-40B4-BE49-F238E27FC236}">
+                <a16:creationId xmlns:a16="http://schemas.microsoft.com/office/drawing/2014/main" id="{138112E4-3712-EACF-63EA-8458BE3300EF}"/>
+              </a:ext>
+            </a:extLst>
+          </p:cNvPr>
+          <p:cNvSpPr/>
+          <p:nvPr/>
+        </p:nvSpPr>
+        <p:spPr>
+          <a:xfrm>
+            <a:off x="7088124" y="3254100"/>
+            <a:ext cx="3154680" cy="960120"/>
+          </a:xfrm>
+          <a:prstGeom prst="rect">
+            <a:avLst/>
+          </a:prstGeom>
+          <a:noFill/>
+          <a:ln/>
+        </p:spPr>
+        <p:txBody>
+          <a:bodyPr wrap="square" lIns="0" tIns="0" rIns="0" bIns="0" rtlCol="0" anchor="t"/>
+          <a:lstStyle/>
+          <a:p>
+            <a:pPr>
+              <a:lnSpc>
+                <a:spcPct val="110000"/>
+              </a:lnSpc>
+            </a:pPr>
+            <a:r>
+              <a:rPr lang="fr-FR" sz="1200" b="1" dirty="0">
+                <a:solidFill>
+                  <a:srgbClr val="002060"/>
+                </a:solidFill>
+                <a:latin typeface="Calibri" pitchFamily="34" charset="0"/>
+                <a:ea typeface="Calibri" pitchFamily="34" charset="-122"/>
+                <a:cs typeface="Calibri" pitchFamily="34" charset="-120"/>
+              </a:rPr>
+              <a:t>Simon</a:t>
+            </a:r>
+            <a:endParaRPr lang="fr-FR" sz="1150" noProof="0" dirty="0">
+              <a:solidFill>
+                <a:srgbClr val="002060"/>
+              </a:solidFill>
+            </a:endParaRPr>
+          </a:p>
+        </p:txBody>
+      </p:sp>
+      <p:sp>
+        <p:nvSpPr>
+          <p:cNvPr id="19" name="Shape 14">
+            <a:extLst>
+              <a:ext uri="{FF2B5EF4-FFF2-40B4-BE49-F238E27FC236}">
+                <a16:creationId xmlns:a16="http://schemas.microsoft.com/office/drawing/2014/main" id="{F4F3F832-80BF-DC4D-6756-7702B46EED09}"/>
+              </a:ext>
+            </a:extLst>
+          </p:cNvPr>
+          <p:cNvSpPr/>
+          <p:nvPr/>
+        </p:nvSpPr>
+        <p:spPr>
+          <a:xfrm>
+            <a:off x="6856476" y="3812056"/>
+            <a:ext cx="3611880" cy="1965960"/>
+          </a:xfrm>
+          <a:prstGeom prst="roundRect">
+            <a:avLst>
+              <a:gd name="adj" fmla="val 3256"/>
+            </a:avLst>
+          </a:prstGeom>
+          <a:solidFill>
+            <a:srgbClr val="EAF4F8"/>
+          </a:solidFill>
+          <a:ln/>
+          <a:effectLst>
+            <a:outerShdw blurRad="101600" dist="38100" dir="2700000" algn="bl" rotWithShape="0">
+              <a:srgbClr val="000000">
+                <a:alpha val="18000"/>
+              </a:srgbClr>
+            </a:outerShdw>
+          </a:effectLst>
+        </p:spPr>
+        <p:txBody>
+          <a:bodyPr/>
+          <a:lstStyle/>
+          <a:p>
+            <a:endParaRPr lang="fr-FR" noProof="0" dirty="0"/>
+          </a:p>
+        </p:txBody>
+      </p:sp>
+      <p:sp>
+        <p:nvSpPr>
+          <p:cNvPr id="22" name="Text 16">
+            <a:extLst>
+              <a:ext uri="{FF2B5EF4-FFF2-40B4-BE49-F238E27FC236}">
+                <a16:creationId xmlns:a16="http://schemas.microsoft.com/office/drawing/2014/main" id="{1B8FA3D5-8247-C099-51AC-48E5077E9993}"/>
+              </a:ext>
+            </a:extLst>
+          </p:cNvPr>
+          <p:cNvSpPr/>
+          <p:nvPr/>
+        </p:nvSpPr>
+        <p:spPr>
+          <a:xfrm>
+            <a:off x="7508115" y="4000974"/>
+            <a:ext cx="2468880" cy="365760"/>
+          </a:xfrm>
+          <a:prstGeom prst="rect">
+            <a:avLst/>
+          </a:prstGeom>
+          <a:noFill/>
+          <a:ln/>
+        </p:spPr>
+        <p:txBody>
+          <a:bodyPr wrap="square" lIns="0" tIns="0" rIns="0" bIns="0" rtlCol="0" anchor="ctr"/>
+          <a:lstStyle/>
+          <a:p>
+            <a:pPr marL="0" indent="0">
+              <a:buNone/>
+            </a:pPr>
+            <a:r>
+              <a:rPr lang="fr-FR" sz="1450" b="1" noProof="0" dirty="0">
+                <a:latin typeface="Calibri" pitchFamily="34" charset="0"/>
+                <a:ea typeface="Calibri" pitchFamily="34" charset="-122"/>
+                <a:cs typeface="Calibri" pitchFamily="34" charset="-120"/>
+              </a:rPr>
+              <a:t>Génération du fichier de sortie</a:t>
+            </a:r>
+            <a:endParaRPr lang="fr-FR" sz="1450" noProof="0" dirty="0"/>
+          </a:p>
+        </p:txBody>
+      </p:sp>
+      <p:sp>
+        <p:nvSpPr>
+          <p:cNvPr id="23" name="Text 17">
+            <a:extLst>
+              <a:ext uri="{FF2B5EF4-FFF2-40B4-BE49-F238E27FC236}">
+                <a16:creationId xmlns:a16="http://schemas.microsoft.com/office/drawing/2014/main" id="{2788812D-CCE8-323B-483F-295081B6431D}"/>
+              </a:ext>
+            </a:extLst>
+          </p:cNvPr>
+          <p:cNvSpPr/>
+          <p:nvPr/>
+        </p:nvSpPr>
+        <p:spPr>
+          <a:xfrm>
+            <a:off x="7085076" y="4726456"/>
+            <a:ext cx="3154680" cy="960120"/>
+          </a:xfrm>
+          <a:prstGeom prst="rect">
+            <a:avLst/>
+          </a:prstGeom>
+          <a:noFill/>
+          <a:ln/>
+        </p:spPr>
+        <p:txBody>
+          <a:bodyPr wrap="square" lIns="0" tIns="0" rIns="0" bIns="0" rtlCol="0" anchor="t"/>
+          <a:lstStyle/>
+          <a:p>
+            <a:pPr>
+              <a:lnSpc>
+                <a:spcPct val="110000"/>
+              </a:lnSpc>
+            </a:pPr>
+            <a:r>
+              <a:rPr lang="fr-FR" sz="1200" b="1" dirty="0">
+                <a:solidFill>
+                  <a:srgbClr val="002060"/>
+                </a:solidFill>
+                <a:latin typeface="Calibri" pitchFamily="34" charset="0"/>
+                <a:ea typeface="Calibri" pitchFamily="34" charset="-122"/>
+                <a:cs typeface="Calibri" pitchFamily="34" charset="-120"/>
+              </a:rPr>
+              <a:t>Alex</a:t>
+            </a:r>
+            <a:endParaRPr lang="fr-FR" sz="1150" noProof="0" dirty="0">
+              <a:solidFill>
+                <a:srgbClr val="002060"/>
+              </a:solidFill>
+            </a:endParaRPr>
+          </a:p>
+        </p:txBody>
+      </p:sp>
+      <p:sp>
+        <p:nvSpPr>
+          <p:cNvPr id="60" name="Flèche : double flèche horizontale 59">
+            <a:extLst>
+              <a:ext uri="{FF2B5EF4-FFF2-40B4-BE49-F238E27FC236}">
+                <a16:creationId xmlns:a16="http://schemas.microsoft.com/office/drawing/2014/main" id="{9F71B8DC-85AB-A556-C9D2-909F1387A59A}"/>
+              </a:ext>
+            </a:extLst>
+          </p:cNvPr>
+          <p:cNvSpPr/>
+          <p:nvPr/>
+        </p:nvSpPr>
+        <p:spPr>
+          <a:xfrm>
+            <a:off x="4873982" y="2708068"/>
+            <a:ext cx="1988590" cy="1351371"/>
+          </a:xfrm>
+          <a:prstGeom prst="leftRightArrow">
+            <a:avLst/>
+          </a:prstGeom>
+        </p:spPr>
+        <p:style>
+          <a:lnRef idx="2">
+            <a:schemeClr val="accent1">
+              <a:shade val="15000"/>
+            </a:schemeClr>
+          </a:lnRef>
+          <a:fillRef idx="1">
+            <a:schemeClr val="accent1"/>
+          </a:fillRef>
+          <a:effectRef idx="0">
+            <a:schemeClr val="accent1"/>
+          </a:effectRef>
+          <a:fontRef idx="minor">
+            <a:schemeClr val="lt1"/>
+          </a:fontRef>
+        </p:style>
+        <p:txBody>
+          <a:bodyPr rtlCol="0" anchor="ctr"/>
+          <a:lstStyle/>
+          <a:p>
+            <a:pPr algn="ctr"/>
+            <a:endParaRPr lang="fr-FR"/>
+          </a:p>
+        </p:txBody>
+      </p:sp>
+    </p:spTree>
+    <p:extLst>
+      <p:ext uri="{BB962C8B-B14F-4D97-AF65-F5344CB8AC3E}">
+        <p14:creationId xmlns:p14="http://schemas.microsoft.com/office/powerpoint/2010/main" val="3377757014"/>
+      </p:ext>
+    </p:extLst>
+  </p:cSld>
+  <p:clrMapOvr>
+    <a:masterClrMapping/>
+  </p:clrMapOvr>
+</p:sld>
+</file>
+
+<file path=ppt/slides/slide6.xml><?xml version="1.0" encoding="utf-8"?>
 <p:sld xmlns:a="http://schemas.openxmlformats.org/drawingml/2006/main" xmlns:r="http://schemas.openxmlformats.org/officeDocument/2006/relationships" xmlns:p="http://schemas.openxmlformats.org/presentationml/2006/main">
   <p:cSld name="Slide 5">
     <p:bg>
@@ -6387,7 +8027,7 @@
               <a:buNone/>
             </a:pPr>
             <a:r>
-              <a:rPr lang="en-US" sz="3000" b="1" dirty="0">
+              <a:rPr lang="fr-FR" sz="3000" b="1" noProof="0" dirty="0">
                 <a:solidFill>
                   <a:srgbClr val="21295C"/>
                 </a:solidFill>
@@ -6397,7 +8037,7 @@
               </a:rPr>
               <a:t>Fonctionnement du module</a:t>
             </a:r>
-            <a:endParaRPr lang="en-US" sz="3000" dirty="0"/>
+            <a:endParaRPr lang="fr-FR" sz="3000" noProof="0" dirty="0"/>
           </a:p>
         </p:txBody>
       </p:sp>
@@ -6426,7 +8066,7 @@
               <a:buNone/>
             </a:pPr>
             <a:r>
-              <a:rPr lang="en-US" sz="1400" i="1" dirty="0">
+              <a:rPr lang="fr-FR" sz="1400" i="1" noProof="0" dirty="0">
                 <a:solidFill>
                   <a:srgbClr val="1C7293"/>
                 </a:solidFill>
@@ -6436,7 +8076,7 @@
               </a:rPr>
               <a:t>De la sélection du fichier CSV aux résultats affichés</a:t>
             </a:r>
-            <a:endParaRPr lang="en-US" sz="1400" dirty="0"/>
+            <a:endParaRPr lang="fr-FR" sz="1400" noProof="0" dirty="0"/>
           </a:p>
         </p:txBody>
       </p:sp>
@@ -6466,7 +8106,7 @@
           <a:bodyPr/>
           <a:lstStyle/>
           <a:p>
-            <a:endParaRPr lang="fr-FR"/>
+            <a:endParaRPr lang="fr-FR" noProof="0" dirty="0"/>
           </a:p>
         </p:txBody>
       </p:sp>
@@ -6493,7 +8133,7 @@
           <a:bodyPr/>
           <a:lstStyle/>
           <a:p>
-            <a:endParaRPr lang="fr-FR"/>
+            <a:endParaRPr lang="fr-FR" noProof="0" dirty="0"/>
           </a:p>
         </p:txBody>
       </p:sp>
@@ -6522,7 +8162,7 @@
               <a:buNone/>
             </a:pPr>
             <a:r>
-              <a:rPr lang="en-US" sz="2200" b="1" dirty="0">
+              <a:rPr lang="fr-FR" sz="2200" b="1" noProof="0" dirty="0">
                 <a:solidFill>
                   <a:srgbClr val="FFFFFF"/>
                 </a:solidFill>
@@ -6532,7 +8172,7 @@
               </a:rPr>
               <a:t>1</a:t>
             </a:r>
-            <a:endParaRPr lang="en-US" sz="2200" dirty="0"/>
+            <a:endParaRPr lang="fr-FR" sz="2200" noProof="0" dirty="0"/>
           </a:p>
         </p:txBody>
       </p:sp>
@@ -6568,7 +8208,7 @@
           <a:bodyPr/>
           <a:lstStyle/>
           <a:p>
-            <a:endParaRPr lang="fr-FR"/>
+            <a:endParaRPr lang="fr-FR" noProof="0" dirty="0"/>
           </a:p>
         </p:txBody>
       </p:sp>
@@ -6597,7 +8237,7 @@
               <a:buNone/>
             </a:pPr>
             <a:r>
-              <a:rPr lang="en-US" sz="1400" b="1" dirty="0">
+              <a:rPr lang="fr-FR" sz="1400" b="1" noProof="0" dirty="0">
                 <a:solidFill>
                   <a:srgbClr val="21295C"/>
                 </a:solidFill>
@@ -6607,7 +8247,7 @@
               </a:rPr>
               <a:t>Sélection</a:t>
             </a:r>
-            <a:endParaRPr lang="en-US" sz="1400" dirty="0"/>
+            <a:endParaRPr lang="fr-FR" sz="1400" noProof="0" dirty="0"/>
           </a:p>
         </p:txBody>
       </p:sp>
@@ -6639,7 +8279,7 @@
               <a:buNone/>
             </a:pPr>
             <a:r>
-              <a:rPr lang="en-US" sz="1050" dirty="0">
+              <a:rPr lang="fr-FR" sz="1050" noProof="0" dirty="0">
                 <a:solidFill>
                   <a:srgbClr val="1B2A33"/>
                 </a:solidFill>
@@ -6649,7 +8289,7 @@
               </a:rPr>
               <a:t>L'utilisateur sélectionne un fichier CSV contenant un signal.</a:t>
             </a:r>
-            <a:endParaRPr lang="en-US" sz="1050" dirty="0"/>
+            <a:endParaRPr lang="fr-FR" sz="1050" noProof="0" dirty="0"/>
           </a:p>
         </p:txBody>
       </p:sp>
@@ -6679,7 +8319,7 @@
           <a:bodyPr/>
           <a:lstStyle/>
           <a:p>
-            <a:endParaRPr lang="fr-FR"/>
+            <a:endParaRPr lang="fr-FR" noProof="0" dirty="0"/>
           </a:p>
         </p:txBody>
       </p:sp>
@@ -6706,7 +8346,7 @@
           <a:bodyPr/>
           <a:lstStyle/>
           <a:p>
-            <a:endParaRPr lang="fr-FR"/>
+            <a:endParaRPr lang="fr-FR" noProof="0" dirty="0"/>
           </a:p>
         </p:txBody>
       </p:sp>
@@ -6735,7 +8375,7 @@
               <a:buNone/>
             </a:pPr>
             <a:r>
-              <a:rPr lang="en-US" sz="2200" b="1" dirty="0">
+              <a:rPr lang="fr-FR" sz="2200" b="1" noProof="0" dirty="0">
                 <a:solidFill>
                   <a:srgbClr val="FFFFFF"/>
                 </a:solidFill>
@@ -6745,7 +8385,7 @@
               </a:rPr>
               <a:t>2</a:t>
             </a:r>
-            <a:endParaRPr lang="en-US" sz="2200" dirty="0"/>
+            <a:endParaRPr lang="fr-FR" sz="2200" noProof="0" dirty="0"/>
           </a:p>
         </p:txBody>
       </p:sp>
@@ -6781,7 +8421,7 @@
           <a:bodyPr/>
           <a:lstStyle/>
           <a:p>
-            <a:endParaRPr lang="fr-FR"/>
+            <a:endParaRPr lang="fr-FR" noProof="0" dirty="0"/>
           </a:p>
         </p:txBody>
       </p:sp>
@@ -6810,7 +8450,7 @@
               <a:buNone/>
             </a:pPr>
             <a:r>
-              <a:rPr lang="en-US" sz="1400" b="1" dirty="0">
+              <a:rPr lang="fr-FR" sz="1400" b="1" noProof="0" dirty="0">
                 <a:solidFill>
                   <a:srgbClr val="21295C"/>
                 </a:solidFill>
@@ -6820,7 +8460,7 @@
               </a:rPr>
               <a:t>Chargement</a:t>
             </a:r>
-            <a:endParaRPr lang="en-US" sz="1400" dirty="0"/>
+            <a:endParaRPr lang="fr-FR" sz="1400" noProof="0" dirty="0"/>
           </a:p>
         </p:txBody>
       </p:sp>
@@ -6852,7 +8492,7 @@
               <a:buNone/>
             </a:pPr>
             <a:r>
-              <a:rPr lang="en-US" sz="1050" dirty="0">
+              <a:rPr lang="fr-FR" sz="1050" noProof="0" dirty="0">
                 <a:solidFill>
                   <a:srgbClr val="1B2A33"/>
                 </a:solidFill>
@@ -6862,7 +8502,7 @@
               </a:rPr>
               <a:t>Le programme charge les données du fichier.</a:t>
             </a:r>
-            <a:endParaRPr lang="en-US" sz="1050" dirty="0"/>
+            <a:endParaRPr lang="fr-FR" sz="1050" noProof="0" dirty="0"/>
           </a:p>
         </p:txBody>
       </p:sp>
@@ -6892,7 +8532,7 @@
           <a:bodyPr/>
           <a:lstStyle/>
           <a:p>
-            <a:endParaRPr lang="fr-FR"/>
+            <a:endParaRPr lang="fr-FR" noProof="0" dirty="0"/>
           </a:p>
         </p:txBody>
       </p:sp>
@@ -6919,7 +8559,7 @@
           <a:bodyPr/>
           <a:lstStyle/>
           <a:p>
-            <a:endParaRPr lang="fr-FR"/>
+            <a:endParaRPr lang="fr-FR" noProof="0" dirty="0"/>
           </a:p>
         </p:txBody>
       </p:sp>
@@ -6948,7 +8588,7 @@
               <a:buNone/>
             </a:pPr>
             <a:r>
-              <a:rPr lang="en-US" sz="2200" b="1" dirty="0">
+              <a:rPr lang="fr-FR" sz="2200" b="1" noProof="0" dirty="0">
                 <a:solidFill>
                   <a:srgbClr val="FFFFFF"/>
                 </a:solidFill>
@@ -6958,7 +8598,7 @@
               </a:rPr>
               <a:t>3</a:t>
             </a:r>
-            <a:endParaRPr lang="en-US" sz="2200" dirty="0"/>
+            <a:endParaRPr lang="fr-FR" sz="2200" noProof="0" dirty="0"/>
           </a:p>
         </p:txBody>
       </p:sp>
@@ -6994,7 +8634,7 @@
           <a:bodyPr/>
           <a:lstStyle/>
           <a:p>
-            <a:endParaRPr lang="fr-FR"/>
+            <a:endParaRPr lang="fr-FR" noProof="0" dirty="0"/>
           </a:p>
         </p:txBody>
       </p:sp>
@@ -7023,7 +8663,7 @@
               <a:buNone/>
             </a:pPr>
             <a:r>
-              <a:rPr lang="en-US" sz="1400" b="1" dirty="0">
+              <a:rPr lang="fr-FR" sz="1400" b="1" noProof="0" dirty="0">
                 <a:solidFill>
                   <a:srgbClr val="21295C"/>
                 </a:solidFill>
@@ -7033,7 +8673,7 @@
               </a:rPr>
               <a:t>Extraction</a:t>
             </a:r>
-            <a:endParaRPr lang="en-US" sz="1400" dirty="0"/>
+            <a:endParaRPr lang="fr-FR" sz="1400" noProof="0" dirty="0"/>
           </a:p>
         </p:txBody>
       </p:sp>
@@ -7065,7 +8705,7 @@
               <a:buNone/>
             </a:pPr>
             <a:r>
-              <a:rPr lang="en-US" sz="1050" dirty="0">
+              <a:rPr lang="fr-FR" sz="1050" noProof="0" dirty="0">
                 <a:solidFill>
                   <a:srgbClr val="1B2A33"/>
                 </a:solidFill>
@@ -7075,7 +8715,7 @@
               </a:rPr>
               <a:t>Extraction du vecteur temps et des échantillons du signal.</a:t>
             </a:r>
-            <a:endParaRPr lang="en-US" sz="1050" dirty="0"/>
+            <a:endParaRPr lang="fr-FR" sz="1050" noProof="0" dirty="0"/>
           </a:p>
         </p:txBody>
       </p:sp>
@@ -7105,7 +8745,7 @@
           <a:bodyPr/>
           <a:lstStyle/>
           <a:p>
-            <a:endParaRPr lang="fr-FR"/>
+            <a:endParaRPr lang="fr-FR" noProof="0" dirty="0"/>
           </a:p>
         </p:txBody>
       </p:sp>
@@ -7132,7 +8772,7 @@
           <a:bodyPr/>
           <a:lstStyle/>
           <a:p>
-            <a:endParaRPr lang="fr-FR"/>
+            <a:endParaRPr lang="fr-FR" noProof="0" dirty="0"/>
           </a:p>
         </p:txBody>
       </p:sp>
@@ -7161,7 +8801,7 @@
               <a:buNone/>
             </a:pPr>
             <a:r>
-              <a:rPr lang="en-US" sz="2200" b="1" dirty="0">
+              <a:rPr lang="fr-FR" sz="2200" b="1" noProof="0" dirty="0">
                 <a:solidFill>
                   <a:srgbClr val="FFFFFF"/>
                 </a:solidFill>
@@ -7171,7 +8811,7 @@
               </a:rPr>
               <a:t>4</a:t>
             </a:r>
-            <a:endParaRPr lang="en-US" sz="2200" dirty="0"/>
+            <a:endParaRPr lang="fr-FR" sz="2200" noProof="0" dirty="0"/>
           </a:p>
         </p:txBody>
       </p:sp>
@@ -7207,7 +8847,7 @@
           <a:bodyPr/>
           <a:lstStyle/>
           <a:p>
-            <a:endParaRPr lang="fr-FR"/>
+            <a:endParaRPr lang="fr-FR" noProof="0" dirty="0"/>
           </a:p>
         </p:txBody>
       </p:sp>
@@ -7236,7 +8876,7 @@
               <a:buNone/>
             </a:pPr>
             <a:r>
-              <a:rPr lang="en-US" sz="1400" b="1" dirty="0">
+              <a:rPr lang="fr-FR" sz="1400" b="1" noProof="0" dirty="0">
                 <a:solidFill>
                   <a:srgbClr val="21295C"/>
                 </a:solidFill>
@@ -7246,7 +8886,7 @@
               </a:rPr>
               <a:t>Calcul</a:t>
             </a:r>
-            <a:endParaRPr lang="en-US" sz="1400" dirty="0"/>
+            <a:endParaRPr lang="fr-FR" sz="1400" noProof="0" dirty="0"/>
           </a:p>
         </p:txBody>
       </p:sp>
@@ -7278,7 +8918,7 @@
               <a:buNone/>
             </a:pPr>
             <a:r>
-              <a:rPr lang="en-US" sz="1050" dirty="0">
+              <a:rPr lang="fr-FR" sz="1050" noProof="0" dirty="0">
                 <a:solidFill>
                   <a:srgbClr val="1B2A33"/>
                 </a:solidFill>
@@ -7288,7 +8928,7 @@
               </a:rPr>
               <a:t>Taux d'échantillonnage, durée, nombre d'échantillons, date de traitement.</a:t>
             </a:r>
-            <a:endParaRPr lang="en-US" sz="1050" dirty="0"/>
+            <a:endParaRPr lang="fr-FR" sz="1050" noProof="0" dirty="0"/>
           </a:p>
         </p:txBody>
       </p:sp>
@@ -7315,7 +8955,7 @@
           <a:bodyPr/>
           <a:lstStyle/>
           <a:p>
-            <a:endParaRPr lang="fr-FR"/>
+            <a:endParaRPr lang="fr-FR" noProof="0" dirty="0"/>
           </a:p>
         </p:txBody>
       </p:sp>
@@ -7344,7 +8984,7 @@
               <a:buNone/>
             </a:pPr>
             <a:r>
-              <a:rPr lang="en-US" sz="2200" b="1" dirty="0">
+              <a:rPr lang="fr-FR" sz="2200" b="1" noProof="0" dirty="0">
                 <a:solidFill>
                   <a:srgbClr val="FFFFFF"/>
                 </a:solidFill>
@@ -7354,7 +8994,7 @@
               </a:rPr>
               <a:t>5</a:t>
             </a:r>
-            <a:endParaRPr lang="en-US" sz="2200" dirty="0"/>
+            <a:endParaRPr lang="fr-FR" sz="2200" noProof="0" dirty="0"/>
           </a:p>
         </p:txBody>
       </p:sp>
@@ -7390,7 +9030,7 @@
           <a:bodyPr/>
           <a:lstStyle/>
           <a:p>
-            <a:endParaRPr lang="fr-FR"/>
+            <a:endParaRPr lang="fr-FR" noProof="0" dirty="0"/>
           </a:p>
         </p:txBody>
       </p:sp>
@@ -7419,7 +9059,7 @@
               <a:buNone/>
             </a:pPr>
             <a:r>
-              <a:rPr lang="en-US" sz="1400" b="1" dirty="0">
+              <a:rPr lang="fr-FR" sz="1400" b="1" noProof="0" dirty="0">
                 <a:solidFill>
                   <a:srgbClr val="21295C"/>
                 </a:solidFill>
@@ -7429,7 +9069,7 @@
               </a:rPr>
               <a:t>Affichage</a:t>
             </a:r>
-            <a:endParaRPr lang="en-US" sz="1400" dirty="0"/>
+            <a:endParaRPr lang="fr-FR" sz="1400" noProof="0" dirty="0"/>
           </a:p>
         </p:txBody>
       </p:sp>
@@ -7461,7 +9101,7 @@
               <a:buNone/>
             </a:pPr>
             <a:r>
-              <a:rPr lang="en-US" sz="1050" dirty="0">
+              <a:rPr lang="fr-FR" sz="1050" noProof="0" dirty="0">
                 <a:solidFill>
                   <a:srgbClr val="1B2A33"/>
                 </a:solidFill>
@@ -7471,7 +9111,7 @@
               </a:rPr>
               <a:t>Les résultats sont affichés dans l'interface graphique.</a:t>
             </a:r>
-            <a:endParaRPr lang="en-US" sz="1050" dirty="0"/>
+            <a:endParaRPr lang="fr-FR" sz="1050" noProof="0" dirty="0"/>
           </a:p>
         </p:txBody>
       </p:sp>
@@ -7500,7 +9140,7 @@
               <a:buNone/>
             </a:pPr>
             <a:r>
-              <a:rPr lang="en-US" sz="1300" i="1" dirty="0">
+              <a:rPr lang="fr-FR" sz="1300" i="1" noProof="0" dirty="0">
                 <a:solidFill>
                   <a:srgbClr val="1C7293"/>
                 </a:solidFill>
@@ -7510,7 +9150,7 @@
               </a:rPr>
               <a:t>L'utilisateur peut également renseigner le type et la source du signal.</a:t>
             </a:r>
-            <a:endParaRPr lang="en-US" sz="1300" dirty="0"/>
+            <a:endParaRPr lang="fr-FR" sz="1300" noProof="0" dirty="0"/>
           </a:p>
         </p:txBody>
       </p:sp>
@@ -7539,7 +9179,7 @@
               <a:buNone/>
             </a:pPr>
             <a:r>
-              <a:rPr lang="en-US" sz="900" dirty="0">
+              <a:rPr lang="fr-FR" sz="900" noProof="0" dirty="0">
                 <a:solidFill>
                   <a:srgbClr val="5E7A88"/>
                 </a:solidFill>
@@ -7549,7 +9189,7 @@
               </a:rPr>
               <a:t>Groupe A — Acquisition et analyse de signal</a:t>
             </a:r>
-            <a:endParaRPr lang="en-US" sz="900" dirty="0"/>
+            <a:endParaRPr lang="fr-FR" sz="900" noProof="0" dirty="0"/>
           </a:p>
         </p:txBody>
       </p:sp>
@@ -7578,7 +9218,7 @@
               <a:buNone/>
             </a:pPr>
             <a:r>
-              <a:rPr lang="en-US" sz="900" dirty="0">
+              <a:rPr lang="fr-FR" sz="900" noProof="0" dirty="0">
                 <a:solidFill>
                   <a:srgbClr val="5E7A88"/>
                 </a:solidFill>
@@ -7588,7 +9228,7 @@
               </a:rPr>
               <a:t>5</a:t>
             </a:r>
-            <a:endParaRPr lang="en-US" sz="900" dirty="0"/>
+            <a:endParaRPr lang="fr-FR" sz="900" noProof="0" dirty="0"/>
           </a:p>
         </p:txBody>
       </p:sp>
@@ -7600,7 +9240,7 @@
 </p:sld>
 </file>
 
-<file path=ppt/slides/slide6.xml><?xml version="1.0" encoding="utf-8"?>
+<file path=ppt/slides/slide7.xml><?xml version="1.0" encoding="utf-8"?>
 <p:sld xmlns:a="http://schemas.openxmlformats.org/drawingml/2006/main" xmlns:r="http://schemas.openxmlformats.org/officeDocument/2006/relationships" xmlns:p="http://schemas.openxmlformats.org/presentationml/2006/main">
   <p:cSld>
     <p:bg>
@@ -7662,7 +9302,7 @@
               <a:buNone/>
             </a:pPr>
             <a:r>
-              <a:rPr lang="en-US" sz="3000" b="1" dirty="0">
+              <a:rPr lang="fr-FR" sz="3000" b="1" noProof="0" dirty="0">
                 <a:solidFill>
                   <a:srgbClr val="21295C"/>
                 </a:solidFill>
@@ -7672,7 +9312,7 @@
               </a:rPr>
               <a:t>Interface</a:t>
             </a:r>
-            <a:endParaRPr lang="en-US" sz="3000" dirty="0"/>
+            <a:endParaRPr lang="fr-FR" sz="3000" noProof="0" dirty="0"/>
           </a:p>
         </p:txBody>
       </p:sp>
@@ -7705,7 +9345,7 @@
           <a:bodyPr/>
           <a:lstStyle/>
           <a:p>
-            <a:endParaRPr lang="fr-FR"/>
+            <a:endParaRPr lang="fr-FR" noProof="0" dirty="0"/>
           </a:p>
         </p:txBody>
       </p:sp>
@@ -7740,7 +9380,7 @@
               <a:buNone/>
             </a:pPr>
             <a:r>
-              <a:rPr lang="en-US" sz="2200" b="1" dirty="0">
+              <a:rPr lang="fr-FR" sz="2200" b="1" noProof="0" dirty="0">
                 <a:solidFill>
                   <a:srgbClr val="FFFFFF"/>
                 </a:solidFill>
@@ -7750,7 +9390,7 @@
               </a:rPr>
               <a:t>5</a:t>
             </a:r>
-            <a:endParaRPr lang="en-US" sz="2200" dirty="0"/>
+            <a:endParaRPr lang="fr-FR" sz="2200" noProof="0" dirty="0"/>
           </a:p>
         </p:txBody>
       </p:sp>
@@ -7792,7 +9432,7 @@
           <a:bodyPr/>
           <a:lstStyle/>
           <a:p>
-            <a:endParaRPr lang="fr-FR"/>
+            <a:endParaRPr lang="fr-FR" noProof="0" dirty="0"/>
           </a:p>
         </p:txBody>
       </p:sp>
@@ -7827,7 +9467,7 @@
               <a:buNone/>
             </a:pPr>
             <a:r>
-              <a:rPr lang="en-US" sz="1400" b="1" dirty="0">
+              <a:rPr lang="fr-FR" sz="1400" b="1" noProof="0" dirty="0">
                 <a:solidFill>
                   <a:srgbClr val="21295C"/>
                 </a:solidFill>
@@ -7837,7 +9477,7 @@
               </a:rPr>
               <a:t>Affichage</a:t>
             </a:r>
-            <a:endParaRPr lang="en-US" sz="1400" dirty="0"/>
+            <a:endParaRPr lang="fr-FR" sz="1400" noProof="0" dirty="0"/>
           </a:p>
         </p:txBody>
       </p:sp>
@@ -7875,7 +9515,7 @@
               <a:buNone/>
             </a:pPr>
             <a:r>
-              <a:rPr lang="en-US" sz="1050" dirty="0">
+              <a:rPr lang="fr-FR" sz="1050" noProof="0" dirty="0">
                 <a:solidFill>
                   <a:srgbClr val="1B2A33"/>
                 </a:solidFill>
@@ -7885,7 +9525,7 @@
               </a:rPr>
               <a:t>Les résultats sont affichés dans l'interface graphique.</a:t>
             </a:r>
-            <a:endParaRPr lang="en-US" sz="1050" dirty="0"/>
+            <a:endParaRPr lang="fr-FR" sz="1050" noProof="0" dirty="0"/>
           </a:p>
         </p:txBody>
       </p:sp>
@@ -7903,7 +9543,7 @@
         </p:nvSpPr>
         <p:spPr>
           <a:xfrm>
-            <a:off x="548640" y="5486400"/>
+            <a:off x="548640" y="5732252"/>
             <a:ext cx="11091672" cy="457200"/>
           </a:xfrm>
           <a:prstGeom prst="rect">
@@ -7920,7 +9560,7 @@
               <a:buNone/>
             </a:pPr>
             <a:r>
-              <a:rPr lang="en-US" sz="1300" i="1" dirty="0">
+              <a:rPr lang="fr-FR" sz="1300" i="1" noProof="0" dirty="0">
                 <a:solidFill>
                   <a:srgbClr val="1C7293"/>
                 </a:solidFill>
@@ -7930,7 +9570,7 @@
               </a:rPr>
               <a:t>L'utilisateur peut également renseigner le type et la source du signal.</a:t>
             </a:r>
-            <a:endParaRPr lang="en-US" sz="1300" dirty="0"/>
+            <a:endParaRPr lang="fr-FR" sz="1300" noProof="0" dirty="0"/>
           </a:p>
         </p:txBody>
       </p:sp>
@@ -7965,7 +9605,7 @@
               <a:buNone/>
             </a:pPr>
             <a:r>
-              <a:rPr lang="en-US" sz="900" dirty="0">
+              <a:rPr lang="fr-FR" sz="900" noProof="0" dirty="0">
                 <a:solidFill>
                   <a:srgbClr val="5E7A88"/>
                 </a:solidFill>
@@ -7975,7 +9615,7 @@
               </a:rPr>
               <a:t>Groupe A — Acquisition et analyse de signal</a:t>
             </a:r>
-            <a:endParaRPr lang="en-US" sz="900" dirty="0"/>
+            <a:endParaRPr lang="fr-FR" sz="900" noProof="0" dirty="0"/>
           </a:p>
         </p:txBody>
       </p:sp>
@@ -8010,7 +9650,7 @@
               <a:buNone/>
             </a:pPr>
             <a:r>
-              <a:rPr lang="en-US" sz="900" dirty="0">
+              <a:rPr lang="fr-FR" sz="900" noProof="0" dirty="0">
                 <a:solidFill>
                   <a:srgbClr val="5E7A88"/>
                 </a:solidFill>
@@ -8020,7 +9660,7 @@
               </a:rPr>
               <a:t>5</a:t>
             </a:r>
-            <a:endParaRPr lang="en-US" sz="900" dirty="0"/>
+            <a:endParaRPr lang="fr-FR" sz="900" noProof="0" dirty="0"/>
           </a:p>
         </p:txBody>
       </p:sp>
@@ -8047,8 +9687,8 @@
         </p:blipFill>
         <p:spPr>
           <a:xfrm>
-            <a:off x="1302589" y="1275512"/>
-            <a:ext cx="5555411" cy="3986936"/>
+            <a:off x="679704" y="1225753"/>
+            <a:ext cx="6012611" cy="4315053"/>
           </a:xfrm>
           <a:prstGeom prst="rect">
             <a:avLst/>
@@ -8068,7 +9708,7 @@
 </p:sld>
 </file>
 
-<file path=ppt/slides/slide7.xml><?xml version="1.0" encoding="utf-8"?>
+<file path=ppt/slides/slide8.xml><?xml version="1.0" encoding="utf-8"?>
 <p:sld xmlns:a="http://schemas.openxmlformats.org/drawingml/2006/main" xmlns:r="http://schemas.openxmlformats.org/officeDocument/2006/relationships" xmlns:p="http://schemas.openxmlformats.org/presentationml/2006/main">
   <p:cSld name="Slide 6">
     <p:bg>
@@ -8118,7 +9758,7 @@
               <a:buNone/>
             </a:pPr>
             <a:r>
-              <a:rPr lang="en-US" sz="3000" b="1" dirty="0">
+              <a:rPr lang="fr-FR" sz="3000" b="1" noProof="0" dirty="0">
                 <a:solidFill>
                   <a:srgbClr val="21295C"/>
                 </a:solidFill>
@@ -8128,7 +9768,7 @@
               </a:rPr>
               <a:t>Choix de programmation</a:t>
             </a:r>
-            <a:endParaRPr lang="en-US" sz="3000" dirty="0"/>
+            <a:endParaRPr lang="fr-FR" sz="3000" noProof="0" dirty="0"/>
           </a:p>
         </p:txBody>
       </p:sp>
@@ -8157,7 +9797,7 @@
               <a:buNone/>
             </a:pPr>
             <a:r>
-              <a:rPr lang="en-US" sz="1400" i="1" dirty="0">
+              <a:rPr lang="fr-FR" sz="1400" i="1" noProof="0" dirty="0">
                 <a:solidFill>
                   <a:srgbClr val="1C7293"/>
                 </a:solidFill>
@@ -8167,7 +9807,7 @@
               </a:rPr>
               <a:t>Une architecture orientée objet autour de deux classes</a:t>
             </a:r>
-            <a:endParaRPr lang="en-US" sz="1400" dirty="0"/>
+            <a:endParaRPr lang="fr-FR" sz="1400" noProof="0" dirty="0"/>
           </a:p>
         </p:txBody>
       </p:sp>
@@ -8203,7 +9843,7 @@
           <a:bodyPr/>
           <a:lstStyle/>
           <a:p>
-            <a:endParaRPr lang="fr-FR"/>
+            <a:endParaRPr lang="fr-FR" noProof="0" dirty="0"/>
           </a:p>
         </p:txBody>
       </p:sp>
@@ -8230,7 +9870,7 @@
           <a:bodyPr/>
           <a:lstStyle/>
           <a:p>
-            <a:endParaRPr lang="fr-FR"/>
+            <a:endParaRPr lang="fr-FR" noProof="0" dirty="0"/>
           </a:p>
         </p:txBody>
       </p:sp>
@@ -8283,7 +9923,7 @@
               <a:buNone/>
             </a:pPr>
             <a:r>
-              <a:rPr lang="en-US" sz="1900" b="1" dirty="0">
+              <a:rPr lang="fr-FR" sz="1900" b="1" noProof="0" dirty="0" err="1">
                 <a:solidFill>
                   <a:srgbClr val="FFFFFF"/>
                 </a:solidFill>
@@ -8293,7 +9933,7 @@
               </a:rPr>
               <a:t>MainWindow</a:t>
             </a:r>
-            <a:endParaRPr lang="en-US" sz="1900" dirty="0"/>
+            <a:endParaRPr lang="fr-FR" sz="1900" noProof="0" dirty="0"/>
           </a:p>
         </p:txBody>
       </p:sp>
@@ -8329,9 +9969,9 @@
               <a:buChar char="●"/>
             </a:pPr>
             <a:r>
-              <a:rPr lang="en-US" sz="1350" dirty="0">
-                <a:solidFill>
-                  <a:srgbClr val="D7E9F0"/>
+              <a:rPr lang="fr-FR" sz="1350" noProof="0" dirty="0">
+                <a:solidFill>
+                  <a:schemeClr val="bg1"/>
                 </a:solidFill>
                 <a:latin typeface="Calibri" pitchFamily="34" charset="0"/>
                 <a:ea typeface="Calibri" pitchFamily="34" charset="-122"/>
@@ -8339,7 +9979,11 @@
               </a:rPr>
               <a:t>Gère l'interface graphique</a:t>
             </a:r>
-            <a:endParaRPr lang="en-US" sz="1350" dirty="0"/>
+            <a:endParaRPr lang="fr-FR" sz="1350" noProof="0" dirty="0">
+              <a:solidFill>
+                <a:schemeClr val="bg1"/>
+              </a:solidFill>
+            </a:endParaRPr>
           </a:p>
           <a:p>
             <a:pPr marL="342900" indent="-342900">
@@ -8353,9 +9997,9 @@
               <a:buChar char="●"/>
             </a:pPr>
             <a:r>
-              <a:rPr lang="en-US" sz="1350" dirty="0">
-                <a:solidFill>
-                  <a:srgbClr val="D7E9F0"/>
+              <a:rPr lang="fr-FR" sz="1350" noProof="0" dirty="0">
+                <a:solidFill>
+                  <a:schemeClr val="bg1"/>
                 </a:solidFill>
                 <a:latin typeface="Calibri" pitchFamily="34" charset="0"/>
                 <a:ea typeface="Calibri" pitchFamily="34" charset="-122"/>
@@ -8363,7 +10007,11 @@
               </a:rPr>
               <a:t>Gère les interactions utilisateur</a:t>
             </a:r>
-            <a:endParaRPr lang="en-US" sz="1350" dirty="0"/>
+            <a:endParaRPr lang="fr-FR" sz="1350" noProof="0" dirty="0">
+              <a:solidFill>
+                <a:schemeClr val="bg1"/>
+              </a:solidFill>
+            </a:endParaRPr>
           </a:p>
           <a:p>
             <a:pPr marL="342900" indent="-342900">
@@ -8377,9 +10025,9 @@
               <a:buChar char="●"/>
             </a:pPr>
             <a:r>
-              <a:rPr lang="en-US" sz="1350" dirty="0">
-                <a:solidFill>
-                  <a:srgbClr val="D7E9F0"/>
+              <a:rPr lang="fr-FR" sz="1350" noProof="0" dirty="0">
+                <a:solidFill>
+                  <a:schemeClr val="bg1"/>
                 </a:solidFill>
                 <a:latin typeface="Calibri" pitchFamily="34" charset="0"/>
                 <a:ea typeface="Calibri" pitchFamily="34" charset="-122"/>
@@ -8387,7 +10035,11 @@
               </a:rPr>
               <a:t>Connecte les boutons aux traitements</a:t>
             </a:r>
-            <a:endParaRPr lang="en-US" sz="1350" dirty="0"/>
+            <a:endParaRPr lang="fr-FR" sz="1350" noProof="0" dirty="0">
+              <a:solidFill>
+                <a:schemeClr val="bg1"/>
+              </a:solidFill>
+            </a:endParaRPr>
           </a:p>
         </p:txBody>
       </p:sp>
@@ -8423,7 +10075,7 @@
           <a:bodyPr/>
           <a:lstStyle/>
           <a:p>
-            <a:endParaRPr lang="fr-FR"/>
+            <a:endParaRPr lang="fr-FR" noProof="0" dirty="0"/>
           </a:p>
         </p:txBody>
       </p:sp>
@@ -8450,7 +10102,7 @@
           <a:bodyPr/>
           <a:lstStyle/>
           <a:p>
-            <a:endParaRPr lang="fr-FR"/>
+            <a:endParaRPr lang="fr-FR" noProof="0" dirty="0"/>
           </a:p>
         </p:txBody>
       </p:sp>
@@ -8503,7 +10155,7 @@
               <a:buNone/>
             </a:pPr>
             <a:r>
-              <a:rPr lang="en-US" sz="1900" b="1" dirty="0">
+              <a:rPr lang="fr-FR" sz="1900" b="1" noProof="0" dirty="0" err="1">
                 <a:solidFill>
                   <a:srgbClr val="FFFFFF"/>
                 </a:solidFill>
@@ -8513,7 +10165,7 @@
               </a:rPr>
               <a:t>MonSignalGrpA</a:t>
             </a:r>
-            <a:endParaRPr lang="en-US" sz="1900" dirty="0"/>
+            <a:endParaRPr lang="fr-FR" sz="1900" noProof="0" dirty="0"/>
           </a:p>
         </p:txBody>
       </p:sp>
@@ -8549,9 +10201,9 @@
               <a:buChar char="●"/>
             </a:pPr>
             <a:r>
-              <a:rPr lang="en-US" sz="1350" dirty="0">
-                <a:solidFill>
-                  <a:srgbClr val="D7E9F0"/>
+              <a:rPr lang="fr-FR" sz="1350" noProof="0" dirty="0">
+                <a:solidFill>
+                  <a:schemeClr val="bg1"/>
                 </a:solidFill>
                 <a:latin typeface="Calibri" pitchFamily="34" charset="0"/>
                 <a:ea typeface="Calibri" pitchFamily="34" charset="-122"/>
@@ -8559,7 +10211,11 @@
               </a:rPr>
               <a:t>Représente le signal</a:t>
             </a:r>
-            <a:endParaRPr lang="en-US" sz="1350" dirty="0"/>
+            <a:endParaRPr lang="fr-FR" sz="1350" noProof="0" dirty="0">
+              <a:solidFill>
+                <a:schemeClr val="bg1"/>
+              </a:solidFill>
+            </a:endParaRPr>
           </a:p>
           <a:p>
             <a:pPr marL="342900" indent="-342900">
@@ -8573,9 +10229,9 @@
               <a:buChar char="●"/>
             </a:pPr>
             <a:r>
-              <a:rPr lang="en-US" sz="1350" dirty="0">
-                <a:solidFill>
-                  <a:srgbClr val="D7E9F0"/>
+              <a:rPr lang="fr-FR" sz="1350" noProof="0" dirty="0">
+                <a:solidFill>
+                  <a:schemeClr val="bg1"/>
                 </a:solidFill>
                 <a:latin typeface="Calibri" pitchFamily="34" charset="0"/>
                 <a:ea typeface="Calibri" pitchFamily="34" charset="-122"/>
@@ -8583,7 +10239,11 @@
               </a:rPr>
               <a:t>Contient les données du signal</a:t>
             </a:r>
-            <a:endParaRPr lang="en-US" sz="1350" dirty="0"/>
+            <a:endParaRPr lang="fr-FR" sz="1350" noProof="0" dirty="0">
+              <a:solidFill>
+                <a:schemeClr val="bg1"/>
+              </a:solidFill>
+            </a:endParaRPr>
           </a:p>
           <a:p>
             <a:pPr marL="342900" indent="-342900">
@@ -8597,9 +10257,9 @@
               <a:buChar char="●"/>
             </a:pPr>
             <a:r>
-              <a:rPr lang="en-US" sz="1350" dirty="0">
-                <a:solidFill>
-                  <a:srgbClr val="D7E9F0"/>
+              <a:rPr lang="fr-FR" sz="1350" noProof="0" dirty="0">
+                <a:solidFill>
+                  <a:schemeClr val="bg1"/>
                 </a:solidFill>
                 <a:latin typeface="Calibri" pitchFamily="34" charset="0"/>
                 <a:ea typeface="Calibri" pitchFamily="34" charset="-122"/>
@@ -8607,7 +10267,31 @@
               </a:rPr>
               <a:t>Contient les méthodes d'acquisition et de traitement</a:t>
             </a:r>
-            <a:endParaRPr lang="en-US" sz="1350" dirty="0"/>
+          </a:p>
+          <a:p>
+            <a:pPr marL="342900" indent="-342900">
+              <a:lnSpc>
+                <a:spcPct val="115000"/>
+              </a:lnSpc>
+              <a:spcAft>
+                <a:spcPts val="1000"/>
+              </a:spcAft>
+              <a:buSzPct val="100000"/>
+              <a:buChar char="●"/>
+            </a:pPr>
+            <a:r>
+              <a:rPr lang="fr-FR" sz="1350" dirty="0">
+                <a:solidFill>
+                  <a:schemeClr val="bg1"/>
+                </a:solidFill>
+              </a:rPr>
+              <a:t>Génération du fichier de sortie</a:t>
+            </a:r>
+            <a:endParaRPr lang="fr-FR" sz="1350" noProof="0" dirty="0">
+              <a:solidFill>
+                <a:schemeClr val="bg1"/>
+              </a:solidFill>
+            </a:endParaRPr>
           </a:p>
         </p:txBody>
       </p:sp>
@@ -8636,7 +10320,7 @@
               <a:buNone/>
             </a:pPr>
             <a:r>
-              <a:rPr lang="en-US" sz="1300" i="1" dirty="0">
+              <a:rPr lang="fr-FR" sz="1300" i="1" noProof="0" dirty="0">
                 <a:solidFill>
                   <a:srgbClr val="1C7293"/>
                 </a:solidFill>
@@ -8646,7 +10330,7 @@
               </a:rPr>
               <a:t>Cette séparation améliore la lisibilité du code et facilite sa maintenance.</a:t>
             </a:r>
-            <a:endParaRPr lang="en-US" sz="1300" dirty="0"/>
+            <a:endParaRPr lang="fr-FR" sz="1300" noProof="0" dirty="0"/>
           </a:p>
         </p:txBody>
       </p:sp>
@@ -8675,7 +10359,7 @@
               <a:buNone/>
             </a:pPr>
             <a:r>
-              <a:rPr lang="en-US" sz="900" dirty="0">
+              <a:rPr lang="fr-FR" sz="900" noProof="0" dirty="0">
                 <a:solidFill>
                   <a:srgbClr val="5E7A88"/>
                 </a:solidFill>
@@ -8685,7 +10369,7 @@
               </a:rPr>
               <a:t>Groupe A — Acquisition et analyse de signal</a:t>
             </a:r>
-            <a:endParaRPr lang="en-US" sz="900" dirty="0"/>
+            <a:endParaRPr lang="fr-FR" sz="900" noProof="0" dirty="0"/>
           </a:p>
         </p:txBody>
       </p:sp>
@@ -8714,7 +10398,7 @@
               <a:buNone/>
             </a:pPr>
             <a:r>
-              <a:rPr lang="en-US" sz="900" dirty="0">
+              <a:rPr lang="fr-FR" sz="900" noProof="0" dirty="0">
                 <a:solidFill>
                   <a:srgbClr val="5E7A88"/>
                 </a:solidFill>
@@ -8724,7 +10408,7 @@
               </a:rPr>
               <a:t>6</a:t>
             </a:r>
-            <a:endParaRPr lang="en-US" sz="900" dirty="0"/>
+            <a:endParaRPr lang="fr-FR" sz="900" noProof="0" dirty="0"/>
           </a:p>
         </p:txBody>
       </p:sp>
@@ -8736,7 +10420,7 @@
 </p:sld>
 </file>
 
-<file path=ppt/slides/slide8.xml><?xml version="1.0" encoding="utf-8"?>
+<file path=ppt/slides/slide9.xml><?xml version="1.0" encoding="utf-8"?>
 <p:sld xmlns:a="http://schemas.openxmlformats.org/drawingml/2006/main" xmlns:r="http://schemas.openxmlformats.org/officeDocument/2006/relationships" xmlns:p="http://schemas.openxmlformats.org/presentationml/2006/main">
   <p:cSld name="Slide 7">
     <p:bg>
@@ -8786,7 +10470,7 @@
               <a:buNone/>
             </a:pPr>
             <a:r>
-              <a:rPr lang="en-US" sz="3000" b="1" dirty="0">
+              <a:rPr lang="fr-FR" sz="3000" b="1" noProof="0" dirty="0">
                 <a:solidFill>
                   <a:srgbClr val="21295C"/>
                 </a:solidFill>
@@ -8796,7 +10480,7 @@
               </a:rPr>
               <a:t>Répartition du travail</a:t>
             </a:r>
-            <a:endParaRPr lang="en-US" sz="3000" dirty="0"/>
+            <a:endParaRPr lang="fr-FR" sz="3000" noProof="0" dirty="0"/>
           </a:p>
         </p:txBody>
       </p:sp>
@@ -8825,7 +10509,7 @@
               <a:buNone/>
             </a:pPr>
             <a:r>
-              <a:rPr lang="en-US" sz="1400" i="1" dirty="0">
+              <a:rPr lang="fr-FR" sz="1400" i="1" noProof="0" dirty="0">
                 <a:solidFill>
                   <a:srgbClr val="1C7293"/>
                 </a:solidFill>
@@ -8835,7 +10519,7 @@
               </a:rPr>
               <a:t>Un travail réparti et centralisé grâce à Git</a:t>
             </a:r>
-            <a:endParaRPr lang="en-US" sz="1400" dirty="0"/>
+            <a:endParaRPr lang="fr-FR" sz="1400" noProof="0" dirty="0"/>
           </a:p>
         </p:txBody>
       </p:sp>
@@ -8864,7 +10548,7 @@
           <a:bodyPr/>
           <a:lstStyle/>
           <a:p>
-            <a:endParaRPr lang="fr-FR"/>
+            <a:endParaRPr lang="fr-FR" noProof="0" dirty="0"/>
           </a:p>
         </p:txBody>
       </p:sp>
@@ -8891,7 +10575,7 @@
           <a:bodyPr/>
           <a:lstStyle/>
           <a:p>
-            <a:endParaRPr lang="fr-FR"/>
+            <a:endParaRPr lang="fr-FR" noProof="0" dirty="0"/>
           </a:p>
         </p:txBody>
       </p:sp>
@@ -8944,7 +10628,7 @@
               <a:buNone/>
             </a:pPr>
             <a:r>
-              <a:rPr lang="en-US" sz="1350" dirty="0">
+              <a:rPr lang="fr-FR" sz="1350" noProof="0" dirty="0">
                 <a:solidFill>
                   <a:srgbClr val="1B2A33"/>
                 </a:solidFill>
@@ -8954,7 +10638,7 @@
               </a:rPr>
               <a:t>Conception de l'interface graphique</a:t>
             </a:r>
-            <a:endParaRPr lang="en-US" sz="1350" dirty="0"/>
+            <a:endParaRPr lang="fr-FR" sz="1350" noProof="0" dirty="0"/>
           </a:p>
         </p:txBody>
       </p:sp>
@@ -8983,7 +10667,7 @@
           <a:bodyPr/>
           <a:lstStyle/>
           <a:p>
-            <a:endParaRPr lang="fr-FR"/>
+            <a:endParaRPr lang="fr-FR" noProof="0" dirty="0"/>
           </a:p>
         </p:txBody>
       </p:sp>
@@ -9010,7 +10694,7 @@
           <a:bodyPr/>
           <a:lstStyle/>
           <a:p>
-            <a:endParaRPr lang="fr-FR"/>
+            <a:endParaRPr lang="fr-FR" noProof="0" dirty="0"/>
           </a:p>
         </p:txBody>
       </p:sp>
@@ -9063,7 +10747,7 @@
               <a:buNone/>
             </a:pPr>
             <a:r>
-              <a:rPr lang="en-US" sz="1350" dirty="0">
+              <a:rPr lang="fr-FR" sz="1350" noProof="0" dirty="0">
                 <a:solidFill>
                   <a:srgbClr val="1B2A33"/>
                 </a:solidFill>
@@ -9073,7 +10757,7 @@
               </a:rPr>
               <a:t>Développement des classes Python</a:t>
             </a:r>
-            <a:endParaRPr lang="en-US" sz="1350" dirty="0"/>
+            <a:endParaRPr lang="fr-FR" sz="1350" noProof="0" dirty="0"/>
           </a:p>
         </p:txBody>
       </p:sp>
@@ -9102,7 +10786,7 @@
           <a:bodyPr/>
           <a:lstStyle/>
           <a:p>
-            <a:endParaRPr lang="fr-FR"/>
+            <a:endParaRPr lang="fr-FR" noProof="0" dirty="0"/>
           </a:p>
         </p:txBody>
       </p:sp>
@@ -9129,7 +10813,7 @@
           <a:bodyPr/>
           <a:lstStyle/>
           <a:p>
-            <a:endParaRPr lang="fr-FR"/>
+            <a:endParaRPr lang="fr-FR" noProof="0" dirty="0"/>
           </a:p>
         </p:txBody>
       </p:sp>
@@ -9182,7 +10866,7 @@
               <a:buNone/>
             </a:pPr>
             <a:r>
-              <a:rPr lang="en-US" sz="1350" dirty="0">
+              <a:rPr lang="fr-FR" sz="1350" noProof="0" dirty="0">
                 <a:solidFill>
                   <a:srgbClr val="1B2A33"/>
                 </a:solidFill>
@@ -9192,7 +10876,7 @@
               </a:rPr>
               <a:t>Gestion des fichiers CSV</a:t>
             </a:r>
-            <a:endParaRPr lang="en-US" sz="1350" dirty="0"/>
+            <a:endParaRPr lang="fr-FR" sz="1350" noProof="0" dirty="0"/>
           </a:p>
         </p:txBody>
       </p:sp>
@@ -9221,7 +10905,7 @@
           <a:bodyPr/>
           <a:lstStyle/>
           <a:p>
-            <a:endParaRPr lang="fr-FR"/>
+            <a:endParaRPr lang="fr-FR" noProof="0" dirty="0"/>
           </a:p>
         </p:txBody>
       </p:sp>
@@ -9248,7 +10932,7 @@
           <a:bodyPr/>
           <a:lstStyle/>
           <a:p>
-            <a:endParaRPr lang="fr-FR"/>
+            <a:endParaRPr lang="fr-FR" noProof="0" dirty="0"/>
           </a:p>
         </p:txBody>
       </p:sp>
@@ -9301,7 +10985,7 @@
               <a:buNone/>
             </a:pPr>
             <a:r>
-              <a:rPr lang="en-US" sz="1350" dirty="0">
+              <a:rPr lang="fr-FR" sz="1350" noProof="0" dirty="0">
                 <a:solidFill>
                   <a:srgbClr val="1B2A33"/>
                 </a:solidFill>
@@ -9311,7 +10995,7 @@
               </a:rPr>
               <a:t>Calcul des caractéristiques du signal</a:t>
             </a:r>
-            <a:endParaRPr lang="en-US" sz="1350" dirty="0"/>
+            <a:endParaRPr lang="fr-FR" sz="1350" noProof="0" dirty="0"/>
           </a:p>
         </p:txBody>
       </p:sp>
@@ -9340,7 +11024,7 @@
           <a:bodyPr/>
           <a:lstStyle/>
           <a:p>
-            <a:endParaRPr lang="fr-FR"/>
+            <a:endParaRPr lang="fr-FR" noProof="0" dirty="0"/>
           </a:p>
         </p:txBody>
       </p:sp>
@@ -9367,7 +11051,7 @@
           <a:bodyPr/>
           <a:lstStyle/>
           <a:p>
-            <a:endParaRPr lang="fr-FR"/>
+            <a:endParaRPr lang="fr-FR" noProof="0" dirty="0"/>
           </a:p>
         </p:txBody>
       </p:sp>
@@ -9420,7 +11104,7 @@
               <a:buNone/>
             </a:pPr>
             <a:r>
-              <a:rPr lang="en-US" sz="1350" dirty="0">
+              <a:rPr lang="fr-FR" sz="1350" noProof="0" dirty="0">
                 <a:solidFill>
                   <a:srgbClr val="1B2A33"/>
                 </a:solidFill>
@@ -9430,7 +11114,7 @@
               </a:rPr>
               <a:t>Documentation</a:t>
             </a:r>
-            <a:endParaRPr lang="en-US" sz="1350" dirty="0"/>
+            <a:endParaRPr lang="fr-FR" sz="1350" noProof="0" dirty="0"/>
           </a:p>
         </p:txBody>
       </p:sp>
@@ -9459,7 +11143,7 @@
           <a:bodyPr/>
           <a:lstStyle/>
           <a:p>
-            <a:endParaRPr lang="fr-FR"/>
+            <a:endParaRPr lang="fr-FR" noProof="0" dirty="0"/>
           </a:p>
         </p:txBody>
       </p:sp>
@@ -9486,7 +11170,7 @@
           <a:bodyPr/>
           <a:lstStyle/>
           <a:p>
-            <a:endParaRPr lang="fr-FR"/>
+            <a:endParaRPr lang="fr-FR" noProof="0" dirty="0"/>
           </a:p>
         </p:txBody>
       </p:sp>
@@ -9539,7 +11223,7 @@
               <a:buNone/>
             </a:pPr>
             <a:r>
-              <a:rPr lang="en-US" sz="1350" dirty="0">
+              <a:rPr lang="fr-FR" sz="1350" noProof="0" dirty="0">
                 <a:solidFill>
                   <a:srgbClr val="1B2A33"/>
                 </a:solidFill>
@@ -9549,7 +11233,7 @@
               </a:rPr>
               <a:t>Validation et tests</a:t>
             </a:r>
-            <a:endParaRPr lang="en-US" sz="1350" dirty="0"/>
+            <a:endParaRPr lang="fr-FR" sz="1350" noProof="0" dirty="0"/>
           </a:p>
         </p:txBody>
       </p:sp>
@@ -9578,7 +11262,7 @@
           <a:bodyPr/>
           <a:lstStyle/>
           <a:p>
-            <a:endParaRPr lang="fr-FR"/>
+            <a:endParaRPr lang="fr-FR" noProof="0" dirty="0"/>
           </a:p>
         </p:txBody>
       </p:sp>
@@ -9605,7 +11289,7 @@
           <a:bodyPr/>
           <a:lstStyle/>
           <a:p>
-            <a:endParaRPr lang="fr-FR"/>
+            <a:endParaRPr lang="fr-FR" noProof="0" dirty="0"/>
           </a:p>
         </p:txBody>
       </p:sp>
@@ -9658,7 +11342,7 @@
               <a:buNone/>
             </a:pPr>
             <a:r>
-              <a:rPr lang="en-US" sz="1250" i="1" dirty="0">
+              <a:rPr lang="fr-FR" sz="1250" i="1" noProof="0" dirty="0">
                 <a:solidFill>
                   <a:srgbClr val="FFFFFF"/>
                 </a:solidFill>
@@ -9668,7 +11352,7 @@
               </a:rPr>
               <a:t>Git a permis de centraliser les développements et de suivre les contributions de chacun.</a:t>
             </a:r>
-            <a:endParaRPr lang="en-US" sz="1250" dirty="0"/>
+            <a:endParaRPr lang="fr-FR" sz="1250" noProof="0" dirty="0"/>
           </a:p>
         </p:txBody>
       </p:sp>
@@ -9697,7 +11381,7 @@
               <a:buNone/>
             </a:pPr>
             <a:r>
-              <a:rPr lang="en-US" sz="900" dirty="0">
+              <a:rPr lang="fr-FR" sz="900" noProof="0" dirty="0">
                 <a:solidFill>
                   <a:srgbClr val="5E7A88"/>
                 </a:solidFill>
@@ -9707,7 +11391,7 @@
               </a:rPr>
               <a:t>Groupe A — Acquisition et analyse de signal</a:t>
             </a:r>
-            <a:endParaRPr lang="en-US" sz="900" dirty="0"/>
+            <a:endParaRPr lang="fr-FR" sz="900" noProof="0" dirty="0"/>
           </a:p>
         </p:txBody>
       </p:sp>
@@ -9736,7 +11420,7 @@
               <a:buNone/>
             </a:pPr>
             <a:r>
-              <a:rPr lang="en-US" sz="900" dirty="0">
+              <a:rPr lang="fr-FR" sz="900" noProof="0" dirty="0">
                 <a:solidFill>
                   <a:srgbClr val="5E7A88"/>
                 </a:solidFill>
@@ -9746,646 +11430,7 @@
               </a:rPr>
               <a:t>7</a:t>
             </a:r>
-            <a:endParaRPr lang="en-US" sz="900" dirty="0"/>
-          </a:p>
-        </p:txBody>
-      </p:sp>
-    </p:spTree>
-  </p:cSld>
-  <p:clrMapOvr>
-    <a:masterClrMapping/>
-  </p:clrMapOvr>
-</p:sld>
-</file>
-
-<file path=ppt/slides/slide9.xml><?xml version="1.0" encoding="utf-8"?>
-<p:sld xmlns:a="http://schemas.openxmlformats.org/drawingml/2006/main" xmlns:r="http://schemas.openxmlformats.org/officeDocument/2006/relationships" xmlns:p="http://schemas.openxmlformats.org/presentationml/2006/main">
-  <p:cSld name="Slide 8">
-    <p:bg>
-      <p:bgPr>
-        <a:solidFill>
-          <a:srgbClr val="21295C"/>
-        </a:solidFill>
-        <a:effectLst/>
-      </p:bgPr>
-    </p:bg>
-    <p:spTree>
-      <p:nvGrpSpPr>
-        <p:cNvPr id="1" name=""/>
-        <p:cNvGrpSpPr/>
-        <p:nvPr/>
-      </p:nvGrpSpPr>
-      <p:grpSpPr>
-        <a:xfrm>
-          <a:off x="0" y="0"/>
-          <a:ext cx="0" cy="0"/>
-          <a:chOff x="0" y="0"/>
-          <a:chExt cx="0" cy="0"/>
-        </a:xfrm>
-      </p:grpSpPr>
-      <p:sp>
-        <p:nvSpPr>
-          <p:cNvPr id="2" name="Text 0"/>
-          <p:cNvSpPr/>
-          <p:nvPr/>
-        </p:nvSpPr>
-        <p:spPr>
-          <a:xfrm>
-            <a:off x="548640" y="411480"/>
-            <a:ext cx="11091672" cy="640080"/>
-          </a:xfrm>
-          <a:prstGeom prst="rect">
-            <a:avLst/>
-          </a:prstGeom>
-          <a:noFill/>
-          <a:ln/>
-        </p:spPr>
-        <p:txBody>
-          <a:bodyPr wrap="square" lIns="0" tIns="0" rIns="0" bIns="0" rtlCol="0" anchor="ctr"/>
-          <a:lstStyle/>
-          <a:p>
-            <a:pPr marL="0" indent="0">
-              <a:buNone/>
-            </a:pPr>
-            <a:r>
-              <a:rPr lang="en-US" sz="3000" b="1" dirty="0">
-                <a:solidFill>
-                  <a:srgbClr val="FFFFFF"/>
-                </a:solidFill>
-                <a:latin typeface="Cambria" pitchFamily="34" charset="0"/>
-                <a:ea typeface="Cambria" pitchFamily="34" charset="-122"/>
-                <a:cs typeface="Cambria" pitchFamily="34" charset="-120"/>
-              </a:rPr>
-              <a:t>Difficultés rencontrées</a:t>
-            </a:r>
-            <a:endParaRPr lang="en-US" sz="3000" dirty="0"/>
-          </a:p>
-        </p:txBody>
-      </p:sp>
-      <p:sp>
-        <p:nvSpPr>
-          <p:cNvPr id="3" name="Text 1"/>
-          <p:cNvSpPr/>
-          <p:nvPr/>
-        </p:nvSpPr>
-        <p:spPr>
-          <a:xfrm>
-            <a:off x="548640" y="987552"/>
-            <a:ext cx="11091672" cy="365760"/>
-          </a:xfrm>
-          <a:prstGeom prst="rect">
-            <a:avLst/>
-          </a:prstGeom>
-          <a:noFill/>
-          <a:ln/>
-        </p:spPr>
-        <p:txBody>
-          <a:bodyPr wrap="square" lIns="0" tIns="0" rIns="0" bIns="0" rtlCol="0" anchor="ctr"/>
-          <a:lstStyle/>
-          <a:p>
-            <a:pPr marL="0" indent="0">
-              <a:buNone/>
-            </a:pPr>
-            <a:r>
-              <a:rPr lang="en-US" sz="1400" i="1" dirty="0">
-                <a:solidFill>
-                  <a:srgbClr val="9FB7C4"/>
-                </a:solidFill>
-                <a:latin typeface="Calibri" pitchFamily="34" charset="0"/>
-                <a:ea typeface="Calibri" pitchFamily="34" charset="-122"/>
-                <a:cs typeface="Calibri" pitchFamily="34" charset="-120"/>
-              </a:rPr>
-              <a:t>Des obstacles progressivement résolus par les tests et le travail collaboratif</a:t>
-            </a:r>
-            <a:endParaRPr lang="en-US" sz="1400" dirty="0"/>
-          </a:p>
-        </p:txBody>
-      </p:sp>
-      <p:sp>
-        <p:nvSpPr>
-          <p:cNvPr id="4" name="Shape 2"/>
-          <p:cNvSpPr/>
-          <p:nvPr/>
-        </p:nvSpPr>
-        <p:spPr>
-          <a:xfrm>
-            <a:off x="1097280" y="1874520"/>
-            <a:ext cx="502920" cy="502920"/>
-          </a:xfrm>
-          <a:prstGeom prst="ellipse">
-            <a:avLst/>
-          </a:prstGeom>
-          <a:solidFill>
-            <a:srgbClr val="1C7293"/>
-          </a:solidFill>
-          <a:ln/>
-        </p:spPr>
-        <p:txBody>
-          <a:bodyPr/>
-          <a:lstStyle/>
-          <a:p>
-            <a:endParaRPr lang="fr-FR"/>
-          </a:p>
-        </p:txBody>
-      </p:sp>
-      <p:pic>
-        <p:nvPicPr>
-          <p:cNvPr id="5" name="Image 0" descr="/home/claude/groupA_pptx/icon_warning.png"/>
-          <p:cNvPicPr>
-            <a:picLocks noChangeAspect="1"/>
-          </p:cNvPicPr>
-          <p:nvPr/>
-        </p:nvPicPr>
-        <p:blipFill>
-          <a:blip r:embed="rId3"/>
-          <a:stretch>
-            <a:fillRect/>
-          </a:stretch>
-        </p:blipFill>
-        <p:spPr>
-          <a:xfrm>
-            <a:off x="1210437" y="1987677"/>
-            <a:ext cx="276606" cy="276606"/>
-          </a:xfrm>
-          <a:prstGeom prst="rect">
-            <a:avLst/>
-          </a:prstGeom>
-        </p:spPr>
-      </p:pic>
-      <p:sp>
-        <p:nvSpPr>
-          <p:cNvPr id="6" name="Text 3"/>
-          <p:cNvSpPr/>
-          <p:nvPr/>
-        </p:nvSpPr>
-        <p:spPr>
-          <a:xfrm>
-            <a:off x="1828800" y="1828800"/>
-            <a:ext cx="8686800" cy="594360"/>
-          </a:xfrm>
-          <a:prstGeom prst="rect">
-            <a:avLst/>
-          </a:prstGeom>
-          <a:noFill/>
-          <a:ln/>
-        </p:spPr>
-        <p:txBody>
-          <a:bodyPr wrap="square" lIns="0" tIns="0" rIns="0" bIns="0" rtlCol="0" anchor="ctr"/>
-          <a:lstStyle/>
-          <a:p>
-            <a:pPr marL="0" indent="0">
-              <a:buNone/>
-            </a:pPr>
-            <a:r>
-              <a:rPr lang="en-US" sz="1500" dirty="0">
-                <a:solidFill>
-                  <a:srgbClr val="FFFFFF"/>
-                </a:solidFill>
-                <a:latin typeface="Calibri" pitchFamily="34" charset="0"/>
-                <a:ea typeface="Calibri" pitchFamily="34" charset="-122"/>
-                <a:cs typeface="Calibri" pitchFamily="34" charset="-120"/>
-              </a:rPr>
-              <a:t>Prise en main de PyQt5</a:t>
-            </a:r>
-            <a:endParaRPr lang="en-US" sz="1500" dirty="0"/>
-          </a:p>
-        </p:txBody>
-      </p:sp>
-      <p:sp>
-        <p:nvSpPr>
-          <p:cNvPr id="7" name="Shape 4"/>
-          <p:cNvSpPr/>
-          <p:nvPr/>
-        </p:nvSpPr>
-        <p:spPr>
-          <a:xfrm>
-            <a:off x="1097280" y="2770632"/>
-            <a:ext cx="502920" cy="502920"/>
-          </a:xfrm>
-          <a:prstGeom prst="ellipse">
-            <a:avLst/>
-          </a:prstGeom>
-          <a:solidFill>
-            <a:srgbClr val="1C7293"/>
-          </a:solidFill>
-          <a:ln/>
-        </p:spPr>
-        <p:txBody>
-          <a:bodyPr/>
-          <a:lstStyle/>
-          <a:p>
-            <a:endParaRPr lang="fr-FR"/>
-          </a:p>
-        </p:txBody>
-      </p:sp>
-      <p:pic>
-        <p:nvPicPr>
-          <p:cNvPr id="8" name="Image 1" descr="/home/claude/groupA_pptx/icon_warning.png"/>
-          <p:cNvPicPr>
-            <a:picLocks noChangeAspect="1"/>
-          </p:cNvPicPr>
-          <p:nvPr/>
-        </p:nvPicPr>
-        <p:blipFill>
-          <a:blip r:embed="rId3"/>
-          <a:stretch>
-            <a:fillRect/>
-          </a:stretch>
-        </p:blipFill>
-        <p:spPr>
-          <a:xfrm>
-            <a:off x="1210437" y="2883789"/>
-            <a:ext cx="276606" cy="276606"/>
-          </a:xfrm>
-          <a:prstGeom prst="rect">
-            <a:avLst/>
-          </a:prstGeom>
-        </p:spPr>
-      </p:pic>
-      <p:sp>
-        <p:nvSpPr>
-          <p:cNvPr id="9" name="Text 5"/>
-          <p:cNvSpPr/>
-          <p:nvPr/>
-        </p:nvSpPr>
-        <p:spPr>
-          <a:xfrm>
-            <a:off x="1828800" y="2724912"/>
-            <a:ext cx="8686800" cy="594360"/>
-          </a:xfrm>
-          <a:prstGeom prst="rect">
-            <a:avLst/>
-          </a:prstGeom>
-          <a:noFill/>
-          <a:ln/>
-        </p:spPr>
-        <p:txBody>
-          <a:bodyPr wrap="square" lIns="0" tIns="0" rIns="0" bIns="0" rtlCol="0" anchor="ctr"/>
-          <a:lstStyle/>
-          <a:p>
-            <a:pPr marL="0" indent="0">
-              <a:buNone/>
-            </a:pPr>
-            <a:r>
-              <a:rPr lang="en-US" sz="1500" dirty="0">
-                <a:solidFill>
-                  <a:srgbClr val="FFFFFF"/>
-                </a:solidFill>
-                <a:latin typeface="Calibri" pitchFamily="34" charset="0"/>
-                <a:ea typeface="Calibri" pitchFamily="34" charset="-122"/>
-                <a:cs typeface="Calibri" pitchFamily="34" charset="-120"/>
-              </a:rPr>
-              <a:t>Gestion des événements graphiques</a:t>
-            </a:r>
-            <a:endParaRPr lang="en-US" sz="1500" dirty="0"/>
-          </a:p>
-        </p:txBody>
-      </p:sp>
-      <p:sp>
-        <p:nvSpPr>
-          <p:cNvPr id="10" name="Shape 6"/>
-          <p:cNvSpPr/>
-          <p:nvPr/>
-        </p:nvSpPr>
-        <p:spPr>
-          <a:xfrm>
-            <a:off x="1097280" y="3666744"/>
-            <a:ext cx="502920" cy="502920"/>
-          </a:xfrm>
-          <a:prstGeom prst="ellipse">
-            <a:avLst/>
-          </a:prstGeom>
-          <a:solidFill>
-            <a:srgbClr val="1C7293"/>
-          </a:solidFill>
-          <a:ln/>
-        </p:spPr>
-        <p:txBody>
-          <a:bodyPr/>
-          <a:lstStyle/>
-          <a:p>
-            <a:endParaRPr lang="fr-FR"/>
-          </a:p>
-        </p:txBody>
-      </p:sp>
-      <p:pic>
-        <p:nvPicPr>
-          <p:cNvPr id="11" name="Image 2" descr="/home/claude/groupA_pptx/icon_warning.png"/>
-          <p:cNvPicPr>
-            <a:picLocks noChangeAspect="1"/>
-          </p:cNvPicPr>
-          <p:nvPr/>
-        </p:nvPicPr>
-        <p:blipFill>
-          <a:blip r:embed="rId3"/>
-          <a:stretch>
-            <a:fillRect/>
-          </a:stretch>
-        </p:blipFill>
-        <p:spPr>
-          <a:xfrm>
-            <a:off x="1210437" y="3779901"/>
-            <a:ext cx="276606" cy="276606"/>
-          </a:xfrm>
-          <a:prstGeom prst="rect">
-            <a:avLst/>
-          </a:prstGeom>
-        </p:spPr>
-      </p:pic>
-      <p:sp>
-        <p:nvSpPr>
-          <p:cNvPr id="12" name="Text 7"/>
-          <p:cNvSpPr/>
-          <p:nvPr/>
-        </p:nvSpPr>
-        <p:spPr>
-          <a:xfrm>
-            <a:off x="1828800" y="3621024"/>
-            <a:ext cx="8686800" cy="594360"/>
-          </a:xfrm>
-          <a:prstGeom prst="rect">
-            <a:avLst/>
-          </a:prstGeom>
-          <a:noFill/>
-          <a:ln/>
-        </p:spPr>
-        <p:txBody>
-          <a:bodyPr wrap="square" lIns="0" tIns="0" rIns="0" bIns="0" rtlCol="0" anchor="ctr"/>
-          <a:lstStyle/>
-          <a:p>
-            <a:pPr marL="0" indent="0">
-              <a:buNone/>
-            </a:pPr>
-            <a:r>
-              <a:rPr lang="en-US" sz="1500" dirty="0">
-                <a:solidFill>
-                  <a:srgbClr val="FFFFFF"/>
-                </a:solidFill>
-                <a:latin typeface="Calibri" pitchFamily="34" charset="0"/>
-                <a:ea typeface="Calibri" pitchFamily="34" charset="-122"/>
-                <a:cs typeface="Calibri" pitchFamily="34" charset="-120"/>
-              </a:rPr>
-              <a:t>Lecture sécurisée des fichiers CSV</a:t>
-            </a:r>
-            <a:endParaRPr lang="en-US" sz="1500" dirty="0"/>
-          </a:p>
-        </p:txBody>
-      </p:sp>
-      <p:sp>
-        <p:nvSpPr>
-          <p:cNvPr id="13" name="Shape 8"/>
-          <p:cNvSpPr/>
-          <p:nvPr/>
-        </p:nvSpPr>
-        <p:spPr>
-          <a:xfrm>
-            <a:off x="1097280" y="4562856"/>
-            <a:ext cx="502920" cy="502920"/>
-          </a:xfrm>
-          <a:prstGeom prst="ellipse">
-            <a:avLst/>
-          </a:prstGeom>
-          <a:solidFill>
-            <a:srgbClr val="1C7293"/>
-          </a:solidFill>
-          <a:ln/>
-        </p:spPr>
-        <p:txBody>
-          <a:bodyPr/>
-          <a:lstStyle/>
-          <a:p>
-            <a:endParaRPr lang="fr-FR"/>
-          </a:p>
-        </p:txBody>
-      </p:sp>
-      <p:pic>
-        <p:nvPicPr>
-          <p:cNvPr id="14" name="Image 3" descr="/home/claude/groupA_pptx/icon_warning.png"/>
-          <p:cNvPicPr>
-            <a:picLocks noChangeAspect="1"/>
-          </p:cNvPicPr>
-          <p:nvPr/>
-        </p:nvPicPr>
-        <p:blipFill>
-          <a:blip r:embed="rId3"/>
-          <a:stretch>
-            <a:fillRect/>
-          </a:stretch>
-        </p:blipFill>
-        <p:spPr>
-          <a:xfrm>
-            <a:off x="1210437" y="4676013"/>
-            <a:ext cx="276606" cy="276606"/>
-          </a:xfrm>
-          <a:prstGeom prst="rect">
-            <a:avLst/>
-          </a:prstGeom>
-        </p:spPr>
-      </p:pic>
-      <p:sp>
-        <p:nvSpPr>
-          <p:cNvPr id="15" name="Text 9"/>
-          <p:cNvSpPr/>
-          <p:nvPr/>
-        </p:nvSpPr>
-        <p:spPr>
-          <a:xfrm>
-            <a:off x="1828800" y="4517136"/>
-            <a:ext cx="8686800" cy="594360"/>
-          </a:xfrm>
-          <a:prstGeom prst="rect">
-            <a:avLst/>
-          </a:prstGeom>
-          <a:noFill/>
-          <a:ln/>
-        </p:spPr>
-        <p:txBody>
-          <a:bodyPr wrap="square" lIns="0" tIns="0" rIns="0" bIns="0" rtlCol="0" anchor="ctr"/>
-          <a:lstStyle/>
-          <a:p>
-            <a:pPr marL="0" indent="0">
-              <a:buNone/>
-            </a:pPr>
-            <a:r>
-              <a:rPr lang="en-US" sz="1500" dirty="0">
-                <a:solidFill>
-                  <a:srgbClr val="FFFFFF"/>
-                </a:solidFill>
-                <a:latin typeface="Calibri" pitchFamily="34" charset="0"/>
-                <a:ea typeface="Calibri" pitchFamily="34" charset="-122"/>
-                <a:cs typeface="Calibri" pitchFamily="34" charset="-120"/>
-              </a:rPr>
-              <a:t>Respect des normes PEP8</a:t>
-            </a:r>
-            <a:endParaRPr lang="en-US" sz="1500" dirty="0"/>
-          </a:p>
-        </p:txBody>
-      </p:sp>
-      <p:sp>
-        <p:nvSpPr>
-          <p:cNvPr id="16" name="Shape 10"/>
-          <p:cNvSpPr/>
-          <p:nvPr/>
-        </p:nvSpPr>
-        <p:spPr>
-          <a:xfrm>
-            <a:off x="1097280" y="5458968"/>
-            <a:ext cx="502920" cy="502920"/>
-          </a:xfrm>
-          <a:prstGeom prst="ellipse">
-            <a:avLst/>
-          </a:prstGeom>
-          <a:solidFill>
-            <a:srgbClr val="1C7293"/>
-          </a:solidFill>
-          <a:ln/>
-        </p:spPr>
-        <p:txBody>
-          <a:bodyPr/>
-          <a:lstStyle/>
-          <a:p>
-            <a:endParaRPr lang="fr-FR"/>
-          </a:p>
-        </p:txBody>
-      </p:sp>
-      <p:pic>
-        <p:nvPicPr>
-          <p:cNvPr id="17" name="Image 4" descr="/home/claude/groupA_pptx/icon_warning.png"/>
-          <p:cNvPicPr>
-            <a:picLocks noChangeAspect="1"/>
-          </p:cNvPicPr>
-          <p:nvPr/>
-        </p:nvPicPr>
-        <p:blipFill>
-          <a:blip r:embed="rId3"/>
-          <a:stretch>
-            <a:fillRect/>
-          </a:stretch>
-        </p:blipFill>
-        <p:spPr>
-          <a:xfrm>
-            <a:off x="1210437" y="5572125"/>
-            <a:ext cx="276606" cy="276606"/>
-          </a:xfrm>
-          <a:prstGeom prst="rect">
-            <a:avLst/>
-          </a:prstGeom>
-        </p:spPr>
-      </p:pic>
-      <p:sp>
-        <p:nvSpPr>
-          <p:cNvPr id="18" name="Text 11"/>
-          <p:cNvSpPr/>
-          <p:nvPr/>
-        </p:nvSpPr>
-        <p:spPr>
-          <a:xfrm>
-            <a:off x="1828800" y="5413248"/>
-            <a:ext cx="8686800" cy="594360"/>
-          </a:xfrm>
-          <a:prstGeom prst="rect">
-            <a:avLst/>
-          </a:prstGeom>
-          <a:noFill/>
-          <a:ln/>
-        </p:spPr>
-        <p:txBody>
-          <a:bodyPr wrap="square" lIns="0" tIns="0" rIns="0" bIns="0" rtlCol="0" anchor="ctr"/>
-          <a:lstStyle/>
-          <a:p>
-            <a:pPr marL="0" indent="0">
-              <a:buNone/>
-            </a:pPr>
-            <a:r>
-              <a:rPr lang="en-US" sz="1500" dirty="0">
-                <a:solidFill>
-                  <a:srgbClr val="FFFFFF"/>
-                </a:solidFill>
-                <a:latin typeface="Calibri" pitchFamily="34" charset="0"/>
-                <a:ea typeface="Calibri" pitchFamily="34" charset="-122"/>
-                <a:cs typeface="Calibri" pitchFamily="34" charset="-120"/>
-              </a:rPr>
-              <a:t>Intégration des parties développées par chaque membre</a:t>
-            </a:r>
-            <a:endParaRPr lang="en-US" sz="1500" dirty="0"/>
-          </a:p>
-        </p:txBody>
-      </p:sp>
-      <p:sp>
-        <p:nvSpPr>
-          <p:cNvPr id="19" name="Text 12"/>
-          <p:cNvSpPr/>
-          <p:nvPr/>
-        </p:nvSpPr>
-        <p:spPr>
-          <a:xfrm>
-            <a:off x="457200" y="6473952"/>
-            <a:ext cx="6400800" cy="274320"/>
-          </a:xfrm>
-          <a:prstGeom prst="rect">
-            <a:avLst/>
-          </a:prstGeom>
-          <a:noFill/>
-          <a:ln/>
-        </p:spPr>
-        <p:txBody>
-          <a:bodyPr wrap="square" lIns="0" tIns="0" rIns="0" bIns="0" rtlCol="0" anchor="ctr"/>
-          <a:lstStyle/>
-          <a:p>
-            <a:pPr marL="0" indent="0" algn="l">
-              <a:buNone/>
-            </a:pPr>
-            <a:r>
-              <a:rPr lang="en-US" sz="900" dirty="0">
-                <a:solidFill>
-                  <a:srgbClr val="9FB7C4"/>
-                </a:solidFill>
-                <a:latin typeface="Calibri" pitchFamily="34" charset="0"/>
-                <a:ea typeface="Calibri" pitchFamily="34" charset="-122"/>
-                <a:cs typeface="Calibri" pitchFamily="34" charset="-120"/>
-              </a:rPr>
-              <a:t>Groupe A — Acquisition et analyse de signal</a:t>
-            </a:r>
-            <a:endParaRPr lang="en-US" sz="900" dirty="0"/>
-          </a:p>
-        </p:txBody>
-      </p:sp>
-      <p:sp>
-        <p:nvSpPr>
-          <p:cNvPr id="20" name="Text 13"/>
-          <p:cNvSpPr/>
-          <p:nvPr/>
-        </p:nvSpPr>
-        <p:spPr>
-          <a:xfrm>
-            <a:off x="11274552" y="6473952"/>
-            <a:ext cx="457200" cy="274320"/>
-          </a:xfrm>
-          <a:prstGeom prst="rect">
-            <a:avLst/>
-          </a:prstGeom>
-          <a:noFill/>
-          <a:ln/>
-        </p:spPr>
-        <p:txBody>
-          <a:bodyPr wrap="square" lIns="0" tIns="0" rIns="0" bIns="0" rtlCol="0" anchor="ctr"/>
-          <a:lstStyle/>
-          <a:p>
-            <a:pPr marL="0" indent="0" algn="r">
-              <a:buNone/>
-            </a:pPr>
-            <a:r>
-              <a:rPr lang="en-US" sz="900" dirty="0">
-                <a:solidFill>
-                  <a:srgbClr val="9FB7C4"/>
-                </a:solidFill>
-                <a:latin typeface="Calibri" pitchFamily="34" charset="0"/>
-                <a:ea typeface="Calibri" pitchFamily="34" charset="-122"/>
-                <a:cs typeface="Calibri" pitchFamily="34" charset="-120"/>
-              </a:rPr>
-              <a:t>8</a:t>
-            </a:r>
-            <a:endParaRPr lang="en-US" sz="900" dirty="0"/>
+            <a:endParaRPr lang="fr-FR" sz="900" noProof="0" dirty="0"/>
           </a:p>
         </p:txBody>
       </p:sp>
